--- a/tests/fixtures/report_baseline/normal/golden.pptx
+++ b/tests/fixtures/report_baseline/normal/golden.pptx
@@ -16,7 +16,6 @@
     <p:sldId id="264" r:id="rId15"/>
     <p:sldId id="265" r:id="rId16"/>
     <p:sldId id="266" r:id="rId17"/>
-    <p:sldId id="267" r:id="rId18"/>
   </p:sldIdLst>
   <p:sldSz cx="9144000" cy="6858000" type="screen4x3"/>
   <p:notesSz cx="6858000" cy="9144000"/>
@@ -3367,14 +3366,6 @@
 <file path=ppt/slides/slide11.xml><?xml version="1.0" encoding="utf-8"?>
 <p:sld xmlns:a="http://schemas.openxmlformats.org/drawingml/2006/main" xmlns:p="http://schemas.openxmlformats.org/presentationml/2006/main" xmlns:r="http://schemas.openxmlformats.org/officeDocument/2006/relationships">
   <p:cSld>
-    <p:bg>
-      <p:bgPr>
-        <a:solidFill>
-          <a:srgbClr val="1E3A5F"/>
-        </a:solidFill>
-        <a:effectLst/>
-      </p:bgPr>
-    </p:bg>
     <p:spTree>
       <p:nvGrpSpPr>
         <p:cNvPr id="1" name=""/>
@@ -3384,50 +3375,14 @@
       <p:grpSpPr/>
       <p:sp>
         <p:nvSpPr>
-          <p:cNvPr id="2" name="TextBox 1"/>
-          <p:cNvSpPr txBox="1"/>
-          <p:nvPr/>
-        </p:nvSpPr>
-        <p:spPr>
-          <a:xfrm>
-            <a:off x="457200" y="274320"/>
-            <a:ext cx="8229600" cy="731520"/>
-          </a:xfrm>
-          <a:prstGeom prst="rect">
-            <a:avLst/>
-          </a:prstGeom>
-          <a:noFill/>
-        </p:spPr>
-        <p:txBody>
-          <a:bodyPr wrap="square">
-            <a:spAutoFit/>
-          </a:bodyPr>
-          <a:lstStyle/>
-          <a:p>
-            <a:pPr algn="ctr">
-              <a:defRPr sz="2400" b="1">
-                <a:solidFill>
-                  <a:srgbClr val="FFFFFF"/>
-                </a:solidFill>
-                <a:latin typeface="Microsoft YaHei"/>
-              </a:defRPr>
-            </a:pPr>
-            <a:r>
-              <a:t>核心结论与建议</a:t>
-            </a:r>
-          </a:p>
-        </p:txBody>
-      </p:sp>
-      <p:sp>
-        <p:nvSpPr>
-          <p:cNvPr id="3" name="Rectangle 2"/>
+          <p:cNvPr id="2" name="Rectangle 1"/>
           <p:cNvSpPr/>
           <p:nvPr/>
         </p:nvSpPr>
         <p:spPr>
           <a:xfrm>
-            <a:off x="3200400" y="1005840"/>
-            <a:ext cx="2743200" cy="54864"/>
+            <a:off x="274320" y="274320"/>
+            <a:ext cx="73152" cy="6309360"/>
           </a:xfrm>
           <a:prstGeom prst="rect">
             <a:avLst/>
@@ -3463,14 +3418,14 @@
       </p:sp>
       <p:sp>
         <p:nvSpPr>
-          <p:cNvPr id="4" name="TextBox 3"/>
+          <p:cNvPr id="3" name="TextBox 2"/>
           <p:cNvSpPr txBox="1"/>
           <p:nvPr/>
         </p:nvSpPr>
         <p:spPr>
           <a:xfrm>
-            <a:off x="914400" y="1371600"/>
-            <a:ext cx="7315200" cy="731520"/>
+            <a:off x="548640" y="274320"/>
+            <a:ext cx="8229600" cy="731520"/>
           </a:xfrm>
           <a:prstGeom prst="rect">
             <a:avLst/>
@@ -3484,55 +3439,29 @@
           <a:lstStyle/>
           <a:p>
             <a:pPr algn="l">
-              <a:defRPr sz="1400" b="0">
+              <a:defRPr sz="1800" b="1">
                 <a:solidFill>
-                  <a:srgbClr val="FFFFFF"/>
+                  <a:srgbClr val="1E3A5F"/>
                 </a:solidFill>
                 <a:latin typeface="Microsoft YaHei"/>
               </a:defRPr>
             </a:pPr>
             <a:r>
-              <a:t>  三港区集装箱吞吐量整体稳健增长，大连港持续领跑。</a:t>
-            </a:r>
-          </a:p>
-        </p:txBody>
-      </p:sp>
-    </p:spTree>
-  </p:cSld>
-  <p:clrMapOvr>
-    <a:masterClrMapping/>
-  </p:clrMapOvr>
-</p:sld>
-</file>
-
-<file path=ppt/slides/slide12.xml><?xml version="1.0" encoding="utf-8"?>
-<p:sld xmlns:a="http://schemas.openxmlformats.org/drawingml/2006/main" xmlns:p="http://schemas.openxmlformats.org/presentationml/2006/main" xmlns:r="http://schemas.openxmlformats.org/officeDocument/2006/relationships">
-  <p:cSld>
-    <p:bg>
-      <p:bgPr>
-        <a:solidFill>
-          <a:srgbClr val="1E3A5F"/>
-        </a:solidFill>
-        <a:effectLst/>
-      </p:bgPr>
-    </p:bg>
-    <p:spTree>
-      <p:nvGrpSpPr>
-        <p:cNvPr id="1" name=""/>
-        <p:cNvGrpSpPr/>
-        <p:nvPr/>
-      </p:nvGrpSpPr>
-      <p:grpSpPr/>
-      <p:sp>
-        <p:nvSpPr>
-          <p:cNvPr id="2" name="TextBox 1"/>
+              <a:t>三、综合结论</a:t>
+            </a:r>
+          </a:p>
+        </p:txBody>
+      </p:sp>
+      <p:sp>
+        <p:nvSpPr>
+          <p:cNvPr id="4" name="TextBox 3"/>
           <p:cNvSpPr txBox="1"/>
           <p:nvPr/>
         </p:nvSpPr>
         <p:spPr>
           <a:xfrm>
-            <a:off x="914400" y="2286000"/>
-            <a:ext cx="7315200" cy="1371600"/>
+            <a:off x="731520" y="1188720"/>
+            <a:ext cx="7863840" cy="5303520"/>
           </a:xfrm>
           <a:prstGeom prst="rect">
             <a:avLst/>
@@ -3545,95 +3474,19 @@
           </a:bodyPr>
           <a:lstStyle/>
           <a:p>
-            <a:pPr algn="ctr">
-              <a:defRPr sz="2800" b="1">
+            <a:pPr>
+              <a:spcBef>
+                <a:spcPts val="600"/>
+              </a:spcBef>
+              <a:defRPr sz="1400">
                 <a:solidFill>
-                  <a:srgbClr val="FFFFFF"/>
+                  <a:srgbClr val="333333"/>
                 </a:solidFill>
                 <a:latin typeface="Microsoft YaHei"/>
               </a:defRPr>
             </a:pPr>
             <a:r>
-              <a:t>谢谢观看</a:t>
-            </a:r>
-          </a:p>
-        </p:txBody>
-      </p:sp>
-      <p:sp>
-        <p:nvSpPr>
-          <p:cNvPr id="3" name="Rectangle 2"/>
-          <p:cNvSpPr/>
-          <p:nvPr/>
-        </p:nvSpPr>
-        <p:spPr>
-          <a:xfrm>
-            <a:off x="3657600" y="3657600"/>
-            <a:ext cx="1828800" cy="54864"/>
-          </a:xfrm>
-          <a:prstGeom prst="rect">
-            <a:avLst/>
-          </a:prstGeom>
-          <a:solidFill>
-            <a:srgbClr val="F0A500"/>
-          </a:solidFill>
-          <a:ln>
-            <a:noFill/>
-          </a:ln>
-        </p:spPr>
-        <p:style>
-          <a:lnRef idx="1">
-            <a:schemeClr val="accent1"/>
-          </a:lnRef>
-          <a:fillRef idx="3">
-            <a:schemeClr val="accent1"/>
-          </a:fillRef>
-          <a:effectRef idx="2">
-            <a:schemeClr val="accent1"/>
-          </a:effectRef>
-          <a:fontRef idx="minor">
-            <a:schemeClr val="lt1"/>
-          </a:fontRef>
-        </p:style>
-        <p:txBody>
-          <a:bodyPr rtlCol="0" anchor="ctr"/>
-          <a:lstStyle/>
-          <a:p>
-            <a:pPr algn="ctr"/>
-          </a:p>
-        </p:txBody>
-      </p:sp>
-      <p:sp>
-        <p:nvSpPr>
-          <p:cNvPr id="4" name="TextBox 3"/>
-          <p:cNvSpPr txBox="1"/>
-          <p:nvPr/>
-        </p:nvSpPr>
-        <p:spPr>
-          <a:xfrm>
-            <a:off x="914400" y="4114800"/>
-            <a:ext cx="7315200" cy="914400"/>
-          </a:xfrm>
-          <a:prstGeom prst="rect">
-            <a:avLst/>
-          </a:prstGeom>
-          <a:noFill/>
-        </p:spPr>
-        <p:txBody>
-          <a:bodyPr wrap="square">
-            <a:spAutoFit/>
-          </a:bodyPr>
-          <a:lstStyle/>
-          <a:p>
-            <a:pPr algn="ctr">
-              <a:defRPr sz="1800" b="0">
-                <a:solidFill>
-                  <a:srgbClr val="F0A500"/>
-                </a:solidFill>
-                <a:latin typeface="Calibri"/>
-              </a:defRPr>
-            </a:pPr>
-            <a:r>
-              <a:t>THANK YOU</a:t>
+              <a:t>三港区集装箱吞吐量整体稳健增长，大连港持续领跑。</a:t>
             </a:r>
           </a:p>
         </p:txBody>
@@ -4508,6 +4361,142 @@
 </file>
 
 <file path=ppt/slides/slide5.xml><?xml version="1.0" encoding="utf-8"?>
+<p:sld xmlns:a="http://schemas.openxmlformats.org/drawingml/2006/main" xmlns:p="http://schemas.openxmlformats.org/presentationml/2006/main" xmlns:r="http://schemas.openxmlformats.org/officeDocument/2006/relationships">
+  <p:cSld>
+    <p:spTree>
+      <p:nvGrpSpPr>
+        <p:cNvPr id="1" name=""/>
+        <p:cNvGrpSpPr/>
+        <p:nvPr/>
+      </p:nvGrpSpPr>
+      <p:grpSpPr/>
+      <p:sp>
+        <p:nvSpPr>
+          <p:cNvPr id="2" name="Rectangle 1"/>
+          <p:cNvSpPr/>
+          <p:nvPr/>
+        </p:nvSpPr>
+        <p:spPr>
+          <a:xfrm>
+            <a:off x="274320" y="274320"/>
+            <a:ext cx="73152" cy="6309360"/>
+          </a:xfrm>
+          <a:prstGeom prst="rect">
+            <a:avLst/>
+          </a:prstGeom>
+          <a:solidFill>
+            <a:srgbClr val="F0A500"/>
+          </a:solidFill>
+          <a:ln>
+            <a:noFill/>
+          </a:ln>
+        </p:spPr>
+        <p:style>
+          <a:lnRef idx="1">
+            <a:schemeClr val="accent1"/>
+          </a:lnRef>
+          <a:fillRef idx="3">
+            <a:schemeClr val="accent1"/>
+          </a:fillRef>
+          <a:effectRef idx="2">
+            <a:schemeClr val="accent1"/>
+          </a:effectRef>
+          <a:fontRef idx="minor">
+            <a:schemeClr val="lt1"/>
+          </a:fontRef>
+        </p:style>
+        <p:txBody>
+          <a:bodyPr rtlCol="0" anchor="ctr"/>
+          <a:lstStyle/>
+          <a:p>
+            <a:pPr algn="ctr"/>
+          </a:p>
+        </p:txBody>
+      </p:sp>
+      <p:sp>
+        <p:nvSpPr>
+          <p:cNvPr id="3" name="TextBox 2"/>
+          <p:cNvSpPr txBox="1"/>
+          <p:nvPr/>
+        </p:nvSpPr>
+        <p:spPr>
+          <a:xfrm>
+            <a:off x="548640" y="274320"/>
+            <a:ext cx="8229600" cy="731520"/>
+          </a:xfrm>
+          <a:prstGeom prst="rect">
+            <a:avLst/>
+          </a:prstGeom>
+          <a:noFill/>
+        </p:spPr>
+        <p:txBody>
+          <a:bodyPr wrap="square">
+            <a:spAutoFit/>
+          </a:bodyPr>
+          <a:lstStyle/>
+          <a:p>
+            <a:pPr algn="l">
+              <a:defRPr sz="1800" b="1">
+                <a:solidFill>
+                  <a:srgbClr val="1E3A5F"/>
+                </a:solidFill>
+                <a:latin typeface="Microsoft YaHei"/>
+              </a:defRPr>
+            </a:pPr>
+            <a:r>
+              <a:t>一、港区吞吐量现状</a:t>
+            </a:r>
+          </a:p>
+        </p:txBody>
+      </p:sp>
+      <p:sp>
+        <p:nvSpPr>
+          <p:cNvPr id="4" name="TextBox 3"/>
+          <p:cNvSpPr txBox="1"/>
+          <p:nvPr/>
+        </p:nvSpPr>
+        <p:spPr>
+          <a:xfrm>
+            <a:off x="731520" y="1188720"/>
+            <a:ext cx="7863840" cy="5303520"/>
+          </a:xfrm>
+          <a:prstGeom prst="rect">
+            <a:avLst/>
+          </a:prstGeom>
+          <a:noFill/>
+        </p:spPr>
+        <p:txBody>
+          <a:bodyPr wrap="square">
+            <a:spAutoFit/>
+          </a:bodyPr>
+          <a:lstStyle/>
+          <a:p>
+            <a:pPr>
+              <a:spcBef>
+                <a:spcPts val="600"/>
+              </a:spcBef>
+              <a:defRPr sz="1400">
+                <a:solidFill>
+                  <a:srgbClr val="333333"/>
+                </a:solidFill>
+                <a:latin typeface="Microsoft YaHei"/>
+              </a:defRPr>
+            </a:pPr>
+            <a:r>
+              <a:t>2026 Q1 大连港吞吐量达 4500.5 万吨，同比增长 12%，居三港之首；营口港 3200.1 万吨，锦州港 1800.0 万吨。</a:t>
+            </a:r>
+          </a:p>
+        </p:txBody>
+      </p:sp>
+    </p:spTree>
+  </p:cSld>
+  <p:clrMapOvr>
+    <a:masterClrMapping/>
+  </p:clrMapOvr>
+</p:sld>
+</file>
+
+<file path=ppt/slides/slide6.xml><?xml version="1.0" encoding="utf-8"?>
 <p:sld xmlns:a="http://schemas.openxmlformats.org/drawingml/2006/main" xmlns:p="http://schemas.openxmlformats.org/presentationml/2006/main" xmlns:r="http://schemas.openxmlformats.org/officeDocument/2006/relationships">
   <p:cSld>
     <p:spTree>
@@ -4751,7 +4740,7 @@
 </p:sld>
 </file>
 
-<file path=ppt/slides/slide6.xml><?xml version="1.0" encoding="utf-8"?>
+<file path=ppt/slides/slide7.xml><?xml version="1.0" encoding="utf-8"?>
 <p:sld xmlns:a="http://schemas.openxmlformats.org/drawingml/2006/main" xmlns:p="http://schemas.openxmlformats.org/presentationml/2006/main" xmlns:r="http://schemas.openxmlformats.org/officeDocument/2006/relationships">
   <p:cSld>
     <p:bg>
@@ -4881,283 +4870,6 @@
           <a:lstStyle/>
           <a:p>
             <a:pPr algn="ctr"/>
-          </a:p>
-        </p:txBody>
-      </p:sp>
-    </p:spTree>
-  </p:cSld>
-  <p:clrMapOvr>
-    <a:masterClrMapping/>
-  </p:clrMapOvr>
-</p:sld>
-</file>
-
-<file path=ppt/slides/slide7.xml><?xml version="1.0" encoding="utf-8"?>
-<p:sld xmlns:a="http://schemas.openxmlformats.org/drawingml/2006/main" xmlns:p="http://schemas.openxmlformats.org/presentationml/2006/main" xmlns:r="http://schemas.openxmlformats.org/officeDocument/2006/relationships">
-  <p:cSld>
-    <p:spTree>
-      <p:nvGrpSpPr>
-        <p:cNvPr id="1" name=""/>
-        <p:cNvGrpSpPr/>
-        <p:nvPr/>
-      </p:nvGrpSpPr>
-      <p:grpSpPr/>
-      <p:sp>
-        <p:nvSpPr>
-          <p:cNvPr id="2" name="TextBox 1"/>
-          <p:cNvSpPr txBox="1"/>
-          <p:nvPr/>
-        </p:nvSpPr>
-        <p:spPr>
-          <a:xfrm>
-            <a:off x="457200" y="274320"/>
-            <a:ext cx="8229600" cy="731520"/>
-          </a:xfrm>
-          <a:prstGeom prst="rect">
-            <a:avLst/>
-          </a:prstGeom>
-          <a:noFill/>
-        </p:spPr>
-        <p:txBody>
-          <a:bodyPr wrap="square">
-            <a:spAutoFit/>
-          </a:bodyPr>
-          <a:lstStyle/>
-          <a:p>
-            <a:pPr algn="ctr">
-              <a:defRPr sz="1800" b="1">
-                <a:solidFill>
-                  <a:srgbClr val="1E3A5F"/>
-                </a:solidFill>
-                <a:latin typeface="Microsoft YaHei"/>
-              </a:defRPr>
-            </a:pPr>
-            <a:r>
-              <a:t>二、关键指标分析</a:t>
-            </a:r>
-          </a:p>
-        </p:txBody>
-      </p:sp>
-      <p:sp>
-        <p:nvSpPr>
-          <p:cNvPr id="3" name="Rectangle 2"/>
-          <p:cNvSpPr/>
-          <p:nvPr/>
-        </p:nvSpPr>
-        <p:spPr>
-          <a:xfrm>
-            <a:off x="1051560" y="1463040"/>
-            <a:ext cx="7040880" cy="4114800"/>
-          </a:xfrm>
-          <a:prstGeom prst="rect">
-            <a:avLst/>
-          </a:prstGeom>
-          <a:solidFill>
-            <a:srgbClr val="F5F7FA"/>
-          </a:solidFill>
-          <a:ln>
-            <a:noFill/>
-          </a:ln>
-        </p:spPr>
-        <p:style>
-          <a:lnRef idx="1">
-            <a:schemeClr val="accent1"/>
-          </a:lnRef>
-          <a:fillRef idx="3">
-            <a:schemeClr val="accent1"/>
-          </a:fillRef>
-          <a:effectRef idx="2">
-            <a:schemeClr val="accent1"/>
-          </a:effectRef>
-          <a:fontRef idx="minor">
-            <a:schemeClr val="lt1"/>
-          </a:fontRef>
-        </p:style>
-        <p:txBody>
-          <a:bodyPr rtlCol="0" anchor="ctr"/>
-          <a:lstStyle/>
-          <a:p>
-            <a:pPr algn="ctr"/>
-          </a:p>
-        </p:txBody>
-      </p:sp>
-      <p:sp>
-        <p:nvSpPr>
-          <p:cNvPr id="4" name="TextBox 3"/>
-          <p:cNvSpPr txBox="1"/>
-          <p:nvPr/>
-        </p:nvSpPr>
-        <p:spPr>
-          <a:xfrm>
-            <a:off x="1188720" y="1645920"/>
-            <a:ext cx="6766560" cy="548640"/>
-          </a:xfrm>
-          <a:prstGeom prst="rect">
-            <a:avLst/>
-          </a:prstGeom>
-          <a:noFill/>
-        </p:spPr>
-        <p:txBody>
-          <a:bodyPr wrap="square">
-            <a:spAutoFit/>
-          </a:bodyPr>
-          <a:lstStyle/>
-          <a:p>
-            <a:pPr algn="ctr">
-              <a:defRPr sz="1100" b="1">
-                <a:solidFill>
-                  <a:srgbClr val="546E7A"/>
-                </a:solidFill>
-                <a:latin typeface="Microsoft YaHei"/>
-              </a:defRPr>
-            </a:pPr>
-            <a:r>
-              <a:t>throughput</a:t>
-            </a:r>
-          </a:p>
-        </p:txBody>
-      </p:sp>
-      <p:sp>
-        <p:nvSpPr>
-          <p:cNvPr id="5" name="TextBox 4"/>
-          <p:cNvSpPr txBox="1"/>
-          <p:nvPr/>
-        </p:nvSpPr>
-        <p:spPr>
-          <a:xfrm>
-            <a:off x="1188720" y="2377440"/>
-            <a:ext cx="6766560" cy="1097280"/>
-          </a:xfrm>
-          <a:prstGeom prst="rect">
-            <a:avLst/>
-          </a:prstGeom>
-          <a:noFill/>
-        </p:spPr>
-        <p:txBody>
-          <a:bodyPr wrap="square">
-            <a:spAutoFit/>
-          </a:bodyPr>
-          <a:lstStyle/>
-          <a:p>
-            <a:pPr algn="ctr">
-              <a:defRPr sz="3600" b="1">
-                <a:solidFill>
-                  <a:srgbClr val="2E7D32"/>
-                </a:solidFill>
-                <a:latin typeface="Calibri"/>
-              </a:defRPr>
-            </a:pPr>
-            <a:r>
-              <a:t>↑12.0%</a:t>
-            </a:r>
-          </a:p>
-        </p:txBody>
-      </p:sp>
-      <p:sp>
-        <p:nvSpPr>
-          <p:cNvPr id="6" name="TextBox 5"/>
-          <p:cNvSpPr txBox="1"/>
-          <p:nvPr/>
-        </p:nvSpPr>
-        <p:spPr>
-          <a:xfrm>
-            <a:off x="1188720" y="3474720"/>
-            <a:ext cx="6766560" cy="457200"/>
-          </a:xfrm>
-          <a:prstGeom prst="rect">
-            <a:avLst/>
-          </a:prstGeom>
-          <a:noFill/>
-        </p:spPr>
-        <p:txBody>
-          <a:bodyPr wrap="square">
-            <a:spAutoFit/>
-          </a:bodyPr>
-          <a:lstStyle/>
-          <a:p>
-            <a:pPr algn="ctr">
-              <a:defRPr sz="1100" b="0">
-                <a:solidFill>
-                  <a:srgbClr val="546E7A"/>
-                </a:solidFill>
-                <a:latin typeface="Microsoft YaHei"/>
-              </a:defRPr>
-            </a:pPr>
-            <a:r>
-              <a:t>同比</a:t>
-            </a:r>
-          </a:p>
-        </p:txBody>
-      </p:sp>
-      <p:sp>
-        <p:nvSpPr>
-          <p:cNvPr id="7" name="TextBox 6"/>
-          <p:cNvSpPr txBox="1"/>
-          <p:nvPr/>
-        </p:nvSpPr>
-        <p:spPr>
-          <a:xfrm>
-            <a:off x="1188720" y="4023360"/>
-            <a:ext cx="6766560" cy="914400"/>
-          </a:xfrm>
-          <a:prstGeom prst="rect">
-            <a:avLst/>
-          </a:prstGeom>
-          <a:noFill/>
-        </p:spPr>
-        <p:txBody>
-          <a:bodyPr wrap="square">
-            <a:spAutoFit/>
-          </a:bodyPr>
-          <a:lstStyle/>
-          <a:p>
-            <a:pPr algn="ctr">
-              <a:defRPr sz="2400" b="1">
-                <a:solidFill>
-                  <a:srgbClr val="2E7D32"/>
-                </a:solidFill>
-                <a:latin typeface="Calibri"/>
-              </a:defRPr>
-            </a:pPr>
-            <a:r>
-              <a:t>↑3.0%</a:t>
-            </a:r>
-          </a:p>
-        </p:txBody>
-      </p:sp>
-      <p:sp>
-        <p:nvSpPr>
-          <p:cNvPr id="8" name="TextBox 7"/>
-          <p:cNvSpPr txBox="1"/>
-          <p:nvPr/>
-        </p:nvSpPr>
-        <p:spPr>
-          <a:xfrm>
-            <a:off x="1188720" y="4937760"/>
-            <a:ext cx="6766560" cy="457200"/>
-          </a:xfrm>
-          <a:prstGeom prst="rect">
-            <a:avLst/>
-          </a:prstGeom>
-          <a:noFill/>
-        </p:spPr>
-        <p:txBody>
-          <a:bodyPr wrap="square">
-            <a:spAutoFit/>
-          </a:bodyPr>
-          <a:lstStyle/>
-          <a:p>
-            <a:pPr algn="ctr">
-              <a:defRPr sz="1100" b="0">
-                <a:solidFill>
-                  <a:srgbClr val="546E7A"/>
-                </a:solidFill>
-                <a:latin typeface="Microsoft YaHei"/>
-              </a:defRPr>
-            </a:pPr>
-            <a:r>
-              <a:t>环比</a:t>
-            </a:r>
           </a:p>
         </p:txBody>
       </p:sp>
@@ -5188,7 +4900,7 @@
         <p:spPr>
           <a:xfrm>
             <a:off x="457200" y="274320"/>
-            <a:ext cx="8229600" cy="640080"/>
+            <a:ext cx="8229600" cy="731520"/>
           </a:xfrm>
           <a:prstGeom prst="rect">
             <a:avLst/>
@@ -5201,7 +4913,7 @@
           </a:bodyPr>
           <a:lstStyle/>
           <a:p>
-            <a:pPr algn="l">
+            <a:pPr algn="ctr">
               <a:defRPr sz="1800" b="1">
                 <a:solidFill>
                   <a:srgbClr val="1E3A5F"/>
@@ -5223,14 +4935,14 @@
         </p:nvSpPr>
         <p:spPr>
           <a:xfrm>
-            <a:off x="4526280" y="1097280"/>
-            <a:ext cx="45720" cy="5303520"/>
+            <a:off x="1051560" y="1463040"/>
+            <a:ext cx="7040880" cy="4114800"/>
           </a:xfrm>
           <a:prstGeom prst="rect">
             <a:avLst/>
           </a:prstGeom>
           <a:solidFill>
-            <a:srgbClr val="F0A500"/>
+            <a:srgbClr val="F5F7FA"/>
           </a:solidFill>
           <a:ln>
             <a:noFill/>
@@ -5266,8 +4978,8 @@
         </p:nvSpPr>
         <p:spPr>
           <a:xfrm>
-            <a:off x="457200" y="1188720"/>
-            <a:ext cx="3931920" cy="5212080"/>
+            <a:off x="1188720" y="1645920"/>
+            <a:ext cx="6766560" cy="548640"/>
           </a:xfrm>
           <a:prstGeom prst="rect">
             <a:avLst/>
@@ -5280,19 +4992,16 @@
           </a:bodyPr>
           <a:lstStyle/>
           <a:p>
-            <a:pPr>
-              <a:spcBef>
-                <a:spcPts val="400"/>
-              </a:spcBef>
-              <a:defRPr sz="1300">
+            <a:pPr algn="ctr">
+              <a:defRPr sz="1100" b="1">
                 <a:solidFill>
-                  <a:srgbClr val="333333"/>
+                  <a:srgbClr val="546E7A"/>
                 </a:solidFill>
                 <a:latin typeface="Microsoft YaHei"/>
               </a:defRPr>
             </a:pPr>
             <a:r>
-              <a:t>2026 Q1 大连港吞吐量达 4500.5 万吨，同比增长 12%，居三港之首；营口港 3200.1 万吨，锦州港 1800.0 万吨。</a:t>
+              <a:t>throughput</a:t>
             </a:r>
           </a:p>
         </p:txBody>
@@ -5305,8 +5014,8 @@
         </p:nvSpPr>
         <p:spPr>
           <a:xfrm>
-            <a:off x="4754880" y="1188720"/>
-            <a:ext cx="3931920" cy="5212080"/>
+            <a:off x="1188720" y="2377440"/>
+            <a:ext cx="6766560" cy="1097280"/>
           </a:xfrm>
           <a:prstGeom prst="rect">
             <a:avLst/>
@@ -5319,19 +5028,124 @@
           </a:bodyPr>
           <a:lstStyle/>
           <a:p>
-            <a:pPr>
-              <a:spcBef>
-                <a:spcPts val="400"/>
-              </a:spcBef>
-              <a:defRPr sz="1300">
+            <a:pPr algn="ctr">
+              <a:defRPr sz="3600" b="1">
                 <a:solidFill>
-                  <a:srgbClr val="333333"/>
+                  <a:srgbClr val="2E7D32"/>
+                </a:solidFill>
+                <a:latin typeface="Calibri"/>
+              </a:defRPr>
+            </a:pPr>
+            <a:r>
+              <a:t>↑12.0%</a:t>
+            </a:r>
+          </a:p>
+        </p:txBody>
+      </p:sp>
+      <p:sp>
+        <p:nvSpPr>
+          <p:cNvPr id="6" name="TextBox 5"/>
+          <p:cNvSpPr txBox="1"/>
+          <p:nvPr/>
+        </p:nvSpPr>
+        <p:spPr>
+          <a:xfrm>
+            <a:off x="1188720" y="3474720"/>
+            <a:ext cx="6766560" cy="457200"/>
+          </a:xfrm>
+          <a:prstGeom prst="rect">
+            <a:avLst/>
+          </a:prstGeom>
+          <a:noFill/>
+        </p:spPr>
+        <p:txBody>
+          <a:bodyPr wrap="square">
+            <a:spAutoFit/>
+          </a:bodyPr>
+          <a:lstStyle/>
+          <a:p>
+            <a:pPr algn="ctr">
+              <a:defRPr sz="1100" b="0">
+                <a:solidFill>
+                  <a:srgbClr val="546E7A"/>
                 </a:solidFill>
                 <a:latin typeface="Microsoft YaHei"/>
               </a:defRPr>
             </a:pPr>
             <a:r>
-              <a:t>throughput：均值 3,166.87</a:t>
+              <a:t>同比</a:t>
+            </a:r>
+          </a:p>
+        </p:txBody>
+      </p:sp>
+      <p:sp>
+        <p:nvSpPr>
+          <p:cNvPr id="7" name="TextBox 6"/>
+          <p:cNvSpPr txBox="1"/>
+          <p:nvPr/>
+        </p:nvSpPr>
+        <p:spPr>
+          <a:xfrm>
+            <a:off x="1188720" y="4023360"/>
+            <a:ext cx="6766560" cy="914400"/>
+          </a:xfrm>
+          <a:prstGeom prst="rect">
+            <a:avLst/>
+          </a:prstGeom>
+          <a:noFill/>
+        </p:spPr>
+        <p:txBody>
+          <a:bodyPr wrap="square">
+            <a:spAutoFit/>
+          </a:bodyPr>
+          <a:lstStyle/>
+          <a:p>
+            <a:pPr algn="ctr">
+              <a:defRPr sz="2400" b="1">
+                <a:solidFill>
+                  <a:srgbClr val="2E7D32"/>
+                </a:solidFill>
+                <a:latin typeface="Calibri"/>
+              </a:defRPr>
+            </a:pPr>
+            <a:r>
+              <a:t>↑3.0%</a:t>
+            </a:r>
+          </a:p>
+        </p:txBody>
+      </p:sp>
+      <p:sp>
+        <p:nvSpPr>
+          <p:cNvPr id="8" name="TextBox 7"/>
+          <p:cNvSpPr txBox="1"/>
+          <p:nvPr/>
+        </p:nvSpPr>
+        <p:spPr>
+          <a:xfrm>
+            <a:off x="1188720" y="4937760"/>
+            <a:ext cx="6766560" cy="457200"/>
+          </a:xfrm>
+          <a:prstGeom prst="rect">
+            <a:avLst/>
+          </a:prstGeom>
+          <a:noFill/>
+        </p:spPr>
+        <p:txBody>
+          <a:bodyPr wrap="square">
+            <a:spAutoFit/>
+          </a:bodyPr>
+          <a:lstStyle/>
+          <a:p>
+            <a:pPr algn="ctr">
+              <a:defRPr sz="1100" b="0">
+                <a:solidFill>
+                  <a:srgbClr val="546E7A"/>
+                </a:solidFill>
+                <a:latin typeface="Microsoft YaHei"/>
+              </a:defRPr>
+            </a:pPr>
+            <a:r>
+              <a:t>环比</a:t>
             </a:r>
           </a:p>
         </p:txBody>

--- a/tests/fixtures/report_baseline/normal/golden.pptx
+++ b/tests/fixtures/report_baseline/normal/golden.pptx
@@ -16,12 +16,18 @@
     <p:sldId id="264" r:id="rId10"/>
     <p:sldId id="265" r:id="rId11"/>
     <p:sldId id="266" r:id="rId12"/>
+    <p:sldId id="267" r:id="rId13"/>
+    <p:sldId id="268" r:id="rId14"/>
+    <p:sldId id="269" r:id="rId15"/>
+    <p:sldId id="270" r:id="rId16"/>
+    <p:sldId id="271" r:id="rId17"/>
+    <p:sldId id="272" r:id="rId18"/>
   </p:sldIdLst>
   <p:notesMasterIdLst>
-    <p:notesMasterId r:id="rId13"/>
+    <p:notesMasterId r:id="rId19"/>
   </p:notesMasterIdLst>
-  <p:sldSz cx="9144000" cy="6858000"/>
-  <p:notesSz cx="6858000" cy="9144000"/>
+  <p:sldSz cx="12191695" cy="6858000"/>
+  <p:notesSz cx="6858000" cy="12191695"/>
   <p:defaultTextStyle>
     <a:lvl1pPr marL="0" algn="l" defTabSz="914400" rtl="0" eaLnBrk="1" latinLnBrk="0" hangingPunct="1">
       <a:defRPr sz="1800" kern="1200">
@@ -145,7 +151,7 @@
           </c:tx>
           <c:spPr>
             <a:solidFill>
-              <a:srgbClr val="1E3A5F"/>
+              <a:srgbClr val="004889"/>
             </a:solidFill>
             <a:effectLst/>
           </c:spPr>
@@ -255,9 +261,7 @@
         <c:tickLblPos val="low"/>
         <c:spPr>
           <a:ln w="12700" cap="flat">
-            <a:solidFill>
-              <a:srgbClr val="888888"/>
-            </a:solidFill>
+            <a:noFill/>
             <a:prstDash val="solid"/>
             <a:round/>
           </a:ln>
@@ -269,7 +273,7 @@
             <a:pPr>
               <a:defRPr sz="1200" b="0" i="0" u="none" strike="noStrike">
                 <a:solidFill>
-                  <a:srgbClr val="64748B"/>
+                  <a:srgbClr val="000000"/>
                 </a:solidFill>
                 <a:latin typeface="Arial"/>
               </a:defRPr>
@@ -286,7 +290,7 @@
       <c:valAx>
         <c:axId val="2094734552"/>
         <c:scaling>
-          <c:orientation val="minMax"/>
+          <c:orientation val="right"/>
         </c:scaling>
         <c:delete val="0"/>
         <c:axPos val="l"/>
@@ -294,7 +298,7 @@
           <c:spPr>
             <a:ln w="6350" cap="flat">
               <a:solidFill>
-                <a:srgbClr val="E2E8F0"/>
+                <a:srgbClr val="1F1A1219"/>
               </a:solidFill>
               <a:prstDash val="solid"/>
               <a:round/>
@@ -307,9 +311,7 @@
         <c:tickLblPos val="nextTo"/>
         <c:spPr>
           <a:ln w="12700" cap="flat">
-            <a:solidFill>
-              <a:srgbClr val="888888"/>
-            </a:solidFill>
+            <a:noFill/>
             <a:prstDash val="solid"/>
             <a:round/>
           </a:ln>
@@ -321,7 +323,7 @@
             <a:pPr>
               <a:defRPr sz="1200" b="0" i="0" u="none" strike="noStrike">
                 <a:solidFill>
-                  <a:srgbClr val="64748B"/>
+                  <a:srgbClr val="000000"/>
                 </a:solidFill>
                 <a:latin typeface="Arial"/>
               </a:defRPr>
@@ -334,7 +336,9 @@
         <c:crossBetween val="between"/>
       </c:valAx>
       <c:spPr>
-        <a:noFill/>
+        <a:solidFill>
+          <a:srgbClr val="FBF6EE"/>
+        </a:solidFill>
         <a:ln>
           <a:noFill/>
         </a:ln>
@@ -346,7 +350,7 @@
   </c:chart>
   <c:spPr>
     <a:solidFill>
-      <a:srgbClr val="FFFFFF"/>
+      <a:srgbClr val="FBF6EE"/>
     </a:solidFill>
     <a:ln>
       <a:noFill/>
@@ -954,6 +958,534 @@
             <a:fld id="{F7021451-1387-4CA6-816F-3879F97B5CBC}" type="slidenum">
               <a:rPr lang="en-US"/>
               <a:t>11</a:t>
+            </a:fld>
+            <a:endParaRPr lang="en-US"/>
+          </a:p>
+        </p:txBody>
+      </p:sp>
+    </p:spTree>
+    <p:extLst>
+      <p:ext uri="{BB962C8B-B14F-4D97-AF65-F5344CB8AC3E}">
+        <p14:creationId xmlns:p14="http://schemas.microsoft.com/office/powerpoint/2010/main" val="1024086991"/>
+      </p:ext>
+    </p:extLst>
+  </p:cSld>
+  <p:clrMapOvr>
+    <a:masterClrMapping/>
+  </p:clrMapOvr>
+</p:notes>
+</file>
+
+<file path=ppt/notesSlides/notesSlide12.xml><?xml version="1.0" encoding="utf-8"?>
+<p:notes xmlns:a="http://schemas.openxmlformats.org/drawingml/2006/main" xmlns:r="http://schemas.openxmlformats.org/officeDocument/2006/relationships" xmlns:p="http://schemas.openxmlformats.org/presentationml/2006/main">
+  <p:cSld>
+    <p:spTree>
+      <p:nvGrpSpPr>
+        <p:cNvPr id="1" name=""/>
+        <p:cNvGrpSpPr/>
+        <p:nvPr/>
+      </p:nvGrpSpPr>
+      <p:grpSpPr>
+        <a:xfrm>
+          <a:off x="0" y="0"/>
+          <a:ext cx="0" cy="0"/>
+          <a:chOff x="0" y="0"/>
+          <a:chExt cx="0" cy="0"/>
+        </a:xfrm>
+      </p:grpSpPr>
+      <p:sp>
+        <p:nvSpPr>
+          <p:cNvPr id="2" name="Slide Image Placeholder 1"/>
+          <p:cNvSpPr>
+            <a:spLocks noGrp="1" noRot="1" noChangeAspect="1"/>
+          </p:cNvSpPr>
+          <p:nvPr>
+            <p:ph type="sldImg"/>
+          </p:nvPr>
+        </p:nvSpPr>
+        <p:spPr/>
+      </p:sp>
+      <p:sp>
+        <p:nvSpPr>
+          <p:cNvPr id="3" name="Notes Placeholder 2"/>
+          <p:cNvSpPr>
+            <a:spLocks noGrp="1"/>
+          </p:cNvSpPr>
+          <p:nvPr>
+            <p:ph type="body" idx="1"/>
+          </p:nvPr>
+        </p:nvSpPr>
+        <p:spPr/>
+        <p:txBody>
+          <a:bodyPr/>
+          <a:lstStyle/>
+          <a:p>
+            <a:r>
+              <a:rPr lang="en-US" dirty="0"/>
+              <a:t/>
+            </a:r>
+            <a:endParaRPr lang="en-US" dirty="0"/>
+          </a:p>
+        </p:txBody>
+      </p:sp>
+      <p:sp>
+        <p:nvSpPr>
+          <p:cNvPr id="4" name="Slide Number Placeholder 3"/>
+          <p:cNvSpPr>
+            <a:spLocks noGrp="1"/>
+          </p:cNvSpPr>
+          <p:nvPr>
+            <p:ph type="sldNum" sz="quarter" idx="10"/>
+          </p:nvPr>
+        </p:nvSpPr>
+        <p:spPr/>
+        <p:txBody>
+          <a:bodyPr/>
+          <a:lstStyle/>
+          <a:p>
+            <a:fld id="{F7021451-1387-4CA6-816F-3879F97B5CBC}" type="slidenum">
+              <a:rPr lang="en-US"/>
+              <a:t>12</a:t>
+            </a:fld>
+            <a:endParaRPr lang="en-US"/>
+          </a:p>
+        </p:txBody>
+      </p:sp>
+    </p:spTree>
+    <p:extLst>
+      <p:ext uri="{BB962C8B-B14F-4D97-AF65-F5344CB8AC3E}">
+        <p14:creationId xmlns:p14="http://schemas.microsoft.com/office/powerpoint/2010/main" val="1024086991"/>
+      </p:ext>
+    </p:extLst>
+  </p:cSld>
+  <p:clrMapOvr>
+    <a:masterClrMapping/>
+  </p:clrMapOvr>
+</p:notes>
+</file>
+
+<file path=ppt/notesSlides/notesSlide13.xml><?xml version="1.0" encoding="utf-8"?>
+<p:notes xmlns:a="http://schemas.openxmlformats.org/drawingml/2006/main" xmlns:r="http://schemas.openxmlformats.org/officeDocument/2006/relationships" xmlns:p="http://schemas.openxmlformats.org/presentationml/2006/main">
+  <p:cSld>
+    <p:spTree>
+      <p:nvGrpSpPr>
+        <p:cNvPr id="1" name=""/>
+        <p:cNvGrpSpPr/>
+        <p:nvPr/>
+      </p:nvGrpSpPr>
+      <p:grpSpPr>
+        <a:xfrm>
+          <a:off x="0" y="0"/>
+          <a:ext cx="0" cy="0"/>
+          <a:chOff x="0" y="0"/>
+          <a:chExt cx="0" cy="0"/>
+        </a:xfrm>
+      </p:grpSpPr>
+      <p:sp>
+        <p:nvSpPr>
+          <p:cNvPr id="2" name="Slide Image Placeholder 1"/>
+          <p:cNvSpPr>
+            <a:spLocks noGrp="1" noRot="1" noChangeAspect="1"/>
+          </p:cNvSpPr>
+          <p:nvPr>
+            <p:ph type="sldImg"/>
+          </p:nvPr>
+        </p:nvSpPr>
+        <p:spPr/>
+      </p:sp>
+      <p:sp>
+        <p:nvSpPr>
+          <p:cNvPr id="3" name="Notes Placeholder 2"/>
+          <p:cNvSpPr>
+            <a:spLocks noGrp="1"/>
+          </p:cNvSpPr>
+          <p:nvPr>
+            <p:ph type="body" idx="1"/>
+          </p:nvPr>
+        </p:nvSpPr>
+        <p:spPr/>
+        <p:txBody>
+          <a:bodyPr/>
+          <a:lstStyle/>
+          <a:p>
+            <a:r>
+              <a:rPr lang="en-US" dirty="0"/>
+              <a:t/>
+            </a:r>
+            <a:endParaRPr lang="en-US" dirty="0"/>
+          </a:p>
+        </p:txBody>
+      </p:sp>
+      <p:sp>
+        <p:nvSpPr>
+          <p:cNvPr id="4" name="Slide Number Placeholder 3"/>
+          <p:cNvSpPr>
+            <a:spLocks noGrp="1"/>
+          </p:cNvSpPr>
+          <p:nvPr>
+            <p:ph type="sldNum" sz="quarter" idx="10"/>
+          </p:nvPr>
+        </p:nvSpPr>
+        <p:spPr/>
+        <p:txBody>
+          <a:bodyPr/>
+          <a:lstStyle/>
+          <a:p>
+            <a:fld id="{F7021451-1387-4CA6-816F-3879F97B5CBC}" type="slidenum">
+              <a:rPr lang="en-US"/>
+              <a:t>13</a:t>
+            </a:fld>
+            <a:endParaRPr lang="en-US"/>
+          </a:p>
+        </p:txBody>
+      </p:sp>
+    </p:spTree>
+    <p:extLst>
+      <p:ext uri="{BB962C8B-B14F-4D97-AF65-F5344CB8AC3E}">
+        <p14:creationId xmlns:p14="http://schemas.microsoft.com/office/powerpoint/2010/main" val="1024086991"/>
+      </p:ext>
+    </p:extLst>
+  </p:cSld>
+  <p:clrMapOvr>
+    <a:masterClrMapping/>
+  </p:clrMapOvr>
+</p:notes>
+</file>
+
+<file path=ppt/notesSlides/notesSlide14.xml><?xml version="1.0" encoding="utf-8"?>
+<p:notes xmlns:a="http://schemas.openxmlformats.org/drawingml/2006/main" xmlns:r="http://schemas.openxmlformats.org/officeDocument/2006/relationships" xmlns:p="http://schemas.openxmlformats.org/presentationml/2006/main">
+  <p:cSld>
+    <p:spTree>
+      <p:nvGrpSpPr>
+        <p:cNvPr id="1" name=""/>
+        <p:cNvGrpSpPr/>
+        <p:nvPr/>
+      </p:nvGrpSpPr>
+      <p:grpSpPr>
+        <a:xfrm>
+          <a:off x="0" y="0"/>
+          <a:ext cx="0" cy="0"/>
+          <a:chOff x="0" y="0"/>
+          <a:chExt cx="0" cy="0"/>
+        </a:xfrm>
+      </p:grpSpPr>
+      <p:sp>
+        <p:nvSpPr>
+          <p:cNvPr id="2" name="Slide Image Placeholder 1"/>
+          <p:cNvSpPr>
+            <a:spLocks noGrp="1" noRot="1" noChangeAspect="1"/>
+          </p:cNvSpPr>
+          <p:nvPr>
+            <p:ph type="sldImg"/>
+          </p:nvPr>
+        </p:nvSpPr>
+        <p:spPr/>
+      </p:sp>
+      <p:sp>
+        <p:nvSpPr>
+          <p:cNvPr id="3" name="Notes Placeholder 2"/>
+          <p:cNvSpPr>
+            <a:spLocks noGrp="1"/>
+          </p:cNvSpPr>
+          <p:nvPr>
+            <p:ph type="body" idx="1"/>
+          </p:nvPr>
+        </p:nvSpPr>
+        <p:spPr/>
+        <p:txBody>
+          <a:bodyPr/>
+          <a:lstStyle/>
+          <a:p>
+            <a:r>
+              <a:rPr lang="en-US" dirty="0"/>
+              <a:t/>
+            </a:r>
+            <a:endParaRPr lang="en-US" dirty="0"/>
+          </a:p>
+        </p:txBody>
+      </p:sp>
+      <p:sp>
+        <p:nvSpPr>
+          <p:cNvPr id="4" name="Slide Number Placeholder 3"/>
+          <p:cNvSpPr>
+            <a:spLocks noGrp="1"/>
+          </p:cNvSpPr>
+          <p:nvPr>
+            <p:ph type="sldNum" sz="quarter" idx="10"/>
+          </p:nvPr>
+        </p:nvSpPr>
+        <p:spPr/>
+        <p:txBody>
+          <a:bodyPr/>
+          <a:lstStyle/>
+          <a:p>
+            <a:fld id="{F7021451-1387-4CA6-816F-3879F97B5CBC}" type="slidenum">
+              <a:rPr lang="en-US"/>
+              <a:t>14</a:t>
+            </a:fld>
+            <a:endParaRPr lang="en-US"/>
+          </a:p>
+        </p:txBody>
+      </p:sp>
+    </p:spTree>
+    <p:extLst>
+      <p:ext uri="{BB962C8B-B14F-4D97-AF65-F5344CB8AC3E}">
+        <p14:creationId xmlns:p14="http://schemas.microsoft.com/office/powerpoint/2010/main" val="1024086991"/>
+      </p:ext>
+    </p:extLst>
+  </p:cSld>
+  <p:clrMapOvr>
+    <a:masterClrMapping/>
+  </p:clrMapOvr>
+</p:notes>
+</file>
+
+<file path=ppt/notesSlides/notesSlide15.xml><?xml version="1.0" encoding="utf-8"?>
+<p:notes xmlns:a="http://schemas.openxmlformats.org/drawingml/2006/main" xmlns:r="http://schemas.openxmlformats.org/officeDocument/2006/relationships" xmlns:p="http://schemas.openxmlformats.org/presentationml/2006/main">
+  <p:cSld>
+    <p:spTree>
+      <p:nvGrpSpPr>
+        <p:cNvPr id="1" name=""/>
+        <p:cNvGrpSpPr/>
+        <p:nvPr/>
+      </p:nvGrpSpPr>
+      <p:grpSpPr>
+        <a:xfrm>
+          <a:off x="0" y="0"/>
+          <a:ext cx="0" cy="0"/>
+          <a:chOff x="0" y="0"/>
+          <a:chExt cx="0" cy="0"/>
+        </a:xfrm>
+      </p:grpSpPr>
+      <p:sp>
+        <p:nvSpPr>
+          <p:cNvPr id="2" name="Slide Image Placeholder 1"/>
+          <p:cNvSpPr>
+            <a:spLocks noGrp="1" noRot="1" noChangeAspect="1"/>
+          </p:cNvSpPr>
+          <p:nvPr>
+            <p:ph type="sldImg"/>
+          </p:nvPr>
+        </p:nvSpPr>
+        <p:spPr/>
+      </p:sp>
+      <p:sp>
+        <p:nvSpPr>
+          <p:cNvPr id="3" name="Notes Placeholder 2"/>
+          <p:cNvSpPr>
+            <a:spLocks noGrp="1"/>
+          </p:cNvSpPr>
+          <p:nvPr>
+            <p:ph type="body" idx="1"/>
+          </p:nvPr>
+        </p:nvSpPr>
+        <p:spPr/>
+        <p:txBody>
+          <a:bodyPr/>
+          <a:lstStyle/>
+          <a:p>
+            <a:r>
+              <a:rPr lang="en-US" dirty="0"/>
+              <a:t/>
+            </a:r>
+            <a:endParaRPr lang="en-US" dirty="0"/>
+          </a:p>
+        </p:txBody>
+      </p:sp>
+      <p:sp>
+        <p:nvSpPr>
+          <p:cNvPr id="4" name="Slide Number Placeholder 3"/>
+          <p:cNvSpPr>
+            <a:spLocks noGrp="1"/>
+          </p:cNvSpPr>
+          <p:nvPr>
+            <p:ph type="sldNum" sz="quarter" idx="10"/>
+          </p:nvPr>
+        </p:nvSpPr>
+        <p:spPr/>
+        <p:txBody>
+          <a:bodyPr/>
+          <a:lstStyle/>
+          <a:p>
+            <a:fld id="{F7021451-1387-4CA6-816F-3879F97B5CBC}" type="slidenum">
+              <a:rPr lang="en-US"/>
+              <a:t>15</a:t>
+            </a:fld>
+            <a:endParaRPr lang="en-US"/>
+          </a:p>
+        </p:txBody>
+      </p:sp>
+    </p:spTree>
+    <p:extLst>
+      <p:ext uri="{BB962C8B-B14F-4D97-AF65-F5344CB8AC3E}">
+        <p14:creationId xmlns:p14="http://schemas.microsoft.com/office/powerpoint/2010/main" val="1024086991"/>
+      </p:ext>
+    </p:extLst>
+  </p:cSld>
+  <p:clrMapOvr>
+    <a:masterClrMapping/>
+  </p:clrMapOvr>
+</p:notes>
+</file>
+
+<file path=ppt/notesSlides/notesSlide16.xml><?xml version="1.0" encoding="utf-8"?>
+<p:notes xmlns:a="http://schemas.openxmlformats.org/drawingml/2006/main" xmlns:r="http://schemas.openxmlformats.org/officeDocument/2006/relationships" xmlns:p="http://schemas.openxmlformats.org/presentationml/2006/main">
+  <p:cSld>
+    <p:spTree>
+      <p:nvGrpSpPr>
+        <p:cNvPr id="1" name=""/>
+        <p:cNvGrpSpPr/>
+        <p:nvPr/>
+      </p:nvGrpSpPr>
+      <p:grpSpPr>
+        <a:xfrm>
+          <a:off x="0" y="0"/>
+          <a:ext cx="0" cy="0"/>
+          <a:chOff x="0" y="0"/>
+          <a:chExt cx="0" cy="0"/>
+        </a:xfrm>
+      </p:grpSpPr>
+      <p:sp>
+        <p:nvSpPr>
+          <p:cNvPr id="2" name="Slide Image Placeholder 1"/>
+          <p:cNvSpPr>
+            <a:spLocks noGrp="1" noRot="1" noChangeAspect="1"/>
+          </p:cNvSpPr>
+          <p:nvPr>
+            <p:ph type="sldImg"/>
+          </p:nvPr>
+        </p:nvSpPr>
+        <p:spPr/>
+      </p:sp>
+      <p:sp>
+        <p:nvSpPr>
+          <p:cNvPr id="3" name="Notes Placeholder 2"/>
+          <p:cNvSpPr>
+            <a:spLocks noGrp="1"/>
+          </p:cNvSpPr>
+          <p:nvPr>
+            <p:ph type="body" idx="1"/>
+          </p:nvPr>
+        </p:nvSpPr>
+        <p:spPr/>
+        <p:txBody>
+          <a:bodyPr/>
+          <a:lstStyle/>
+          <a:p>
+            <a:r>
+              <a:rPr lang="en-US" dirty="0"/>
+              <a:t/>
+            </a:r>
+            <a:endParaRPr lang="en-US" dirty="0"/>
+          </a:p>
+        </p:txBody>
+      </p:sp>
+      <p:sp>
+        <p:nvSpPr>
+          <p:cNvPr id="4" name="Slide Number Placeholder 3"/>
+          <p:cNvSpPr>
+            <a:spLocks noGrp="1"/>
+          </p:cNvSpPr>
+          <p:nvPr>
+            <p:ph type="sldNum" sz="quarter" idx="10"/>
+          </p:nvPr>
+        </p:nvSpPr>
+        <p:spPr/>
+        <p:txBody>
+          <a:bodyPr/>
+          <a:lstStyle/>
+          <a:p>
+            <a:fld id="{F7021451-1387-4CA6-816F-3879F97B5CBC}" type="slidenum">
+              <a:rPr lang="en-US"/>
+              <a:t>16</a:t>
+            </a:fld>
+            <a:endParaRPr lang="en-US"/>
+          </a:p>
+        </p:txBody>
+      </p:sp>
+    </p:spTree>
+    <p:extLst>
+      <p:ext uri="{BB962C8B-B14F-4D97-AF65-F5344CB8AC3E}">
+        <p14:creationId xmlns:p14="http://schemas.microsoft.com/office/powerpoint/2010/main" val="1024086991"/>
+      </p:ext>
+    </p:extLst>
+  </p:cSld>
+  <p:clrMapOvr>
+    <a:masterClrMapping/>
+  </p:clrMapOvr>
+</p:notes>
+</file>
+
+<file path=ppt/notesSlides/notesSlide17.xml><?xml version="1.0" encoding="utf-8"?>
+<p:notes xmlns:a="http://schemas.openxmlformats.org/drawingml/2006/main" xmlns:r="http://schemas.openxmlformats.org/officeDocument/2006/relationships" xmlns:p="http://schemas.openxmlformats.org/presentationml/2006/main">
+  <p:cSld>
+    <p:spTree>
+      <p:nvGrpSpPr>
+        <p:cNvPr id="1" name=""/>
+        <p:cNvGrpSpPr/>
+        <p:nvPr/>
+      </p:nvGrpSpPr>
+      <p:grpSpPr>
+        <a:xfrm>
+          <a:off x="0" y="0"/>
+          <a:ext cx="0" cy="0"/>
+          <a:chOff x="0" y="0"/>
+          <a:chExt cx="0" cy="0"/>
+        </a:xfrm>
+      </p:grpSpPr>
+      <p:sp>
+        <p:nvSpPr>
+          <p:cNvPr id="2" name="Slide Image Placeholder 1"/>
+          <p:cNvSpPr>
+            <a:spLocks noGrp="1" noRot="1" noChangeAspect="1"/>
+          </p:cNvSpPr>
+          <p:nvPr>
+            <p:ph type="sldImg"/>
+          </p:nvPr>
+        </p:nvSpPr>
+        <p:spPr/>
+      </p:sp>
+      <p:sp>
+        <p:nvSpPr>
+          <p:cNvPr id="3" name="Notes Placeholder 2"/>
+          <p:cNvSpPr>
+            <a:spLocks noGrp="1"/>
+          </p:cNvSpPr>
+          <p:nvPr>
+            <p:ph type="body" idx="1"/>
+          </p:nvPr>
+        </p:nvSpPr>
+        <p:spPr/>
+        <p:txBody>
+          <a:bodyPr/>
+          <a:lstStyle/>
+          <a:p>
+            <a:r>
+              <a:rPr lang="en-US" dirty="0"/>
+              <a:t/>
+            </a:r>
+            <a:endParaRPr lang="en-US" dirty="0"/>
+          </a:p>
+        </p:txBody>
+      </p:sp>
+      <p:sp>
+        <p:nvSpPr>
+          <p:cNvPr id="4" name="Slide Number Placeholder 3"/>
+          <p:cNvSpPr>
+            <a:spLocks noGrp="1"/>
+          </p:cNvSpPr>
+          <p:nvPr>
+            <p:ph type="sldNum" sz="quarter" idx="10"/>
+          </p:nvPr>
+        </p:nvSpPr>
+        <p:spPr/>
+        <p:txBody>
+          <a:bodyPr/>
+          <a:lstStyle/>
+          <a:p>
+            <a:fld id="{F7021451-1387-4CA6-816F-3879F97B5CBC}" type="slidenum">
+              <a:rPr lang="en-US"/>
+              <a:t>17</a:t>
             </a:fld>
             <a:endParaRPr lang="en-US"/>
           </a:p>
@@ -1989,7 +2521,7 @@
     <p:bg>
       <p:bgPr>
         <a:solidFill>
-          <a:srgbClr val="1E3A5F"/>
+          <a:srgbClr val="FBF6EE"/>
         </a:solidFill>
       </p:bgPr>
     </p:bg>
@@ -2009,14 +2541,34 @@
       </p:grpSpPr>
       <p:sp>
         <p:nvSpPr>
-          <p:cNvPr id="2" name="Text 0"/>
+          <p:cNvPr id="2" name="Shape 0"/>
           <p:cNvSpPr/>
           <p:nvPr/>
         </p:nvSpPr>
         <p:spPr>
           <a:xfrm>
-            <a:off x="914400" y="1828800"/>
-            <a:ext cx="7315200" cy="1371600"/>
+            <a:off x="548640" y="457200"/>
+            <a:ext cx="3657600" cy="50292"/>
+          </a:xfrm>
+          <a:prstGeom prst="rect">
+            <a:avLst/>
+          </a:prstGeom>
+          <a:solidFill>
+            <a:srgbClr val="AC916B"/>
+          </a:solidFill>
+          <a:ln/>
+        </p:spPr>
+      </p:sp>
+      <p:sp>
+        <p:nvSpPr>
+          <p:cNvPr id="3" name="Text 1"/>
+          <p:cNvSpPr/>
+          <p:nvPr/>
+        </p:nvSpPr>
+        <p:spPr>
+          <a:xfrm>
+            <a:off x="1371600" y="1828800"/>
+            <a:ext cx="9448495" cy="1371600"/>
           </a:xfrm>
           <a:prstGeom prst="rect">
             <a:avLst/>
@@ -2028,34 +2580,34 @@
           <a:bodyPr wrap="square" rtlCol="0" anchor="t"/>
           <a:lstStyle/>
           <a:p>
-            <a:pPr algn="ctr" indent="0" marL="0">
+            <a:pPr algn="l" indent="0" marL="0">
               <a:buNone/>
             </a:pPr>
             <a:r>
-              <a:rPr lang="en-US" sz="2800" b="1" dirty="0">
+              <a:rPr lang="en-US" sz="3200" b="1" dirty="0">
                 <a:solidFill>
-                  <a:srgbClr val="FFFFFF"/>
+                  <a:srgbClr val="004889"/>
                 </a:solidFill>
-                <a:latin typeface="Microsoft YaHei" pitchFamily="34" charset="0"/>
-                <a:ea typeface="Microsoft YaHei" pitchFamily="34" charset="-122"/>
-                <a:cs typeface="Microsoft YaHei" pitchFamily="34" charset="-120"/>
+                <a:latin typeface="Noto Serif SC" pitchFamily="34" charset="0"/>
+                <a:ea typeface="Noto Serif SC" pitchFamily="34" charset="-122"/>
+                <a:cs typeface="Noto Serif SC" pitchFamily="34" charset="-120"/>
               </a:rPr>
               <a:t>2026 Q1 港区吞吐量分析报告</a:t>
             </a:r>
-            <a:endParaRPr lang="en-US" sz="2800" dirty="0"/>
-          </a:p>
-        </p:txBody>
-      </p:sp>
-      <p:sp>
-        <p:nvSpPr>
-          <p:cNvPr id="3" name="Text 1"/>
+            <a:endParaRPr lang="en-US" sz="3200" dirty="0"/>
+          </a:p>
+        </p:txBody>
+      </p:sp>
+      <p:sp>
+        <p:nvSpPr>
+          <p:cNvPr id="4" name="Text 2"/>
           <p:cNvSpPr/>
           <p:nvPr/>
         </p:nvSpPr>
         <p:spPr>
           <a:xfrm>
-            <a:off x="914400" y="3200400"/>
-            <a:ext cx="7315200" cy="731520"/>
+            <a:off x="1371600" y="3200400"/>
+            <a:ext cx="9448495" cy="731520"/>
           </a:xfrm>
           <a:prstGeom prst="rect">
             <a:avLst/>
@@ -2067,17 +2619,17 @@
           <a:bodyPr wrap="square" rtlCol="0" anchor="t"/>
           <a:lstStyle/>
           <a:p>
-            <a:pPr algn="ctr" indent="0" marL="0">
+            <a:pPr algn="l" indent="0" marL="0">
               <a:buNone/>
             </a:pPr>
             <a:r>
               <a:rPr lang="en-US" sz="1800" dirty="0">
                 <a:solidFill>
-                  <a:srgbClr val="F0A500"/>
+                  <a:srgbClr val="9A8E78"/>
                 </a:solidFill>
-                <a:latin typeface="Microsoft YaHei" pitchFamily="34" charset="0"/>
-                <a:ea typeface="Microsoft YaHei" pitchFamily="34" charset="-122"/>
-                <a:cs typeface="Microsoft YaHei" pitchFamily="34" charset="-120"/>
+                <a:latin typeface="Noto Serif SC" pitchFamily="34" charset="0"/>
+                <a:ea typeface="Noto Serif SC" pitchFamily="34" charset="-122"/>
+                <a:cs typeface="Noto Serif SC" pitchFamily="34" charset="-120"/>
               </a:rPr>
               <a:t>编制：Analytica Test</a:t>
             </a:r>
@@ -2087,14 +2639,14 @@
       </p:sp>
       <p:sp>
         <p:nvSpPr>
-          <p:cNvPr id="4" name="Text 2"/>
+          <p:cNvPr id="5" name="Text 3"/>
           <p:cNvSpPr/>
           <p:nvPr/>
         </p:nvSpPr>
         <p:spPr>
           <a:xfrm>
-            <a:off x="914400" y="4114800"/>
-            <a:ext cx="7315200" cy="457200"/>
+            <a:off x="1371600" y="5029200"/>
+            <a:ext cx="9448495" cy="457200"/>
           </a:xfrm>
           <a:prstGeom prst="rect">
             <a:avLst/>
@@ -2106,21 +2658,21 @@
           <a:bodyPr wrap="square" rtlCol="0" anchor="t"/>
           <a:lstStyle/>
           <a:p>
-            <a:pPr algn="ctr" indent="0" marL="0">
+            <a:pPr algn="l" indent="0" marL="0">
               <a:buNone/>
             </a:pPr>
             <a:r>
-              <a:rPr lang="en-US" sz="1400" dirty="0">
+              <a:rPr lang="en-US" sz="900" dirty="0">
                 <a:solidFill>
-                  <a:srgbClr val="FFFFFF"/>
+                  <a:srgbClr val="AC916B"/>
                 </a:solidFill>
-                <a:latin typeface="Microsoft YaHei" pitchFamily="34" charset="0"/>
-                <a:ea typeface="Microsoft YaHei" pitchFamily="34" charset="-122"/>
-                <a:cs typeface="Microsoft YaHei" pitchFamily="34" charset="-120"/>
+                <a:latin typeface="Noto Sans SC" pitchFamily="34" charset="0"/>
+                <a:ea typeface="Noto Sans SC" pitchFamily="34" charset="-122"/>
+                <a:cs typeface="Noto Sans SC" pitchFamily="34" charset="-120"/>
               </a:rPr>
               <a:t>2026-04-29</a:t>
             </a:r>
-            <a:endParaRPr lang="en-US" sz="1400" dirty="0"/>
+            <a:endParaRPr lang="en-US" sz="900" dirty="0"/>
           </a:p>
         </p:txBody>
       </p:sp>
@@ -2138,7 +2690,7 @@
     <p:bg>
       <p:bgPr>
         <a:solidFill>
-          <a:srgbClr val="1E3A5F"/>
+          <a:srgbClr val="FBF6EE"/>
         </a:solidFill>
       </p:bgPr>
     </p:bg>
@@ -2158,14 +2710,34 @@
       </p:grpSpPr>
       <p:sp>
         <p:nvSpPr>
-          <p:cNvPr id="2" name="Text 0"/>
+          <p:cNvPr id="2" name="Shape 0"/>
           <p:cNvSpPr/>
           <p:nvPr/>
         </p:nvSpPr>
         <p:spPr>
           <a:xfrm>
-            <a:off x="914400" y="1371600"/>
-            <a:ext cx="2743200" cy="1828800"/>
+            <a:off x="548640" y="548640"/>
+            <a:ext cx="11094415" cy="10973"/>
+          </a:xfrm>
+          <a:prstGeom prst="rect">
+            <a:avLst/>
+          </a:prstGeom>
+          <a:solidFill>
+            <a:srgbClr val="004889"/>
+          </a:solidFill>
+          <a:ln/>
+        </p:spPr>
+      </p:sp>
+      <p:sp>
+        <p:nvSpPr>
+          <p:cNvPr id="3" name="Text 1"/>
+          <p:cNvSpPr/>
+          <p:nvPr/>
+        </p:nvSpPr>
+        <p:spPr>
+          <a:xfrm>
+            <a:off x="548640" y="1828800"/>
+            <a:ext cx="3657600" cy="3200400"/>
           </a:xfrm>
           <a:prstGeom prst="rect">
             <a:avLst/>
@@ -2181,30 +2753,30 @@
               <a:buNone/>
             </a:pPr>
             <a:r>
-              <a:rPr lang="en-US" sz="7200" b="1" dirty="0">
+              <a:rPr lang="en-US" sz="12000" dirty="0">
                 <a:solidFill>
-                  <a:srgbClr val="F0A500"/>
+                  <a:srgbClr val="AC916B"/>
                 </a:solidFill>
-                <a:latin typeface="Calibri" pitchFamily="34" charset="0"/>
-                <a:ea typeface="Calibri" pitchFamily="34" charset="-122"/>
-                <a:cs typeface="Calibri" pitchFamily="34" charset="-120"/>
+                <a:latin typeface="Noto Serif SC" pitchFamily="34" charset="0"/>
+                <a:ea typeface="Noto Serif SC" pitchFamily="34" charset="-122"/>
+                <a:cs typeface="Noto Serif SC" pitchFamily="34" charset="-120"/>
               </a:rPr>
-              <a:t>03</a:t>
+              <a:t>Ⅲ</a:t>
             </a:r>
-            <a:endParaRPr lang="en-US" sz="7200" dirty="0"/>
-          </a:p>
-        </p:txBody>
-      </p:sp>
-      <p:sp>
-        <p:nvSpPr>
-          <p:cNvPr id="3" name="Text 1"/>
+            <a:endParaRPr lang="en-US" sz="12000" dirty="0"/>
+          </a:p>
+        </p:txBody>
+      </p:sp>
+      <p:sp>
+        <p:nvSpPr>
+          <p:cNvPr id="4" name="Text 2"/>
           <p:cNvSpPr/>
           <p:nvPr/>
         </p:nvSpPr>
         <p:spPr>
           <a:xfrm>
-            <a:off x="914400" y="3474720"/>
-            <a:ext cx="7315200" cy="914400"/>
+            <a:off x="5029200" y="2743200"/>
+            <a:ext cx="6400800" cy="1828800"/>
           </a:xfrm>
           <a:prstGeom prst="rect">
             <a:avLst/>
@@ -2222,11 +2794,11 @@
             <a:r>
               <a:rPr lang="en-US" sz="2200" b="1" dirty="0">
                 <a:solidFill>
-                  <a:srgbClr val="FFFFFF"/>
+                  <a:srgbClr val="004889"/>
                 </a:solidFill>
-                <a:latin typeface="Microsoft YaHei" pitchFamily="34" charset="0"/>
-                <a:ea typeface="Microsoft YaHei" pitchFamily="34" charset="-122"/>
-                <a:cs typeface="Microsoft YaHei" pitchFamily="34" charset="-120"/>
+                <a:latin typeface="Noto Serif SC" pitchFamily="34" charset="0"/>
+                <a:ea typeface="Noto Serif SC" pitchFamily="34" charset="-122"/>
+                <a:cs typeface="Noto Serif SC" pitchFamily="34" charset="-120"/>
               </a:rPr>
               <a:t>三、综合结论</a:t>
             </a:r>
@@ -2236,20 +2808,20 @@
       </p:sp>
       <p:sp>
         <p:nvSpPr>
-          <p:cNvPr id="4" name="Shape 2"/>
+          <p:cNvPr id="5" name="Shape 3"/>
           <p:cNvSpPr/>
           <p:nvPr/>
         </p:nvSpPr>
         <p:spPr>
           <a:xfrm>
-            <a:off x="914400" y="4389120"/>
-            <a:ext cx="1828800" cy="54864"/>
+            <a:off x="11612880" y="6400800"/>
+            <a:ext cx="118872" cy="118872"/>
           </a:xfrm>
           <a:prstGeom prst="rect">
             <a:avLst/>
           </a:prstGeom>
           <a:solidFill>
-            <a:srgbClr val="F0A500"/>
+            <a:srgbClr val="AC916B"/>
           </a:solidFill>
           <a:ln/>
         </p:spPr>
@@ -2265,334 +2837,10 @@
 <file path=ppt/slides/slide11.xml><?xml version="1.0" encoding="utf-8"?>
 <p:sld xmlns:a="http://schemas.openxmlformats.org/drawingml/2006/main" xmlns:r="http://schemas.openxmlformats.org/officeDocument/2006/relationships" xmlns:p="http://schemas.openxmlformats.org/presentationml/2006/main">
   <p:cSld name="Slide 11">
-    <p:spTree>
-      <p:nvGrpSpPr>
-        <p:cNvPr id="1" name=""/>
-        <p:cNvGrpSpPr/>
-        <p:nvPr/>
-      </p:nvGrpSpPr>
-      <p:grpSpPr>
-        <a:xfrm>
-          <a:off x="0" y="0"/>
-          <a:ext cx="0" cy="0"/>
-          <a:chOff x="0" y="0"/>
-          <a:chExt cx="0" cy="0"/>
-        </a:xfrm>
-      </p:grpSpPr>
-      <p:sp>
-        <p:nvSpPr>
-          <p:cNvPr id="2" name="Shape 0"/>
-          <p:cNvSpPr/>
-          <p:nvPr/>
-        </p:nvSpPr>
-        <p:spPr>
-          <a:xfrm>
-            <a:off x="274320" y="274320"/>
-            <a:ext cx="73152" cy="6309360"/>
-          </a:xfrm>
-          <a:prstGeom prst="rect">
-            <a:avLst/>
-          </a:prstGeom>
-          <a:solidFill>
-            <a:srgbClr val="F0A500"/>
-          </a:solidFill>
-          <a:ln/>
-        </p:spPr>
-      </p:sp>
-      <p:sp>
-        <p:nvSpPr>
-          <p:cNvPr id="3" name="Text 1"/>
-          <p:cNvSpPr/>
-          <p:nvPr/>
-        </p:nvSpPr>
-        <p:spPr>
-          <a:xfrm>
-            <a:off x="548640" y="274320"/>
-            <a:ext cx="8229600" cy="731520"/>
-          </a:xfrm>
-          <a:prstGeom prst="rect">
-            <a:avLst/>
-          </a:prstGeom>
-          <a:noFill/>
-          <a:ln/>
-        </p:spPr>
-        <p:txBody>
-          <a:bodyPr wrap="square" rtlCol="0" anchor="t"/>
-          <a:lstStyle/>
-          <a:p>
-            <a:pPr algn="l" indent="0" marL="0">
-              <a:buNone/>
-            </a:pPr>
-            <a:r>
-              <a:rPr lang="en-US" sz="1800" b="1" dirty="0">
-                <a:solidFill>
-                  <a:srgbClr val="1E3A5F"/>
-                </a:solidFill>
-                <a:latin typeface="Microsoft YaHei" pitchFamily="34" charset="0"/>
-                <a:ea typeface="Microsoft YaHei" pitchFamily="34" charset="-122"/>
-                <a:cs typeface="Microsoft YaHei" pitchFamily="34" charset="-120"/>
-              </a:rPr>
-              <a:t>三、综合结论</a:t>
-            </a:r>
-            <a:endParaRPr lang="en-US" sz="1800" dirty="0"/>
-          </a:p>
-        </p:txBody>
-      </p:sp>
-      <p:sp>
-        <p:nvSpPr>
-          <p:cNvPr id="4" name="Text 2"/>
-          <p:cNvSpPr/>
-          <p:nvPr/>
-        </p:nvSpPr>
-        <p:spPr>
-          <a:xfrm>
-            <a:off x="731520" y="1188720"/>
-            <a:ext cx="7863840" cy="5303520"/>
-          </a:xfrm>
-          <a:prstGeom prst="rect">
-            <a:avLst/>
-          </a:prstGeom>
-          <a:noFill/>
-          <a:ln/>
-        </p:spPr>
-        <p:txBody>
-          <a:bodyPr wrap="square" rtlCol="0" anchor="t"/>
-          <a:lstStyle/>
-          <a:p>
-            <a:pPr algn="l" indent="0" marL="0">
-              <a:buNone/>
-            </a:pPr>
-            <a:r>
-              <a:rPr lang="en-US" sz="1400" dirty="0">
-                <a:solidFill>
-                  <a:srgbClr val="333333"/>
-                </a:solidFill>
-                <a:latin typeface="Microsoft YaHei" pitchFamily="34" charset="0"/>
-                <a:ea typeface="Microsoft YaHei" pitchFamily="34" charset="-122"/>
-                <a:cs typeface="Microsoft YaHei" pitchFamily="34" charset="-120"/>
-              </a:rPr>
-              <a:t>三港区集装箱吞吐量整体稳健增长，大连港持续领跑。</a:t>
-            </a:r>
-            <a:endParaRPr lang="en-US" sz="1400" dirty="0"/>
-          </a:p>
-        </p:txBody>
-      </p:sp>
-    </p:spTree>
-  </p:cSld>
-  <p:clrMapOvr>
-    <a:masterClrMapping/>
-  </p:clrMapOvr>
-</p:sld>
-</file>
-
-<file path=ppt/slides/slide2.xml><?xml version="1.0" encoding="utf-8"?>
-<p:sld xmlns:a="http://schemas.openxmlformats.org/drawingml/2006/main" xmlns:r="http://schemas.openxmlformats.org/officeDocument/2006/relationships" xmlns:p="http://schemas.openxmlformats.org/presentationml/2006/main">
-  <p:cSld name="Slide 2">
-    <p:spTree>
-      <p:nvGrpSpPr>
-        <p:cNvPr id="1" name=""/>
-        <p:cNvGrpSpPr/>
-        <p:nvPr/>
-      </p:nvGrpSpPr>
-      <p:grpSpPr>
-        <a:xfrm>
-          <a:off x="0" y="0"/>
-          <a:ext cx="0" cy="0"/>
-          <a:chOff x="0" y="0"/>
-          <a:chExt cx="0" cy="0"/>
-        </a:xfrm>
-      </p:grpSpPr>
-      <p:sp>
-        <p:nvSpPr>
-          <p:cNvPr id="2" name="Text 0"/>
-          <p:cNvSpPr/>
-          <p:nvPr/>
-        </p:nvSpPr>
-        <p:spPr>
-          <a:xfrm>
-            <a:off x="457200" y="274320"/>
-            <a:ext cx="8229600" cy="731520"/>
-          </a:xfrm>
-          <a:prstGeom prst="rect">
-            <a:avLst/>
-          </a:prstGeom>
-          <a:noFill/>
-          <a:ln/>
-        </p:spPr>
-        <p:txBody>
-          <a:bodyPr wrap="square" rtlCol="0" anchor="t"/>
-          <a:lstStyle/>
-          <a:p>
-            <a:pPr algn="ctr" indent="0" marL="0">
-              <a:buNone/>
-            </a:pPr>
-            <a:r>
-              <a:rPr lang="en-US" sz="2400" b="1" dirty="0">
-                <a:solidFill>
-                  <a:srgbClr val="1E3A5F"/>
-                </a:solidFill>
-                <a:latin typeface="Microsoft YaHei" pitchFamily="34" charset="0"/>
-                <a:ea typeface="Microsoft YaHei" pitchFamily="34" charset="-122"/>
-                <a:cs typeface="Microsoft YaHei" pitchFamily="34" charset="-120"/>
-              </a:rPr>
-              <a:t>目  录</a:t>
-            </a:r>
-            <a:endParaRPr lang="en-US" sz="2400" dirty="0"/>
-          </a:p>
-        </p:txBody>
-      </p:sp>
-      <p:sp>
-        <p:nvSpPr>
-          <p:cNvPr id="3" name="Shape 1"/>
-          <p:cNvSpPr/>
-          <p:nvPr/>
-        </p:nvSpPr>
-        <p:spPr>
-          <a:xfrm>
-            <a:off x="1097280" y="1188720"/>
-            <a:ext cx="73152" cy="1645920"/>
-          </a:xfrm>
-          <a:prstGeom prst="rect">
-            <a:avLst/>
-          </a:prstGeom>
-          <a:solidFill>
-            <a:srgbClr val="F0A500"/>
-          </a:solidFill>
-          <a:ln/>
-        </p:spPr>
-      </p:sp>
-      <p:sp>
-        <p:nvSpPr>
-          <p:cNvPr id="4" name="Text 2"/>
-          <p:cNvSpPr/>
-          <p:nvPr/>
-        </p:nvSpPr>
-        <p:spPr>
-          <a:xfrm>
-            <a:off x="1371600" y="1188720"/>
-            <a:ext cx="6400800" cy="457200"/>
-          </a:xfrm>
-          <a:prstGeom prst="rect">
-            <a:avLst/>
-          </a:prstGeom>
-          <a:noFill/>
-          <a:ln/>
-        </p:spPr>
-        <p:txBody>
-          <a:bodyPr wrap="square" rtlCol="0" anchor="t"/>
-          <a:lstStyle/>
-          <a:p>
-            <a:pPr algn="l" indent="0" marL="0">
-              <a:buNone/>
-            </a:pPr>
-            <a:r>
-              <a:rPr lang="en-US" sz="1600" dirty="0">
-                <a:solidFill>
-                  <a:srgbClr val="1E3A5F"/>
-                </a:solidFill>
-                <a:latin typeface="Microsoft YaHei" pitchFamily="34" charset="0"/>
-                <a:ea typeface="Microsoft YaHei" pitchFamily="34" charset="-122"/>
-                <a:cs typeface="Microsoft YaHei" pitchFamily="34" charset="-120"/>
-              </a:rPr>
-              <a:t>1.  一、港区吞吐量现状</a:t>
-            </a:r>
-            <a:endParaRPr lang="en-US" sz="1600" dirty="0"/>
-          </a:p>
-        </p:txBody>
-      </p:sp>
-      <p:sp>
-        <p:nvSpPr>
-          <p:cNvPr id="5" name="Text 3"/>
-          <p:cNvSpPr/>
-          <p:nvPr/>
-        </p:nvSpPr>
-        <p:spPr>
-          <a:xfrm>
-            <a:off x="1371600" y="1691640"/>
-            <a:ext cx="6400800" cy="457200"/>
-          </a:xfrm>
-          <a:prstGeom prst="rect">
-            <a:avLst/>
-          </a:prstGeom>
-          <a:noFill/>
-          <a:ln/>
-        </p:spPr>
-        <p:txBody>
-          <a:bodyPr wrap="square" rtlCol="0" anchor="t"/>
-          <a:lstStyle/>
-          <a:p>
-            <a:pPr algn="l" indent="0" marL="0">
-              <a:buNone/>
-            </a:pPr>
-            <a:r>
-              <a:rPr lang="en-US" sz="1600" dirty="0">
-                <a:solidFill>
-                  <a:srgbClr val="1E3A5F"/>
-                </a:solidFill>
-                <a:latin typeface="Microsoft YaHei" pitchFamily="34" charset="0"/>
-                <a:ea typeface="Microsoft YaHei" pitchFamily="34" charset="-122"/>
-                <a:cs typeface="Microsoft YaHei" pitchFamily="34" charset="-120"/>
-              </a:rPr>
-              <a:t>2.  二、关键指标分析</a:t>
-            </a:r>
-            <a:endParaRPr lang="en-US" sz="1600" dirty="0"/>
-          </a:p>
-        </p:txBody>
-      </p:sp>
-      <p:sp>
-        <p:nvSpPr>
-          <p:cNvPr id="6" name="Text 4"/>
-          <p:cNvSpPr/>
-          <p:nvPr/>
-        </p:nvSpPr>
-        <p:spPr>
-          <a:xfrm>
-            <a:off x="1371600" y="2194560"/>
-            <a:ext cx="6400800" cy="457200"/>
-          </a:xfrm>
-          <a:prstGeom prst="rect">
-            <a:avLst/>
-          </a:prstGeom>
-          <a:noFill/>
-          <a:ln/>
-        </p:spPr>
-        <p:txBody>
-          <a:bodyPr wrap="square" rtlCol="0" anchor="t"/>
-          <a:lstStyle/>
-          <a:p>
-            <a:pPr algn="l" indent="0" marL="0">
-              <a:buNone/>
-            </a:pPr>
-            <a:r>
-              <a:rPr lang="en-US" sz="1600" dirty="0">
-                <a:solidFill>
-                  <a:srgbClr val="1E3A5F"/>
-                </a:solidFill>
-                <a:latin typeface="Microsoft YaHei" pitchFamily="34" charset="0"/>
-                <a:ea typeface="Microsoft YaHei" pitchFamily="34" charset="-122"/>
-                <a:cs typeface="Microsoft YaHei" pitchFamily="34" charset="-120"/>
-              </a:rPr>
-              <a:t>3.  三、综合结论</a:t>
-            </a:r>
-            <a:endParaRPr lang="en-US" sz="1600" dirty="0"/>
-          </a:p>
-        </p:txBody>
-      </p:sp>
-    </p:spTree>
-  </p:cSld>
-  <p:clrMapOvr>
-    <a:masterClrMapping/>
-  </p:clrMapOvr>
-</p:sld>
-</file>
-
-<file path=ppt/slides/slide3.xml><?xml version="1.0" encoding="utf-8"?>
-<p:sld xmlns:a="http://schemas.openxmlformats.org/drawingml/2006/main" xmlns:r="http://schemas.openxmlformats.org/officeDocument/2006/relationships" xmlns:p="http://schemas.openxmlformats.org/presentationml/2006/main">
-  <p:cSld name="Slide 3">
     <p:bg>
       <p:bgPr>
         <a:solidFill>
-          <a:srgbClr val="F5F7FA"/>
+          <a:srgbClr val="FBF6EE"/>
         </a:solidFill>
       </p:bgPr>
     </p:bg>
@@ -2618,8 +2866,8 @@
         </p:nvSpPr>
         <p:spPr>
           <a:xfrm>
-            <a:off x="457200" y="274320"/>
-            <a:ext cx="8229600" cy="640080"/>
+            <a:off x="548640" y="457200"/>
+            <a:ext cx="11094415" cy="274320"/>
           </a:xfrm>
           <a:prstGeom prst="rect">
             <a:avLst/>
@@ -2635,17 +2883,17 @@
               <a:buNone/>
             </a:pPr>
             <a:r>
-              <a:rPr lang="en-US" sz="2200" b="1" dirty="0">
+              <a:rPr lang="en-US" sz="800" dirty="0">
                 <a:solidFill>
-                  <a:srgbClr val="1E3A5F"/>
+                  <a:srgbClr val="AC916B"/>
                 </a:solidFill>
-                <a:latin typeface="Microsoft YaHei" pitchFamily="34" charset="0"/>
-                <a:ea typeface="Microsoft YaHei" pitchFamily="34" charset="-122"/>
-                <a:cs typeface="Microsoft YaHei" pitchFamily="34" charset="-120"/>
+                <a:latin typeface="Noto Sans SC" pitchFamily="34" charset="0"/>
+                <a:ea typeface="Noto Sans SC" pitchFamily="34" charset="-122"/>
+                <a:cs typeface="Noto Sans SC" pitchFamily="34" charset="-120"/>
               </a:rPr>
-              <a:t>核心经营指标</a:t>
+              <a:t>三、综合结论</a:t>
             </a:r>
-            <a:endParaRPr lang="en-US" sz="2200" dirty="0"/>
+            <a:endParaRPr lang="en-US" sz="800" dirty="0"/>
           </a:p>
         </p:txBody>
       </p:sp>
@@ -2657,57 +2905,28 @@
         </p:nvSpPr>
         <p:spPr>
           <a:xfrm>
-            <a:off x="914400" y="1188720"/>
-            <a:ext cx="2255520" cy="4114800"/>
-          </a:xfrm>
-          <a:prstGeom prst="roundRect">
-            <a:avLst>
-              <a:gd name="adj" fmla="val 2432"/>
-            </a:avLst>
-          </a:prstGeom>
-          <a:solidFill>
-            <a:srgbClr val="FFFFFF"/>
-          </a:solidFill>
-          <a:ln/>
-          <a:effectLst>
-            <a:outerShdw sx="100000" sy="100000" kx="0" ky="0" algn="bl" rotWithShape="0" blurRad="101600" dist="38100" dir="5400000">
-              <a:srgbClr val="999999">
-                <a:alpha val="40000"/>
-              </a:srgbClr>
-            </a:outerShdw>
-          </a:effectLst>
-        </p:spPr>
-      </p:sp>
-      <p:sp>
-        <p:nvSpPr>
-          <p:cNvPr id="4" name="Shape 2"/>
-          <p:cNvSpPr/>
-          <p:nvPr/>
-        </p:nvSpPr>
-        <p:spPr>
-          <a:xfrm>
-            <a:off x="914400" y="5193792"/>
-            <a:ext cx="2255520" cy="109728"/>
+            <a:off x="548640" y="914400"/>
+            <a:ext cx="50292" cy="1014984"/>
           </a:xfrm>
           <a:prstGeom prst="rect">
             <a:avLst/>
           </a:prstGeom>
           <a:solidFill>
-            <a:srgbClr val="2E7D32"/>
+            <a:srgbClr val="AC916B"/>
           </a:solidFill>
           <a:ln/>
         </p:spPr>
       </p:sp>
       <p:sp>
         <p:nvSpPr>
-          <p:cNvPr id="5" name="Text 3"/>
+          <p:cNvPr id="4" name="Text 2"/>
           <p:cNvSpPr/>
           <p:nvPr/>
         </p:nvSpPr>
         <p:spPr>
           <a:xfrm>
-            <a:off x="1005840" y="1371600"/>
-            <a:ext cx="2072640" cy="365760"/>
+            <a:off x="822960" y="914400"/>
+            <a:ext cx="10424160" cy="731520"/>
           </a:xfrm>
           <a:prstGeom prst="rect">
             <a:avLst/>
@@ -2719,431 +2938,21 @@
           <a:bodyPr wrap="square" rtlCol="0" anchor="t"/>
           <a:lstStyle/>
           <a:p>
-            <a:pPr algn="ctr" indent="0" marL="0">
+            <a:pPr algn="l" indent="0" marL="0">
               <a:buNone/>
             </a:pPr>
             <a:r>
-              <a:rPr lang="en-US" sz="1100" b="1" dirty="0">
+              <a:rPr lang="en-US" sz="1800" dirty="0">
                 <a:solidFill>
-                  <a:srgbClr val="546E7A"/>
+                  <a:srgbClr val="9A8E78"/>
                 </a:solidFill>
-                <a:latin typeface="Microsoft YaHei" pitchFamily="34" charset="0"/>
-                <a:ea typeface="Microsoft YaHei" pitchFamily="34" charset="-122"/>
-                <a:cs typeface="Microsoft YaHei" pitchFamily="34" charset="-120"/>
+                <a:latin typeface="Noto Serif SC" pitchFamily="34" charset="0"/>
+                <a:ea typeface="Noto Serif SC" pitchFamily="34" charset="-122"/>
+                <a:cs typeface="Noto Serif SC" pitchFamily="34" charset="-120"/>
               </a:rPr>
-              <a:t>总吞吐量</a:t>
+              <a:t>三港区集装箱吞吐量整体稳健增长，大连港持续领跑。</a:t>
             </a:r>
-            <a:endParaRPr lang="en-US" sz="1100" dirty="0"/>
-          </a:p>
-        </p:txBody>
-      </p:sp>
-      <p:sp>
-        <p:nvSpPr>
-          <p:cNvPr id="6" name="Text 4"/>
-          <p:cNvSpPr/>
-          <p:nvPr/>
-        </p:nvSpPr>
-        <p:spPr>
-          <a:xfrm>
-            <a:off x="1005840" y="2011680"/>
-            <a:ext cx="2072640" cy="1097280"/>
-          </a:xfrm>
-          <a:prstGeom prst="rect">
-            <a:avLst/>
-          </a:prstGeom>
-          <a:noFill/>
-          <a:ln/>
-        </p:spPr>
-        <p:txBody>
-          <a:bodyPr wrap="square" rtlCol="0" anchor="t"/>
-          <a:lstStyle/>
-          <a:p>
-            <a:pPr algn="ctr" indent="0" marL="0">
-              <a:buNone/>
-            </a:pPr>
-            <a:r>
-              <a:rPr lang="en-US" sz="3600" b="1" dirty="0">
-                <a:solidFill>
-                  <a:srgbClr val="2E7D32"/>
-                </a:solidFill>
-                <a:latin typeface="Calibri" pitchFamily="34" charset="0"/>
-                <a:ea typeface="Calibri" pitchFamily="34" charset="-122"/>
-                <a:cs typeface="Calibri" pitchFamily="34" charset="-120"/>
-              </a:rPr>
-              <a:t>9500.6 万吨</a:t>
-            </a:r>
-            <a:endParaRPr lang="en-US" sz="3600" dirty="0"/>
-          </a:p>
-        </p:txBody>
-      </p:sp>
-      <p:sp>
-        <p:nvSpPr>
-          <p:cNvPr id="7" name="Text 5"/>
-          <p:cNvSpPr/>
-          <p:nvPr/>
-        </p:nvSpPr>
-        <p:spPr>
-          <a:xfrm>
-            <a:off x="1005840" y="3291840"/>
-            <a:ext cx="2072640" cy="365760"/>
-          </a:xfrm>
-          <a:prstGeom prst="rect">
-            <a:avLst/>
-          </a:prstGeom>
-          <a:noFill/>
-          <a:ln/>
-        </p:spPr>
-        <p:txBody>
-          <a:bodyPr wrap="square" rtlCol="0" anchor="t"/>
-          <a:lstStyle/>
-          <a:p>
-            <a:pPr algn="ctr" indent="0" marL="0">
-              <a:buNone/>
-            </a:pPr>
-            <a:r>
-              <a:rPr lang="en-US" sz="900" dirty="0">
-                <a:solidFill>
-                  <a:srgbClr val="546E7A"/>
-                </a:solidFill>
-                <a:latin typeface="Microsoft YaHei" pitchFamily="34" charset="0"/>
-                <a:ea typeface="Microsoft YaHei" pitchFamily="34" charset="-122"/>
-                <a:cs typeface="Microsoft YaHei" pitchFamily="34" charset="-120"/>
-              </a:rPr>
-              <a:t>2026 Q1</a:t>
-            </a:r>
-            <a:endParaRPr lang="en-US" sz="900" dirty="0"/>
-          </a:p>
-        </p:txBody>
-      </p:sp>
-      <p:sp>
-        <p:nvSpPr>
-          <p:cNvPr id="8" name="Shape 6"/>
-          <p:cNvSpPr/>
-          <p:nvPr/>
-        </p:nvSpPr>
-        <p:spPr>
-          <a:xfrm>
-            <a:off x="3352800" y="1188720"/>
-            <a:ext cx="2255520" cy="4114800"/>
-          </a:xfrm>
-          <a:prstGeom prst="roundRect">
-            <a:avLst>
-              <a:gd name="adj" fmla="val 2432"/>
-            </a:avLst>
-          </a:prstGeom>
-          <a:solidFill>
-            <a:srgbClr val="FFFFFF"/>
-          </a:solidFill>
-          <a:ln/>
-          <a:effectLst>
-            <a:outerShdw sx="100000" sy="100000" kx="0" ky="0" algn="bl" rotWithShape="0" blurRad="101600" dist="38100" dir="5400000">
-              <a:srgbClr val="999999">
-                <a:alpha val="40000"/>
-              </a:srgbClr>
-            </a:outerShdw>
-          </a:effectLst>
-        </p:spPr>
-      </p:sp>
-      <p:sp>
-        <p:nvSpPr>
-          <p:cNvPr id="9" name="Shape 7"/>
-          <p:cNvSpPr/>
-          <p:nvPr/>
-        </p:nvSpPr>
-        <p:spPr>
-          <a:xfrm>
-            <a:off x="3352800" y="5193792"/>
-            <a:ext cx="2255520" cy="109728"/>
-          </a:xfrm>
-          <a:prstGeom prst="rect">
-            <a:avLst/>
-          </a:prstGeom>
-          <a:solidFill>
-            <a:srgbClr val="2E7D32"/>
-          </a:solidFill>
-          <a:ln/>
-        </p:spPr>
-      </p:sp>
-      <p:sp>
-        <p:nvSpPr>
-          <p:cNvPr id="10" name="Text 8"/>
-          <p:cNvSpPr/>
-          <p:nvPr/>
-        </p:nvSpPr>
-        <p:spPr>
-          <a:xfrm>
-            <a:off x="3444240" y="1371600"/>
-            <a:ext cx="2072640" cy="365760"/>
-          </a:xfrm>
-          <a:prstGeom prst="rect">
-            <a:avLst/>
-          </a:prstGeom>
-          <a:noFill/>
-          <a:ln/>
-        </p:spPr>
-        <p:txBody>
-          <a:bodyPr wrap="square" rtlCol="0" anchor="t"/>
-          <a:lstStyle/>
-          <a:p>
-            <a:pPr algn="ctr" indent="0" marL="0">
-              <a:buNone/>
-            </a:pPr>
-            <a:r>
-              <a:rPr lang="en-US" sz="1100" b="1" dirty="0">
-                <a:solidFill>
-                  <a:srgbClr val="546E7A"/>
-                </a:solidFill>
-                <a:latin typeface="Microsoft YaHei" pitchFamily="34" charset="0"/>
-                <a:ea typeface="Microsoft YaHei" pitchFamily="34" charset="-122"/>
-                <a:cs typeface="Microsoft YaHei" pitchFamily="34" charset="-120"/>
-              </a:rPr>
-              <a:t>同比增长</a:t>
-            </a:r>
-            <a:endParaRPr lang="en-US" sz="1100" dirty="0"/>
-          </a:p>
-        </p:txBody>
-      </p:sp>
-      <p:sp>
-        <p:nvSpPr>
-          <p:cNvPr id="11" name="Text 9"/>
-          <p:cNvSpPr/>
-          <p:nvPr/>
-        </p:nvSpPr>
-        <p:spPr>
-          <a:xfrm>
-            <a:off x="3444240" y="2011680"/>
-            <a:ext cx="2072640" cy="1097280"/>
-          </a:xfrm>
-          <a:prstGeom prst="rect">
-            <a:avLst/>
-          </a:prstGeom>
-          <a:noFill/>
-          <a:ln/>
-        </p:spPr>
-        <p:txBody>
-          <a:bodyPr wrap="square" rtlCol="0" anchor="t"/>
-          <a:lstStyle/>
-          <a:p>
-            <a:pPr algn="ctr" indent="0" marL="0">
-              <a:buNone/>
-            </a:pPr>
-            <a:r>
-              <a:rPr lang="en-US" sz="3600" b="1" dirty="0">
-                <a:solidFill>
-                  <a:srgbClr val="2E7D32"/>
-                </a:solidFill>
-                <a:latin typeface="Calibri" pitchFamily="34" charset="0"/>
-                <a:ea typeface="Calibri" pitchFamily="34" charset="-122"/>
-                <a:cs typeface="Calibri" pitchFamily="34" charset="-120"/>
-              </a:rPr>
-              <a:t>12.0%</a:t>
-            </a:r>
-            <a:endParaRPr lang="en-US" sz="3600" dirty="0"/>
-          </a:p>
-        </p:txBody>
-      </p:sp>
-      <p:sp>
-        <p:nvSpPr>
-          <p:cNvPr id="12" name="Text 10"/>
-          <p:cNvSpPr/>
-          <p:nvPr/>
-        </p:nvSpPr>
-        <p:spPr>
-          <a:xfrm>
-            <a:off x="3444240" y="3291840"/>
-            <a:ext cx="2072640" cy="365760"/>
-          </a:xfrm>
-          <a:prstGeom prst="rect">
-            <a:avLst/>
-          </a:prstGeom>
-          <a:noFill/>
-          <a:ln/>
-        </p:spPr>
-        <p:txBody>
-          <a:bodyPr wrap="square" rtlCol="0" anchor="t"/>
-          <a:lstStyle/>
-          <a:p>
-            <a:pPr algn="ctr" indent="0" marL="0">
-              <a:buNone/>
-            </a:pPr>
-            <a:r>
-              <a:rPr lang="en-US" sz="900" dirty="0">
-                <a:solidFill>
-                  <a:srgbClr val="546E7A"/>
-                </a:solidFill>
-                <a:latin typeface="Microsoft YaHei" pitchFamily="34" charset="0"/>
-                <a:ea typeface="Microsoft YaHei" pitchFamily="34" charset="-122"/>
-                <a:cs typeface="Microsoft YaHei" pitchFamily="34" charset="-120"/>
-              </a:rPr>
-              <a:t>YoY</a:t>
-            </a:r>
-            <a:endParaRPr lang="en-US" sz="900" dirty="0"/>
-          </a:p>
-        </p:txBody>
-      </p:sp>
-      <p:sp>
-        <p:nvSpPr>
-          <p:cNvPr id="13" name="Shape 11"/>
-          <p:cNvSpPr/>
-          <p:nvPr/>
-        </p:nvSpPr>
-        <p:spPr>
-          <a:xfrm>
-            <a:off x="5791200" y="1188720"/>
-            <a:ext cx="2255520" cy="4114800"/>
-          </a:xfrm>
-          <a:prstGeom prst="roundRect">
-            <a:avLst>
-              <a:gd name="adj" fmla="val 2432"/>
-            </a:avLst>
-          </a:prstGeom>
-          <a:solidFill>
-            <a:srgbClr val="FFFFFF"/>
-          </a:solidFill>
-          <a:ln/>
-          <a:effectLst>
-            <a:outerShdw sx="100000" sy="100000" kx="0" ky="0" algn="bl" rotWithShape="0" blurRad="101600" dist="38100" dir="5400000">
-              <a:srgbClr val="999999">
-                <a:alpha val="40000"/>
-              </a:srgbClr>
-            </a:outerShdw>
-          </a:effectLst>
-        </p:spPr>
-      </p:sp>
-      <p:sp>
-        <p:nvSpPr>
-          <p:cNvPr id="14" name="Shape 12"/>
-          <p:cNvSpPr/>
-          <p:nvPr/>
-        </p:nvSpPr>
-        <p:spPr>
-          <a:xfrm>
-            <a:off x="5791200" y="5193792"/>
-            <a:ext cx="2255520" cy="109728"/>
-          </a:xfrm>
-          <a:prstGeom prst="rect">
-            <a:avLst/>
-          </a:prstGeom>
-          <a:solidFill>
-            <a:srgbClr val="F0A500"/>
-          </a:solidFill>
-          <a:ln/>
-        </p:spPr>
-      </p:sp>
-      <p:sp>
-        <p:nvSpPr>
-          <p:cNvPr id="15" name="Text 13"/>
-          <p:cNvSpPr/>
-          <p:nvPr/>
-        </p:nvSpPr>
-        <p:spPr>
-          <a:xfrm>
-            <a:off x="5882640" y="1371600"/>
-            <a:ext cx="2072640" cy="365760"/>
-          </a:xfrm>
-          <a:prstGeom prst="rect">
-            <a:avLst/>
-          </a:prstGeom>
-          <a:noFill/>
-          <a:ln/>
-        </p:spPr>
-        <p:txBody>
-          <a:bodyPr wrap="square" rtlCol="0" anchor="t"/>
-          <a:lstStyle/>
-          <a:p>
-            <a:pPr algn="ctr" indent="0" marL="0">
-              <a:buNone/>
-            </a:pPr>
-            <a:r>
-              <a:rPr lang="en-US" sz="1100" b="1" dirty="0">
-                <a:solidFill>
-                  <a:srgbClr val="546E7A"/>
-                </a:solidFill>
-                <a:latin typeface="Microsoft YaHei" pitchFamily="34" charset="0"/>
-                <a:ea typeface="Microsoft YaHei" pitchFamily="34" charset="-122"/>
-                <a:cs typeface="Microsoft YaHei" pitchFamily="34" charset="-120"/>
-              </a:rPr>
-              <a:t>最高港区</a:t>
-            </a:r>
-            <a:endParaRPr lang="en-US" sz="1100" dirty="0"/>
-          </a:p>
-        </p:txBody>
-      </p:sp>
-      <p:sp>
-        <p:nvSpPr>
-          <p:cNvPr id="16" name="Text 14"/>
-          <p:cNvSpPr/>
-          <p:nvPr/>
-        </p:nvSpPr>
-        <p:spPr>
-          <a:xfrm>
-            <a:off x="5882640" y="2011680"/>
-            <a:ext cx="2072640" cy="1097280"/>
-          </a:xfrm>
-          <a:prstGeom prst="rect">
-            <a:avLst/>
-          </a:prstGeom>
-          <a:noFill/>
-          <a:ln/>
-        </p:spPr>
-        <p:txBody>
-          <a:bodyPr wrap="square" rtlCol="0" anchor="t"/>
-          <a:lstStyle/>
-          <a:p>
-            <a:pPr algn="ctr" indent="0" marL="0">
-              <a:buNone/>
-            </a:pPr>
-            <a:r>
-              <a:rPr lang="en-US" sz="3600" b="1" dirty="0">
-                <a:solidFill>
-                  <a:srgbClr val="F0A500"/>
-                </a:solidFill>
-                <a:latin typeface="Calibri" pitchFamily="34" charset="0"/>
-                <a:ea typeface="Calibri" pitchFamily="34" charset="-122"/>
-                <a:cs typeface="Calibri" pitchFamily="34" charset="-120"/>
-              </a:rPr>
-              <a:t>大连港</a:t>
-            </a:r>
-            <a:endParaRPr lang="en-US" sz="3600" dirty="0"/>
-          </a:p>
-        </p:txBody>
-      </p:sp>
-      <p:sp>
-        <p:nvSpPr>
-          <p:cNvPr id="17" name="Text 15"/>
-          <p:cNvSpPr/>
-          <p:nvPr/>
-        </p:nvSpPr>
-        <p:spPr>
-          <a:xfrm>
-            <a:off x="5882640" y="3291840"/>
-            <a:ext cx="2072640" cy="365760"/>
-          </a:xfrm>
-          <a:prstGeom prst="rect">
-            <a:avLst/>
-          </a:prstGeom>
-          <a:noFill/>
-          <a:ln/>
-        </p:spPr>
-        <p:txBody>
-          <a:bodyPr wrap="square" rtlCol="0" anchor="t"/>
-          <a:lstStyle/>
-          <a:p>
-            <a:pPr algn="ctr" indent="0" marL="0">
-              <a:buNone/>
-            </a:pPr>
-            <a:r>
-              <a:rPr lang="en-US" sz="900" dirty="0">
-                <a:solidFill>
-                  <a:srgbClr val="546E7A"/>
-                </a:solidFill>
-                <a:latin typeface="Microsoft YaHei" pitchFamily="34" charset="0"/>
-                <a:ea typeface="Microsoft YaHei" pitchFamily="34" charset="-122"/>
-                <a:cs typeface="Microsoft YaHei" pitchFamily="34" charset="-120"/>
-              </a:rPr>
-              <a:t>4500.5 万吨</a:t>
-            </a:r>
-            <a:endParaRPr lang="en-US" sz="900" dirty="0"/>
+            <a:endParaRPr lang="en-US" sz="1800" dirty="0"/>
           </a:p>
         </p:txBody>
       </p:sp>
@@ -3155,13 +2964,13 @@
 </p:sld>
 </file>
 
-<file path=ppt/slides/slide4.xml><?xml version="1.0" encoding="utf-8"?>
+<file path=ppt/slides/slide12.xml><?xml version="1.0" encoding="utf-8"?>
 <p:sld xmlns:a="http://schemas.openxmlformats.org/drawingml/2006/main" xmlns:r="http://schemas.openxmlformats.org/officeDocument/2006/relationships" xmlns:p="http://schemas.openxmlformats.org/presentationml/2006/main">
-  <p:cSld name="Slide 4">
+  <p:cSld name="Slide 12">
     <p:bg>
       <p:bgPr>
         <a:solidFill>
-          <a:srgbClr val="1E3A5F"/>
+          <a:srgbClr val="AC916B"/>
         </a:solidFill>
       </p:bgPr>
     </p:bg>
@@ -3187,8 +2996,8 @@
         </p:nvSpPr>
         <p:spPr>
           <a:xfrm>
-            <a:off x="914400" y="1371600"/>
-            <a:ext cx="2743200" cy="1828800"/>
+            <a:off x="548640" y="1828800"/>
+            <a:ext cx="11094415" cy="1828800"/>
           </a:xfrm>
           <a:prstGeom prst="rect">
             <a:avLst/>
@@ -3206,13 +3015,13 @@
             <a:r>
               <a:rPr lang="en-US" sz="7200" b="1" dirty="0">
                 <a:solidFill>
-                  <a:srgbClr val="F0A500"/>
+                  <a:srgbClr val="FBF6EE"/>
                 </a:solidFill>
-                <a:latin typeface="Calibri" pitchFamily="34" charset="0"/>
-                <a:ea typeface="Calibri" pitchFamily="34" charset="-122"/>
-                <a:cs typeface="Calibri" pitchFamily="34" charset="-120"/>
+                <a:latin typeface="Noto Serif SC" pitchFamily="34" charset="0"/>
+                <a:ea typeface="Noto Serif SC" pitchFamily="34" charset="-122"/>
+                <a:cs typeface="Noto Serif SC" pitchFamily="34" charset="-120"/>
               </a:rPr>
-              <a:t>01</a:t>
+              <a:t>附录</a:t>
             </a:r>
             <a:endParaRPr lang="en-US" sz="7200" dirty="0"/>
           </a:p>
@@ -3226,8 +3035,8 @@
         </p:nvSpPr>
         <p:spPr>
           <a:xfrm>
-            <a:off x="914400" y="3474720"/>
-            <a:ext cx="7315200" cy="914400"/>
+            <a:off x="548640" y="4114800"/>
+            <a:ext cx="11094415" cy="914400"/>
           </a:xfrm>
           <a:prstGeom prst="rect">
             <a:avLst/>
@@ -3243,39 +3052,19 @@
               <a:buNone/>
             </a:pPr>
             <a:r>
-              <a:rPr lang="en-US" sz="2200" b="1" dirty="0">
+              <a:rPr lang="en-US" sz="2400" dirty="0">
                 <a:solidFill>
-                  <a:srgbClr val="FFFFFF"/>
+                  <a:srgbClr val="FBF6EE"/>
                 </a:solidFill>
-                <a:latin typeface="Microsoft YaHei" pitchFamily="34" charset="0"/>
-                <a:ea typeface="Microsoft YaHei" pitchFamily="34" charset="-122"/>
-                <a:cs typeface="Microsoft YaHei" pitchFamily="34" charset="-120"/>
+                <a:latin typeface="Noto Serif SC" pitchFamily="34" charset="0"/>
+                <a:ea typeface="Noto Serif SC" pitchFamily="34" charset="-122"/>
+                <a:cs typeface="Noto Serif SC" pitchFamily="34" charset="-120"/>
               </a:rPr>
-              <a:t>一、港区吞吐量现状</a:t>
+              <a:t>完整数据明细</a:t>
             </a:r>
-            <a:endParaRPr lang="en-US" sz="2200" dirty="0"/>
-          </a:p>
-        </p:txBody>
-      </p:sp>
-      <p:sp>
-        <p:nvSpPr>
-          <p:cNvPr id="4" name="Shape 2"/>
-          <p:cNvSpPr/>
-          <p:nvPr/>
-        </p:nvSpPr>
-        <p:spPr>
-          <a:xfrm>
-            <a:off x="914400" y="4389120"/>
-            <a:ext cx="1828800" cy="54864"/>
-          </a:xfrm>
-          <a:prstGeom prst="rect">
-            <a:avLst/>
-          </a:prstGeom>
-          <a:solidFill>
-            <a:srgbClr val="F0A500"/>
-          </a:solidFill>
-          <a:ln/>
-        </p:spPr>
+            <a:endParaRPr lang="en-US" sz="2400" dirty="0"/>
+          </a:p>
+        </p:txBody>
       </p:sp>
     </p:spTree>
   </p:cSld>
@@ -3285,216 +3074,13 @@
 </p:sld>
 </file>
 
-<file path=ppt/slides/slide5.xml><?xml version="1.0" encoding="utf-8"?>
+<file path=ppt/slides/slide13.xml><?xml version="1.0" encoding="utf-8"?>
 <p:sld xmlns:a="http://schemas.openxmlformats.org/drawingml/2006/main" xmlns:r="http://schemas.openxmlformats.org/officeDocument/2006/relationships" xmlns:p="http://schemas.openxmlformats.org/presentationml/2006/main">
-  <p:cSld name="Slide 5">
-    <p:spTree>
-      <p:nvGrpSpPr>
-        <p:cNvPr id="1" name=""/>
-        <p:cNvGrpSpPr/>
-        <p:nvPr/>
-      </p:nvGrpSpPr>
-      <p:grpSpPr>
-        <a:xfrm>
-          <a:off x="0" y="0"/>
-          <a:ext cx="0" cy="0"/>
-          <a:chOff x="0" y="0"/>
-          <a:chExt cx="0" cy="0"/>
-        </a:xfrm>
-      </p:grpSpPr>
-      <p:sp>
-        <p:nvSpPr>
-          <p:cNvPr id="2" name="Text 0"/>
-          <p:cNvSpPr/>
-          <p:nvPr/>
-        </p:nvSpPr>
-        <p:spPr>
-          <a:xfrm>
-            <a:off x="457200" y="274320"/>
-            <a:ext cx="8229600" cy="640080"/>
-          </a:xfrm>
-          <a:prstGeom prst="rect">
-            <a:avLst/>
-          </a:prstGeom>
-          <a:noFill/>
-          <a:ln/>
-        </p:spPr>
-        <p:txBody>
-          <a:bodyPr wrap="square" rtlCol="0" anchor="t"/>
-          <a:lstStyle/>
-          <a:p>
-            <a:pPr algn="l" indent="0" marL="0">
-              <a:buNone/>
-            </a:pPr>
-            <a:r>
-              <a:rPr lang="en-US" sz="1800" b="1" dirty="0">
-                <a:solidFill>
-                  <a:srgbClr val="1E3A5F"/>
-                </a:solidFill>
-                <a:latin typeface="Microsoft YaHei" pitchFamily="34" charset="0"/>
-                <a:ea typeface="Microsoft YaHei" pitchFamily="34" charset="-122"/>
-                <a:cs typeface="Microsoft YaHei" pitchFamily="34" charset="-120"/>
-              </a:rPr>
-              <a:t>港区吞吐量</a:t>
-            </a:r>
-            <a:endParaRPr lang="en-US" sz="1800" dirty="0"/>
-          </a:p>
-        </p:txBody>
-      </p:sp>
-      <p:graphicFrame>
-        <p:nvGraphicFramePr>
-          <p:cNvPr id="3" name="Chart 0" descr=""/>
-          <p:cNvGraphicFramePr/>
-          <p:nvPr/>
-        </p:nvGraphicFramePr>
-        <p:xfrm>
-          <a:off x="457200" y="1097280"/>
-          <a:ext cx="5120640" cy="5029200"/>
-        </p:xfrm>
-        <a:graphic xmlns:a="http://schemas.openxmlformats.org/drawingml/2006/main">
-          <a:graphicData uri="http://schemas.openxmlformats.org/drawingml/2006/chart">
-            <c:chart xmlns:c="http://schemas.openxmlformats.org/drawingml/2006/chart" r:id="rId1"/>
-          </a:graphicData>
-        </a:graphic>
-      </p:graphicFrame>
-    </p:spTree>
-  </p:cSld>
-  <p:clrMapOvr>
-    <a:masterClrMapping/>
-  </p:clrMapOvr>
-</p:sld>
-</file>
-
-<file path=ppt/slides/slide6.xml><?xml version="1.0" encoding="utf-8"?>
-<p:sld xmlns:a="http://schemas.openxmlformats.org/drawingml/2006/main" xmlns:r="http://schemas.openxmlformats.org/officeDocument/2006/relationships" xmlns:p="http://schemas.openxmlformats.org/presentationml/2006/main">
-  <p:cSld name="Slide 6">
-    <p:spTree>
-      <p:nvGrpSpPr>
-        <p:cNvPr id="1" name=""/>
-        <p:cNvGrpSpPr/>
-        <p:nvPr/>
-      </p:nvGrpSpPr>
-      <p:grpSpPr>
-        <a:xfrm>
-          <a:off x="0" y="0"/>
-          <a:ext cx="0" cy="0"/>
-          <a:chOff x="0" y="0"/>
-          <a:chExt cx="0" cy="0"/>
-        </a:xfrm>
-      </p:grpSpPr>
-      <p:sp>
-        <p:nvSpPr>
-          <p:cNvPr id="2" name="Shape 0"/>
-          <p:cNvSpPr/>
-          <p:nvPr/>
-        </p:nvSpPr>
-        <p:spPr>
-          <a:xfrm>
-            <a:off x="274320" y="274320"/>
-            <a:ext cx="73152" cy="6309360"/>
-          </a:xfrm>
-          <a:prstGeom prst="rect">
-            <a:avLst/>
-          </a:prstGeom>
-          <a:solidFill>
-            <a:srgbClr val="F0A500"/>
-          </a:solidFill>
-          <a:ln/>
-        </p:spPr>
-      </p:sp>
-      <p:sp>
-        <p:nvSpPr>
-          <p:cNvPr id="3" name="Text 1"/>
-          <p:cNvSpPr/>
-          <p:nvPr/>
-        </p:nvSpPr>
-        <p:spPr>
-          <a:xfrm>
-            <a:off x="548640" y="274320"/>
-            <a:ext cx="8229600" cy="731520"/>
-          </a:xfrm>
-          <a:prstGeom prst="rect">
-            <a:avLst/>
-          </a:prstGeom>
-          <a:noFill/>
-          <a:ln/>
-        </p:spPr>
-        <p:txBody>
-          <a:bodyPr wrap="square" rtlCol="0" anchor="t"/>
-          <a:lstStyle/>
-          <a:p>
-            <a:pPr algn="l" indent="0" marL="0">
-              <a:buNone/>
-            </a:pPr>
-            <a:r>
-              <a:rPr lang="en-US" sz="1800" b="1" dirty="0">
-                <a:solidFill>
-                  <a:srgbClr val="1E3A5F"/>
-                </a:solidFill>
-                <a:latin typeface="Microsoft YaHei" pitchFamily="34" charset="0"/>
-                <a:ea typeface="Microsoft YaHei" pitchFamily="34" charset="-122"/>
-                <a:cs typeface="Microsoft YaHei" pitchFamily="34" charset="-120"/>
-              </a:rPr>
-              <a:t>一、港区吞吐量现状</a:t>
-            </a:r>
-            <a:endParaRPr lang="en-US" sz="1800" dirty="0"/>
-          </a:p>
-        </p:txBody>
-      </p:sp>
-      <p:sp>
-        <p:nvSpPr>
-          <p:cNvPr id="4" name="Text 2"/>
-          <p:cNvSpPr/>
-          <p:nvPr/>
-        </p:nvSpPr>
-        <p:spPr>
-          <a:xfrm>
-            <a:off x="731520" y="1188720"/>
-            <a:ext cx="7863840" cy="5303520"/>
-          </a:xfrm>
-          <a:prstGeom prst="rect">
-            <a:avLst/>
-          </a:prstGeom>
-          <a:noFill/>
-          <a:ln/>
-        </p:spPr>
-        <p:txBody>
-          <a:bodyPr wrap="square" rtlCol="0" anchor="t"/>
-          <a:lstStyle/>
-          <a:p>
-            <a:pPr algn="l" indent="0" marL="0">
-              <a:buNone/>
-            </a:pPr>
-            <a:r>
-              <a:rPr lang="en-US" sz="1400" dirty="0">
-                <a:solidFill>
-                  <a:srgbClr val="333333"/>
-                </a:solidFill>
-                <a:latin typeface="Microsoft YaHei" pitchFamily="34" charset="0"/>
-                <a:ea typeface="Microsoft YaHei" pitchFamily="34" charset="-122"/>
-                <a:cs typeface="Microsoft YaHei" pitchFamily="34" charset="-120"/>
-              </a:rPr>
-              <a:t>2026 Q1 大连港吞吐量达 4500.5 万吨，同比增长 12%，居三港之首；营口港 3200.1 万吨，锦州港 1800.0 万吨。</a:t>
-            </a:r>
-            <a:endParaRPr lang="en-US" sz="1400" dirty="0"/>
-          </a:p>
-        </p:txBody>
-      </p:sp>
-    </p:spTree>
-  </p:cSld>
-  <p:clrMapOvr>
-    <a:masterClrMapping/>
-  </p:clrMapOvr>
-</p:sld>
-</file>
-
-<file path=ppt/slides/slide7.xml><?xml version="1.0" encoding="utf-8"?>
-<p:sld xmlns:a="http://schemas.openxmlformats.org/drawingml/2006/main" xmlns:r="http://schemas.openxmlformats.org/officeDocument/2006/relationships" xmlns:p="http://schemas.openxmlformats.org/presentationml/2006/main">
-  <p:cSld name="Slide 7">
+  <p:cSld name="Slide 13">
     <p:bg>
       <p:bgPr>
         <a:solidFill>
-          <a:srgbClr val="1E3A5F"/>
+          <a:srgbClr val="FBF6EE"/>
         </a:solidFill>
       </p:bgPr>
     </p:bg>
@@ -3520,8 +3106,8 @@
         </p:nvSpPr>
         <p:spPr>
           <a:xfrm>
-            <a:off x="914400" y="1371600"/>
-            <a:ext cx="2743200" cy="1828800"/>
+            <a:off x="548640" y="457200"/>
+            <a:ext cx="11094415" cy="365760"/>
           </a:xfrm>
           <a:prstGeom prst="rect">
             <a:avLst/>
@@ -3537,79 +3123,392 @@
               <a:buNone/>
             </a:pPr>
             <a:r>
-              <a:rPr lang="en-US" sz="7200" b="1" dirty="0">
+              <a:rPr lang="en-US" sz="1200" b="1" dirty="0">
                 <a:solidFill>
-                  <a:srgbClr val="F0A500"/>
+                  <a:srgbClr val="004889"/>
                 </a:solidFill>
-                <a:latin typeface="Calibri" pitchFamily="34" charset="0"/>
-                <a:ea typeface="Calibri" pitchFamily="34" charset="-122"/>
-                <a:cs typeface="Calibri" pitchFamily="34" charset="-120"/>
+                <a:latin typeface="Noto Serif SC" pitchFamily="34" charset="0"/>
+                <a:ea typeface="Noto Serif SC" pitchFamily="34" charset="-122"/>
+                <a:cs typeface="Noto Serif SC" pitchFamily="34" charset="-120"/>
               </a:rPr>
-              <a:t>02</a:t>
+              <a:t>完整数据</a:t>
             </a:r>
-            <a:endParaRPr lang="en-US" sz="7200" dirty="0"/>
-          </a:p>
-        </p:txBody>
-      </p:sp>
-      <p:sp>
-        <p:nvSpPr>
-          <p:cNvPr id="3" name="Text 1"/>
-          <p:cNvSpPr/>
-          <p:nvPr/>
-        </p:nvSpPr>
-        <p:spPr>
-          <a:xfrm>
-            <a:off x="914400" y="3474720"/>
-            <a:ext cx="7315200" cy="914400"/>
-          </a:xfrm>
-          <a:prstGeom prst="rect">
-            <a:avLst/>
-          </a:prstGeom>
-          <a:noFill/>
-          <a:ln/>
-        </p:spPr>
-        <p:txBody>
-          <a:bodyPr wrap="square" rtlCol="0" anchor="t"/>
-          <a:lstStyle/>
-          <a:p>
-            <a:pPr algn="l" indent="0" marL="0">
-              <a:buNone/>
-            </a:pPr>
-            <a:r>
-              <a:rPr lang="en-US" sz="2200" b="1" dirty="0">
-                <a:solidFill>
-                  <a:srgbClr val="FFFFFF"/>
-                </a:solidFill>
-                <a:latin typeface="Microsoft YaHei" pitchFamily="34" charset="0"/>
-                <a:ea typeface="Microsoft YaHei" pitchFamily="34" charset="-122"/>
-                <a:cs typeface="Microsoft YaHei" pitchFamily="34" charset="-120"/>
-              </a:rPr>
-              <a:t>二、关键指标分析</a:t>
-            </a:r>
-            <a:endParaRPr lang="en-US" sz="2200" dirty="0"/>
-          </a:p>
-        </p:txBody>
-      </p:sp>
-      <p:sp>
-        <p:nvSpPr>
-          <p:cNvPr id="4" name="Shape 2"/>
-          <p:cNvSpPr/>
-          <p:nvPr/>
-        </p:nvSpPr>
-        <p:spPr>
-          <a:xfrm>
-            <a:off x="914400" y="4389120"/>
-            <a:ext cx="1828800" cy="54864"/>
-          </a:xfrm>
-          <a:prstGeom prst="rect">
-            <a:avLst/>
-          </a:prstGeom>
-          <a:solidFill>
-            <a:srgbClr val="F0A500"/>
-          </a:solidFill>
-          <a:ln/>
-        </p:spPr>
-      </p:sp>
+            <a:endParaRPr lang="en-US" sz="1200" dirty="0"/>
+          </a:p>
+        </p:txBody>
+      </p:sp>
+      <p:graphicFrame>
+        <p:nvGraphicFramePr>
+          <p:cNvPr id="14" name="Table 0"/>
+          <p:cNvGraphicFramePr>
+            <a:graphicFrameLocks noGrp="1"/>
+          </p:cNvGraphicFramePr>
+          <p:nvPr>
+            <p:extLst>
+              <p:ext uri="{D42A27DB-BD31-4B8C-83A1-F6EECF244321}">
+                <p14:modId xmlns:p14="http://schemas.microsoft.com/office/powerpoint/2010/main" val="1579011935"/>
+              </p:ext>
+            </p:extLst>
+          </p:nvPr>
+        </p:nvGraphicFramePr>
+        <p:xfrm>
+          <a:off x="548640" y="914400"/>
+          <a:ext cx="11094415" cy="5029200"/>
+        </p:xfrm>
+        <a:graphic>
+          <a:graphicData uri="http://schemas.openxmlformats.org/drawingml/2006/table">
+            <a:tbl>
+              <a:tblPr/>
+              <a:tblGrid>
+                <a:gridCol w="5547208"/>
+                <a:gridCol w="5547208"/>
+              </a:tblGrid>
+              <a:tr h="1257300">
+                <a:tc>
+                  <a:txBody>
+                    <a:bodyPr/>
+                    <a:lstStyle/>
+                    <a:p>
+                      <a:pPr indent="0" marL="0">
+                        <a:buNone/>
+                      </a:pPr>
+                      <a:r>
+                        <a:rPr lang="en-US" sz="900" b="1" dirty="0">
+                          <a:solidFill>
+                            <a:srgbClr val="FBF6EE"/>
+                          </a:solidFill>
+                          <a:latin typeface="Noto Sans SC" pitchFamily="34" charset="0"/>
+                          <a:ea typeface="Noto Sans SC" pitchFamily="34" charset="-122"/>
+                          <a:cs typeface="Noto Sans SC" pitchFamily="34" charset="-120"/>
+                        </a:rPr>
+                        <a:t>港区</a:t>
+                      </a:r>
+                      <a:endParaRPr lang="en-US" sz="900" dirty="0">
+                        <a:latin typeface="Noto Sans SC" charset="0"/>
+                        <a:ea typeface="Noto Sans SC" charset="0"/>
+                        <a:cs typeface="Noto Sans SC" charset="0"/>
+                      </a:endParaRPr>
+                    </a:p>
+                  </a:txBody>
+                  <a:tcPr marL="91440" marR="91440" marT="45720" marB="45720">
+                    <a:lnL w="0" cap="flat" cmpd="sng" algn="ctr">
+                      <a:noFill/>
+                    </a:lnL>
+                    <a:lnR w="0" cap="flat" cmpd="sng" algn="ctr">
+                      <a:noFill/>
+                    </a:lnR>
+                    <a:lnT w="0" cap="flat" cmpd="sng" algn="ctr">
+                      <a:noFill/>
+                    </a:lnT>
+                    <a:lnB w="0" cap="flat" cmpd="sng" algn="ctr">
+                      <a:noFill/>
+                    </a:lnB>
+                    <a:solidFill>
+                      <a:srgbClr val="004889"/>
+                    </a:solidFill>
+                  </a:tcPr>
+                </a:tc>
+                <a:tc>
+                  <a:txBody>
+                    <a:bodyPr/>
+                    <a:lstStyle/>
+                    <a:p>
+                      <a:pPr indent="0" marL="0">
+                        <a:buNone/>
+                      </a:pPr>
+                      <a:r>
+                        <a:rPr lang="en-US" sz="900" b="1" dirty="0">
+                          <a:solidFill>
+                            <a:srgbClr val="FBF6EE"/>
+                          </a:solidFill>
+                          <a:latin typeface="Noto Sans SC" pitchFamily="34" charset="0"/>
+                          <a:ea typeface="Noto Sans SC" pitchFamily="34" charset="-122"/>
+                          <a:cs typeface="Noto Sans SC" pitchFamily="34" charset="-120"/>
+                        </a:rPr>
+                        <a:t>吞吐量</a:t>
+                      </a:r>
+                      <a:endParaRPr lang="en-US" sz="900" dirty="0">
+                        <a:latin typeface="Noto Sans SC" charset="0"/>
+                        <a:ea typeface="Noto Sans SC" charset="0"/>
+                        <a:cs typeface="Noto Sans SC" charset="0"/>
+                      </a:endParaRPr>
+                    </a:p>
+                  </a:txBody>
+                  <a:tcPr marL="91440" marR="91440" marT="45720" marB="45720">
+                    <a:lnL w="0" cap="flat" cmpd="sng" algn="ctr">
+                      <a:noFill/>
+                    </a:lnL>
+                    <a:lnR w="0" cap="flat" cmpd="sng" algn="ctr">
+                      <a:noFill/>
+                    </a:lnR>
+                    <a:lnT w="0" cap="flat" cmpd="sng" algn="ctr">
+                      <a:noFill/>
+                    </a:lnT>
+                    <a:lnB w="0" cap="flat" cmpd="sng" algn="ctr">
+                      <a:noFill/>
+                    </a:lnB>
+                    <a:solidFill>
+                      <a:srgbClr val="004889"/>
+                    </a:solidFill>
+                  </a:tcPr>
+                </a:tc>
+              </a:tr>
+              <a:tr h="1257300">
+                <a:tc>
+                  <a:txBody>
+                    <a:bodyPr/>
+                    <a:lstStyle/>
+                    <a:p>
+                      <a:pPr indent="0" marL="0">
+                        <a:buNone/>
+                      </a:pPr>
+                      <a:r>
+                        <a:rPr lang="en-US" sz="900" dirty="0">
+                          <a:solidFill>
+                            <a:srgbClr val="000000"/>
+                          </a:solidFill>
+                          <a:latin typeface="Noto Sans SC" pitchFamily="34" charset="0"/>
+                          <a:ea typeface="Noto Sans SC" pitchFamily="34" charset="-122"/>
+                          <a:cs typeface="Noto Sans SC" pitchFamily="34" charset="-120"/>
+                        </a:rPr>
+                        <a:t>大连港</a:t>
+                      </a:r>
+                      <a:endParaRPr lang="en-US" sz="900" dirty="0">
+                        <a:latin typeface="Noto Sans SC" charset="0"/>
+                        <a:ea typeface="Noto Sans SC" charset="0"/>
+                        <a:cs typeface="Noto Sans SC" charset="0"/>
+                      </a:endParaRPr>
+                    </a:p>
+                  </a:txBody>
+                  <a:tcPr marL="91440" marR="91440" marT="45720" marB="45720">
+                    <a:lnL w="0" cap="flat" cmpd="sng" algn="ctr">
+                      <a:noFill/>
+                    </a:lnL>
+                    <a:lnR w="0" cap="flat" cmpd="sng" algn="ctr">
+                      <a:noFill/>
+                    </a:lnR>
+                    <a:lnT w="0" cap="flat" cmpd="sng" algn="ctr">
+                      <a:noFill/>
+                    </a:lnT>
+                    <a:lnB w="0" cap="flat" cmpd="sng" algn="ctr">
+                      <a:noFill/>
+                    </a:lnB>
+                  </a:tcPr>
+                </a:tc>
+                <a:tc>
+                  <a:txBody>
+                    <a:bodyPr/>
+                    <a:lstStyle/>
+                    <a:p>
+                      <a:pPr indent="0" marL="0">
+                        <a:buNone/>
+                      </a:pPr>
+                      <a:r>
+                        <a:rPr lang="en-US" sz="900" dirty="0">
+                          <a:solidFill>
+                            <a:srgbClr val="000000"/>
+                          </a:solidFill>
+                          <a:latin typeface="Noto Sans SC" pitchFamily="34" charset="0"/>
+                          <a:ea typeface="Noto Sans SC" pitchFamily="34" charset="-122"/>
+                          <a:cs typeface="Noto Sans SC" pitchFamily="34" charset="-120"/>
+                        </a:rPr>
+                        <a:t>4,500.50</a:t>
+                      </a:r>
+                      <a:endParaRPr lang="en-US" sz="900" dirty="0">
+                        <a:latin typeface="Noto Sans SC" charset="0"/>
+                        <a:ea typeface="Noto Sans SC" charset="0"/>
+                        <a:cs typeface="Noto Sans SC" charset="0"/>
+                      </a:endParaRPr>
+                    </a:p>
+                  </a:txBody>
+                  <a:tcPr marL="91440" marR="91440" marT="45720" marB="45720">
+                    <a:lnL w="0" cap="flat" cmpd="sng" algn="ctr">
+                      <a:noFill/>
+                    </a:lnL>
+                    <a:lnR w="0" cap="flat" cmpd="sng" algn="ctr">
+                      <a:noFill/>
+                    </a:lnR>
+                    <a:lnT w="0" cap="flat" cmpd="sng" algn="ctr">
+                      <a:noFill/>
+                    </a:lnT>
+                    <a:lnB w="0" cap="flat" cmpd="sng" algn="ctr">
+                      <a:noFill/>
+                    </a:lnB>
+                  </a:tcPr>
+                </a:tc>
+              </a:tr>
+              <a:tr h="1257300">
+                <a:tc>
+                  <a:txBody>
+                    <a:bodyPr/>
+                    <a:lstStyle/>
+                    <a:p>
+                      <a:pPr indent="0" marL="0">
+                        <a:buNone/>
+                      </a:pPr>
+                      <a:r>
+                        <a:rPr lang="en-US" sz="900" dirty="0">
+                          <a:solidFill>
+                            <a:srgbClr val="000000"/>
+                          </a:solidFill>
+                          <a:latin typeface="Noto Sans SC" pitchFamily="34" charset="0"/>
+                          <a:ea typeface="Noto Sans SC" pitchFamily="34" charset="-122"/>
+                          <a:cs typeface="Noto Sans SC" pitchFamily="34" charset="-120"/>
+                        </a:rPr>
+                        <a:t>营口港</a:t>
+                      </a:r>
+                      <a:endParaRPr lang="en-US" sz="900" dirty="0">
+                        <a:latin typeface="Noto Sans SC" charset="0"/>
+                        <a:ea typeface="Noto Sans SC" charset="0"/>
+                        <a:cs typeface="Noto Sans SC" charset="0"/>
+                      </a:endParaRPr>
+                    </a:p>
+                  </a:txBody>
+                  <a:tcPr marL="91440" marR="91440" marT="45720" marB="45720">
+                    <a:lnL w="0" cap="flat" cmpd="sng" algn="ctr">
+                      <a:noFill/>
+                    </a:lnL>
+                    <a:lnR w="0" cap="flat" cmpd="sng" algn="ctr">
+                      <a:noFill/>
+                    </a:lnR>
+                    <a:lnT w="0" cap="flat" cmpd="sng" algn="ctr">
+                      <a:noFill/>
+                    </a:lnT>
+                    <a:lnB w="0" cap="flat" cmpd="sng" algn="ctr">
+                      <a:noFill/>
+                    </a:lnB>
+                  </a:tcPr>
+                </a:tc>
+                <a:tc>
+                  <a:txBody>
+                    <a:bodyPr/>
+                    <a:lstStyle/>
+                    <a:p>
+                      <a:pPr indent="0" marL="0">
+                        <a:buNone/>
+                      </a:pPr>
+                      <a:r>
+                        <a:rPr lang="en-US" sz="900" dirty="0">
+                          <a:solidFill>
+                            <a:srgbClr val="000000"/>
+                          </a:solidFill>
+                          <a:latin typeface="Noto Sans SC" pitchFamily="34" charset="0"/>
+                          <a:ea typeface="Noto Sans SC" pitchFamily="34" charset="-122"/>
+                          <a:cs typeface="Noto Sans SC" pitchFamily="34" charset="-120"/>
+                        </a:rPr>
+                        <a:t>3,200.10</a:t>
+                      </a:r>
+                      <a:endParaRPr lang="en-US" sz="900" dirty="0">
+                        <a:latin typeface="Noto Sans SC" charset="0"/>
+                        <a:ea typeface="Noto Sans SC" charset="0"/>
+                        <a:cs typeface="Noto Sans SC" charset="0"/>
+                      </a:endParaRPr>
+                    </a:p>
+                  </a:txBody>
+                  <a:tcPr marL="91440" marR="91440" marT="45720" marB="45720">
+                    <a:lnL w="0" cap="flat" cmpd="sng" algn="ctr">
+                      <a:noFill/>
+                    </a:lnL>
+                    <a:lnR w="0" cap="flat" cmpd="sng" algn="ctr">
+                      <a:noFill/>
+                    </a:lnR>
+                    <a:lnT w="0" cap="flat" cmpd="sng" algn="ctr">
+                      <a:noFill/>
+                    </a:lnT>
+                    <a:lnB w="0" cap="flat" cmpd="sng" algn="ctr">
+                      <a:noFill/>
+                    </a:lnB>
+                  </a:tcPr>
+                </a:tc>
+              </a:tr>
+              <a:tr h="1257300">
+                <a:tc>
+                  <a:txBody>
+                    <a:bodyPr/>
+                    <a:lstStyle/>
+                    <a:p>
+                      <a:pPr indent="0" marL="0">
+                        <a:buNone/>
+                      </a:pPr>
+                      <a:r>
+                        <a:rPr lang="en-US" sz="900" dirty="0">
+                          <a:solidFill>
+                            <a:srgbClr val="000000"/>
+                          </a:solidFill>
+                          <a:latin typeface="Noto Sans SC" pitchFamily="34" charset="0"/>
+                          <a:ea typeface="Noto Sans SC" pitchFamily="34" charset="-122"/>
+                          <a:cs typeface="Noto Sans SC" pitchFamily="34" charset="-120"/>
+                        </a:rPr>
+                        <a:t>锦州港</a:t>
+                      </a:r>
+                      <a:endParaRPr lang="en-US" sz="900" dirty="0">
+                        <a:latin typeface="Noto Sans SC" charset="0"/>
+                        <a:ea typeface="Noto Sans SC" charset="0"/>
+                        <a:cs typeface="Noto Sans SC" charset="0"/>
+                      </a:endParaRPr>
+                    </a:p>
+                  </a:txBody>
+                  <a:tcPr marL="91440" marR="91440" marT="45720" marB="45720">
+                    <a:lnL w="0" cap="flat" cmpd="sng" algn="ctr">
+                      <a:noFill/>
+                    </a:lnL>
+                    <a:lnR w="0" cap="flat" cmpd="sng" algn="ctr">
+                      <a:noFill/>
+                    </a:lnR>
+                    <a:lnT w="0" cap="flat" cmpd="sng" algn="ctr">
+                      <a:noFill/>
+                    </a:lnT>
+                    <a:lnB w="0" cap="flat" cmpd="sng" algn="ctr">
+                      <a:noFill/>
+                    </a:lnB>
+                  </a:tcPr>
+                </a:tc>
+                <a:tc>
+                  <a:txBody>
+                    <a:bodyPr/>
+                    <a:lstStyle/>
+                    <a:p>
+                      <a:pPr indent="0" marL="0">
+                        <a:buNone/>
+                      </a:pPr>
+                      <a:r>
+                        <a:rPr lang="en-US" sz="900" dirty="0">
+                          <a:solidFill>
+                            <a:srgbClr val="000000"/>
+                          </a:solidFill>
+                          <a:latin typeface="Noto Sans SC" pitchFamily="34" charset="0"/>
+                          <a:ea typeface="Noto Sans SC" pitchFamily="34" charset="-122"/>
+                          <a:cs typeface="Noto Sans SC" pitchFamily="34" charset="-120"/>
+                        </a:rPr>
+                        <a:t>1,800.00</a:t>
+                      </a:r>
+                      <a:endParaRPr lang="en-US" sz="900" dirty="0">
+                        <a:latin typeface="Noto Sans SC" charset="0"/>
+                        <a:ea typeface="Noto Sans SC" charset="0"/>
+                        <a:cs typeface="Noto Sans SC" charset="0"/>
+                      </a:endParaRPr>
+                    </a:p>
+                  </a:txBody>
+                  <a:tcPr marL="91440" marR="91440" marT="45720" marB="45720">
+                    <a:lnL w="0" cap="flat" cmpd="sng" algn="ctr">
+                      <a:noFill/>
+                    </a:lnL>
+                    <a:lnR w="0" cap="flat" cmpd="sng" algn="ctr">
+                      <a:noFill/>
+                    </a:lnR>
+                    <a:lnT w="0" cap="flat" cmpd="sng" algn="ctr">
+                      <a:noFill/>
+                    </a:lnT>
+                    <a:lnB w="0" cap="flat" cmpd="sng" algn="ctr">
+                      <a:noFill/>
+                    </a:lnB>
+                  </a:tcPr>
+                </a:tc>
+              </a:tr>
+            </a:tbl>
+          </a:graphicData>
+        </a:graphic>
+      </p:graphicFrame>
     </p:spTree>
   </p:cSld>
   <p:clrMapOvr>
@@ -3618,9 +3517,16 @@
 </p:sld>
 </file>
 
-<file path=ppt/slides/slide8.xml><?xml version="1.0" encoding="utf-8"?>
+<file path=ppt/slides/slide14.xml><?xml version="1.0" encoding="utf-8"?>
 <p:sld xmlns:a="http://schemas.openxmlformats.org/drawingml/2006/main" xmlns:r="http://schemas.openxmlformats.org/officeDocument/2006/relationships" xmlns:p="http://schemas.openxmlformats.org/presentationml/2006/main">
-  <p:cSld name="Slide 8">
+  <p:cSld name="Slide 14">
+    <p:bg>
+      <p:bgPr>
+        <a:solidFill>
+          <a:srgbClr val="FBF6EE"/>
+        </a:solidFill>
+      </p:bgPr>
+    </p:bg>
     <p:spTree>
       <p:nvGrpSpPr>
         <p:cNvPr id="1" name=""/>
@@ -3643,8 +3549,8 @@
         </p:nvSpPr>
         <p:spPr>
           <a:xfrm>
-            <a:off x="457200" y="274320"/>
-            <a:ext cx="8229600" cy="731520"/>
+            <a:off x="2743200" y="2286000"/>
+            <a:ext cx="6705295" cy="1371600"/>
           </a:xfrm>
           <a:prstGeom prst="rect">
             <a:avLst/>
@@ -3660,17 +3566,17 @@
               <a:buNone/>
             </a:pPr>
             <a:r>
-              <a:rPr lang="en-US" sz="1800" b="1" dirty="0">
+              <a:rPr lang="en-US" sz="3200" b="1" dirty="0">
                 <a:solidFill>
-                  <a:srgbClr val="1E3A5F"/>
+                  <a:srgbClr val="004889"/>
                 </a:solidFill>
-                <a:latin typeface="Microsoft YaHei" pitchFamily="34" charset="0"/>
-                <a:ea typeface="Microsoft YaHei" pitchFamily="34" charset="-122"/>
-                <a:cs typeface="Microsoft YaHei" pitchFamily="34" charset="-120"/>
+                <a:latin typeface="Noto Serif SC" pitchFamily="34" charset="0"/>
+                <a:ea typeface="Noto Serif SC" pitchFamily="34" charset="-122"/>
+                <a:cs typeface="Noto Serif SC" pitchFamily="34" charset="-120"/>
               </a:rPr>
-              <a:t>二、关键指标分析</a:t>
+              <a:t>结语</a:t>
             </a:r>
-            <a:endParaRPr lang="en-US" sz="1800" dirty="0"/>
+            <a:endParaRPr lang="en-US" sz="3200" dirty="0"/>
           </a:p>
         </p:txBody>
       </p:sp>
@@ -3682,212 +3588,17 @@
         </p:nvSpPr>
         <p:spPr>
           <a:xfrm>
-            <a:off x="1051560" y="1463040"/>
-            <a:ext cx="7040880" cy="4114800"/>
+            <a:off x="5943600" y="4114800"/>
+            <a:ext cx="304495" cy="304495"/>
           </a:xfrm>
           <a:prstGeom prst="rect">
             <a:avLst/>
           </a:prstGeom>
           <a:solidFill>
-            <a:srgbClr val="F5F7FA"/>
+            <a:srgbClr val="AC916B"/>
           </a:solidFill>
           <a:ln/>
         </p:spPr>
-      </p:sp>
-      <p:sp>
-        <p:nvSpPr>
-          <p:cNvPr id="4" name="Text 2"/>
-          <p:cNvSpPr/>
-          <p:nvPr/>
-        </p:nvSpPr>
-        <p:spPr>
-          <a:xfrm>
-            <a:off x="1188720" y="1645920"/>
-            <a:ext cx="6766560" cy="548640"/>
-          </a:xfrm>
-          <a:prstGeom prst="rect">
-            <a:avLst/>
-          </a:prstGeom>
-          <a:noFill/>
-          <a:ln/>
-        </p:spPr>
-        <p:txBody>
-          <a:bodyPr wrap="square" rtlCol="0" anchor="t"/>
-          <a:lstStyle/>
-          <a:p>
-            <a:pPr algn="ctr" indent="0" marL="0">
-              <a:buNone/>
-            </a:pPr>
-            <a:r>
-              <a:rPr lang="en-US" sz="1100" b="1" dirty="0">
-                <a:solidFill>
-                  <a:srgbClr val="546E7A"/>
-                </a:solidFill>
-                <a:latin typeface="Microsoft YaHei" pitchFamily="34" charset="0"/>
-                <a:ea typeface="Microsoft YaHei" pitchFamily="34" charset="-122"/>
-                <a:cs typeface="Microsoft YaHei" pitchFamily="34" charset="-120"/>
-              </a:rPr>
-              <a:t>throughput</a:t>
-            </a:r>
-            <a:endParaRPr lang="en-US" sz="1100" dirty="0"/>
-          </a:p>
-        </p:txBody>
-      </p:sp>
-      <p:sp>
-        <p:nvSpPr>
-          <p:cNvPr id="5" name="Text 3"/>
-          <p:cNvSpPr/>
-          <p:nvPr/>
-        </p:nvSpPr>
-        <p:spPr>
-          <a:xfrm>
-            <a:off x="1188720" y="2377440"/>
-            <a:ext cx="6766560" cy="1097280"/>
-          </a:xfrm>
-          <a:prstGeom prst="rect">
-            <a:avLst/>
-          </a:prstGeom>
-          <a:noFill/>
-          <a:ln/>
-        </p:spPr>
-        <p:txBody>
-          <a:bodyPr wrap="square" rtlCol="0" anchor="t"/>
-          <a:lstStyle/>
-          <a:p>
-            <a:pPr algn="ctr" indent="0" marL="0">
-              <a:buNone/>
-            </a:pPr>
-            <a:r>
-              <a:rPr lang="en-US" sz="3600" b="1" dirty="0">
-                <a:solidFill>
-                  <a:srgbClr val="2E7D32"/>
-                </a:solidFill>
-                <a:latin typeface="Calibri" pitchFamily="34" charset="0"/>
-                <a:ea typeface="Calibri" pitchFamily="34" charset="-122"/>
-                <a:cs typeface="Calibri" pitchFamily="34" charset="-120"/>
-              </a:rPr>
-              <a:t>↑12.0%</a:t>
-            </a:r>
-            <a:endParaRPr lang="en-US" sz="3600" dirty="0"/>
-          </a:p>
-        </p:txBody>
-      </p:sp>
-      <p:sp>
-        <p:nvSpPr>
-          <p:cNvPr id="6" name="Text 4"/>
-          <p:cNvSpPr/>
-          <p:nvPr/>
-        </p:nvSpPr>
-        <p:spPr>
-          <a:xfrm>
-            <a:off x="1188720" y="3474720"/>
-            <a:ext cx="6766560" cy="457200"/>
-          </a:xfrm>
-          <a:prstGeom prst="rect">
-            <a:avLst/>
-          </a:prstGeom>
-          <a:noFill/>
-          <a:ln/>
-        </p:spPr>
-        <p:txBody>
-          <a:bodyPr wrap="square" rtlCol="0" anchor="t"/>
-          <a:lstStyle/>
-          <a:p>
-            <a:pPr algn="ctr" indent="0" marL="0">
-              <a:buNone/>
-            </a:pPr>
-            <a:r>
-              <a:rPr lang="en-US" sz="1100" dirty="0">
-                <a:solidFill>
-                  <a:srgbClr val="546E7A"/>
-                </a:solidFill>
-                <a:latin typeface="Microsoft YaHei" pitchFamily="34" charset="0"/>
-                <a:ea typeface="Microsoft YaHei" pitchFamily="34" charset="-122"/>
-                <a:cs typeface="Microsoft YaHei" pitchFamily="34" charset="-120"/>
-              </a:rPr>
-              <a:t>同比</a:t>
-            </a:r>
-            <a:endParaRPr lang="en-US" sz="1100" dirty="0"/>
-          </a:p>
-        </p:txBody>
-      </p:sp>
-      <p:sp>
-        <p:nvSpPr>
-          <p:cNvPr id="7" name="Text 5"/>
-          <p:cNvSpPr/>
-          <p:nvPr/>
-        </p:nvSpPr>
-        <p:spPr>
-          <a:xfrm>
-            <a:off x="1188720" y="4023360"/>
-            <a:ext cx="6766560" cy="914400"/>
-          </a:xfrm>
-          <a:prstGeom prst="rect">
-            <a:avLst/>
-          </a:prstGeom>
-          <a:noFill/>
-          <a:ln/>
-        </p:spPr>
-        <p:txBody>
-          <a:bodyPr wrap="square" rtlCol="0" anchor="t"/>
-          <a:lstStyle/>
-          <a:p>
-            <a:pPr algn="ctr" indent="0" marL="0">
-              <a:buNone/>
-            </a:pPr>
-            <a:r>
-              <a:rPr lang="en-US" sz="2400" b="1" dirty="0">
-                <a:solidFill>
-                  <a:srgbClr val="2E7D32"/>
-                </a:solidFill>
-                <a:latin typeface="Calibri" pitchFamily="34" charset="0"/>
-                <a:ea typeface="Calibri" pitchFamily="34" charset="-122"/>
-                <a:cs typeface="Calibri" pitchFamily="34" charset="-120"/>
-              </a:rPr>
-              <a:t>↑3.0%</a:t>
-            </a:r>
-            <a:endParaRPr lang="en-US" sz="2400" dirty="0"/>
-          </a:p>
-        </p:txBody>
-      </p:sp>
-      <p:sp>
-        <p:nvSpPr>
-          <p:cNvPr id="8" name="Text 6"/>
-          <p:cNvSpPr/>
-          <p:nvPr/>
-        </p:nvSpPr>
-        <p:spPr>
-          <a:xfrm>
-            <a:off x="1188720" y="4937760"/>
-            <a:ext cx="6766560" cy="457200"/>
-          </a:xfrm>
-          <a:prstGeom prst="rect">
-            <a:avLst/>
-          </a:prstGeom>
-          <a:noFill/>
-          <a:ln/>
-        </p:spPr>
-        <p:txBody>
-          <a:bodyPr wrap="square" rtlCol="0" anchor="t"/>
-          <a:lstStyle/>
-          <a:p>
-            <a:pPr algn="ctr" indent="0" marL="0">
-              <a:buNone/>
-            </a:pPr>
-            <a:r>
-              <a:rPr lang="en-US" sz="1100" dirty="0">
-                <a:solidFill>
-                  <a:srgbClr val="546E7A"/>
-                </a:solidFill>
-                <a:latin typeface="Microsoft YaHei" pitchFamily="34" charset="0"/>
-                <a:ea typeface="Microsoft YaHei" pitchFamily="34" charset="-122"/>
-                <a:cs typeface="Microsoft YaHei" pitchFamily="34" charset="-120"/>
-              </a:rPr>
-              <a:t>环比</a:t>
-            </a:r>
-            <a:endParaRPr lang="en-US" sz="1100" dirty="0"/>
-          </a:p>
-        </p:txBody>
       </p:sp>
     </p:spTree>
   </p:cSld>
@@ -3897,9 +3608,16 @@
 </p:sld>
 </file>
 
-<file path=ppt/slides/slide9.xml><?xml version="1.0" encoding="utf-8"?>
+<file path=ppt/slides/slide15.xml><?xml version="1.0" encoding="utf-8"?>
 <p:sld xmlns:a="http://schemas.openxmlformats.org/drawingml/2006/main" xmlns:r="http://schemas.openxmlformats.org/officeDocument/2006/relationships" xmlns:p="http://schemas.openxmlformats.org/presentationml/2006/main">
-  <p:cSld name="Slide 9">
+  <p:cSld name="Slide 15">
+    <p:bg>
+      <p:bgPr>
+        <a:solidFill>
+          <a:srgbClr val="AC916B"/>
+        </a:solidFill>
+      </p:bgPr>
+    </p:bg>
     <p:spTree>
       <p:nvGrpSpPr>
         <p:cNvPr id="1" name=""/>
@@ -3922,8 +3640,8 @@
         </p:nvSpPr>
         <p:spPr>
           <a:xfrm>
-            <a:off x="457200" y="274320"/>
-            <a:ext cx="8229600" cy="731520"/>
+            <a:off x="548640" y="1828800"/>
+            <a:ext cx="11094415" cy="1828800"/>
           </a:xfrm>
           <a:prstGeom prst="rect">
             <a:avLst/>
@@ -3939,17 +3657,2241 @@
               <a:buNone/>
             </a:pPr>
             <a:r>
-              <a:rPr lang="en-US" sz="1800" b="1" dirty="0">
+              <a:rPr lang="en-US" sz="7200" b="1" dirty="0">
                 <a:solidFill>
-                  <a:srgbClr val="1E3A5F"/>
+                  <a:srgbClr val="FBF6EE"/>
                 </a:solidFill>
-                <a:latin typeface="Microsoft YaHei" pitchFamily="34" charset="0"/>
-                <a:ea typeface="Microsoft YaHei" pitchFamily="34" charset="-122"/>
-                <a:cs typeface="Microsoft YaHei" pitchFamily="34" charset="-120"/>
+                <a:latin typeface="Noto Serif SC" pitchFamily="34" charset="0"/>
+                <a:ea typeface="Noto Serif SC" pitchFamily="34" charset="-122"/>
+                <a:cs typeface="Noto Serif SC" pitchFamily="34" charset="-120"/>
+              </a:rPr>
+              <a:t>附录</a:t>
+            </a:r>
+            <a:endParaRPr lang="en-US" sz="7200" dirty="0"/>
+          </a:p>
+        </p:txBody>
+      </p:sp>
+      <p:sp>
+        <p:nvSpPr>
+          <p:cNvPr id="3" name="Text 1"/>
+          <p:cNvSpPr/>
+          <p:nvPr/>
+        </p:nvSpPr>
+        <p:spPr>
+          <a:xfrm>
+            <a:off x="548640" y="4114800"/>
+            <a:ext cx="11094415" cy="914400"/>
+          </a:xfrm>
+          <a:prstGeom prst="rect">
+            <a:avLst/>
+          </a:prstGeom>
+          <a:noFill/>
+          <a:ln/>
+        </p:spPr>
+        <p:txBody>
+          <a:bodyPr wrap="square" rtlCol="0" anchor="t"/>
+          <a:lstStyle/>
+          <a:p>
+            <a:pPr algn="l" indent="0" marL="0">
+              <a:buNone/>
+            </a:pPr>
+            <a:r>
+              <a:rPr lang="en-US" sz="2400" dirty="0">
+                <a:solidFill>
+                  <a:srgbClr val="FBF6EE"/>
+                </a:solidFill>
+                <a:latin typeface="Noto Serif SC" pitchFamily="34" charset="0"/>
+                <a:ea typeface="Noto Serif SC" pitchFamily="34" charset="-122"/>
+                <a:cs typeface="Noto Serif SC" pitchFamily="34" charset="-120"/>
+              </a:rPr>
+              <a:t>完整数据明细</a:t>
+            </a:r>
+            <a:endParaRPr lang="en-US" sz="2400" dirty="0"/>
+          </a:p>
+        </p:txBody>
+      </p:sp>
+    </p:spTree>
+  </p:cSld>
+  <p:clrMapOvr>
+    <a:masterClrMapping/>
+  </p:clrMapOvr>
+</p:sld>
+</file>
+
+<file path=ppt/slides/slide16.xml><?xml version="1.0" encoding="utf-8"?>
+<p:sld xmlns:a="http://schemas.openxmlformats.org/drawingml/2006/main" xmlns:r="http://schemas.openxmlformats.org/officeDocument/2006/relationships" xmlns:p="http://schemas.openxmlformats.org/presentationml/2006/main">
+  <p:cSld name="Slide 16">
+    <p:bg>
+      <p:bgPr>
+        <a:solidFill>
+          <a:srgbClr val="FBF6EE"/>
+        </a:solidFill>
+      </p:bgPr>
+    </p:bg>
+    <p:spTree>
+      <p:nvGrpSpPr>
+        <p:cNvPr id="1" name=""/>
+        <p:cNvGrpSpPr/>
+        <p:nvPr/>
+      </p:nvGrpSpPr>
+      <p:grpSpPr>
+        <a:xfrm>
+          <a:off x="0" y="0"/>
+          <a:ext cx="0" cy="0"/>
+          <a:chOff x="0" y="0"/>
+          <a:chExt cx="0" cy="0"/>
+        </a:xfrm>
+      </p:grpSpPr>
+      <p:sp>
+        <p:nvSpPr>
+          <p:cNvPr id="2" name="Text 0"/>
+          <p:cNvSpPr/>
+          <p:nvPr/>
+        </p:nvSpPr>
+        <p:spPr>
+          <a:xfrm>
+            <a:off x="548640" y="457200"/>
+            <a:ext cx="11094415" cy="365760"/>
+          </a:xfrm>
+          <a:prstGeom prst="rect">
+            <a:avLst/>
+          </a:prstGeom>
+          <a:noFill/>
+          <a:ln/>
+        </p:spPr>
+        <p:txBody>
+          <a:bodyPr wrap="square" rtlCol="0" anchor="t"/>
+          <a:lstStyle/>
+          <a:p>
+            <a:pPr algn="l" indent="0" marL="0">
+              <a:buNone/>
+            </a:pPr>
+            <a:r>
+              <a:rPr lang="en-US" sz="1200" b="1" dirty="0">
+                <a:solidFill>
+                  <a:srgbClr val="004889"/>
+                </a:solidFill>
+                <a:latin typeface="Noto Serif SC" pitchFamily="34" charset="0"/>
+                <a:ea typeface="Noto Serif SC" pitchFamily="34" charset="-122"/>
+                <a:cs typeface="Noto Serif SC" pitchFamily="34" charset="-120"/>
+              </a:rPr>
+              <a:t>完整数据</a:t>
+            </a:r>
+            <a:endParaRPr lang="en-US" sz="1200" dirty="0"/>
+          </a:p>
+        </p:txBody>
+      </p:sp>
+      <p:graphicFrame>
+        <p:nvGraphicFramePr>
+          <p:cNvPr id="17" name="Table 0"/>
+          <p:cNvGraphicFramePr>
+            <a:graphicFrameLocks noGrp="1"/>
+          </p:cNvGraphicFramePr>
+          <p:nvPr>
+            <p:extLst>
+              <p:ext uri="{D42A27DB-BD31-4B8C-83A1-F6EECF244321}">
+                <p14:modId xmlns:p14="http://schemas.microsoft.com/office/powerpoint/2010/main" val="1579011935"/>
+              </p:ext>
+            </p:extLst>
+          </p:nvPr>
+        </p:nvGraphicFramePr>
+        <p:xfrm>
+          <a:off x="548640" y="914400"/>
+          <a:ext cx="11094415" cy="5029200"/>
+        </p:xfrm>
+        <a:graphic>
+          <a:graphicData uri="http://schemas.openxmlformats.org/drawingml/2006/table">
+            <a:tbl>
+              <a:tblPr/>
+              <a:tblGrid>
+                <a:gridCol w="5547208"/>
+                <a:gridCol w="5547208"/>
+              </a:tblGrid>
+              <a:tr h="1257300">
+                <a:tc>
+                  <a:txBody>
+                    <a:bodyPr/>
+                    <a:lstStyle/>
+                    <a:p>
+                      <a:pPr indent="0" marL="0">
+                        <a:buNone/>
+                      </a:pPr>
+                      <a:r>
+                        <a:rPr lang="en-US" sz="900" b="1" dirty="0">
+                          <a:solidFill>
+                            <a:srgbClr val="FBF6EE"/>
+                          </a:solidFill>
+                          <a:latin typeface="Noto Sans SC" pitchFamily="34" charset="0"/>
+                          <a:ea typeface="Noto Sans SC" pitchFamily="34" charset="-122"/>
+                          <a:cs typeface="Noto Sans SC" pitchFamily="34" charset="-120"/>
+                        </a:rPr>
+                        <a:t>港区</a:t>
+                      </a:r>
+                      <a:endParaRPr lang="en-US" sz="900" dirty="0">
+                        <a:latin typeface="Noto Sans SC" charset="0"/>
+                        <a:ea typeface="Noto Sans SC" charset="0"/>
+                        <a:cs typeface="Noto Sans SC" charset="0"/>
+                      </a:endParaRPr>
+                    </a:p>
+                  </a:txBody>
+                  <a:tcPr marL="91440" marR="91440" marT="45720" marB="45720">
+                    <a:lnL w="0" cap="flat" cmpd="sng" algn="ctr">
+                      <a:noFill/>
+                    </a:lnL>
+                    <a:lnR w="0" cap="flat" cmpd="sng" algn="ctr">
+                      <a:noFill/>
+                    </a:lnR>
+                    <a:lnT w="0" cap="flat" cmpd="sng" algn="ctr">
+                      <a:noFill/>
+                    </a:lnT>
+                    <a:lnB w="0" cap="flat" cmpd="sng" algn="ctr">
+                      <a:noFill/>
+                    </a:lnB>
+                    <a:solidFill>
+                      <a:srgbClr val="004889"/>
+                    </a:solidFill>
+                  </a:tcPr>
+                </a:tc>
+                <a:tc>
+                  <a:txBody>
+                    <a:bodyPr/>
+                    <a:lstStyle/>
+                    <a:p>
+                      <a:pPr indent="0" marL="0">
+                        <a:buNone/>
+                      </a:pPr>
+                      <a:r>
+                        <a:rPr lang="en-US" sz="900" b="1" dirty="0">
+                          <a:solidFill>
+                            <a:srgbClr val="FBF6EE"/>
+                          </a:solidFill>
+                          <a:latin typeface="Noto Sans SC" pitchFamily="34" charset="0"/>
+                          <a:ea typeface="Noto Sans SC" pitchFamily="34" charset="-122"/>
+                          <a:cs typeface="Noto Sans SC" pitchFamily="34" charset="-120"/>
+                        </a:rPr>
+                        <a:t>吞吐量</a:t>
+                      </a:r>
+                      <a:endParaRPr lang="en-US" sz="900" dirty="0">
+                        <a:latin typeface="Noto Sans SC" charset="0"/>
+                        <a:ea typeface="Noto Sans SC" charset="0"/>
+                        <a:cs typeface="Noto Sans SC" charset="0"/>
+                      </a:endParaRPr>
+                    </a:p>
+                  </a:txBody>
+                  <a:tcPr marL="91440" marR="91440" marT="45720" marB="45720">
+                    <a:lnL w="0" cap="flat" cmpd="sng" algn="ctr">
+                      <a:noFill/>
+                    </a:lnL>
+                    <a:lnR w="0" cap="flat" cmpd="sng" algn="ctr">
+                      <a:noFill/>
+                    </a:lnR>
+                    <a:lnT w="0" cap="flat" cmpd="sng" algn="ctr">
+                      <a:noFill/>
+                    </a:lnT>
+                    <a:lnB w="0" cap="flat" cmpd="sng" algn="ctr">
+                      <a:noFill/>
+                    </a:lnB>
+                    <a:solidFill>
+                      <a:srgbClr val="004889"/>
+                    </a:solidFill>
+                  </a:tcPr>
+                </a:tc>
+              </a:tr>
+              <a:tr h="1257300">
+                <a:tc>
+                  <a:txBody>
+                    <a:bodyPr/>
+                    <a:lstStyle/>
+                    <a:p>
+                      <a:pPr indent="0" marL="0">
+                        <a:buNone/>
+                      </a:pPr>
+                      <a:r>
+                        <a:rPr lang="en-US" sz="900" dirty="0">
+                          <a:solidFill>
+                            <a:srgbClr val="000000"/>
+                          </a:solidFill>
+                          <a:latin typeface="Noto Sans SC" pitchFamily="34" charset="0"/>
+                          <a:ea typeface="Noto Sans SC" pitchFamily="34" charset="-122"/>
+                          <a:cs typeface="Noto Sans SC" pitchFamily="34" charset="-120"/>
+                        </a:rPr>
+                        <a:t>大连港</a:t>
+                      </a:r>
+                      <a:endParaRPr lang="en-US" sz="900" dirty="0">
+                        <a:latin typeface="Noto Sans SC" charset="0"/>
+                        <a:ea typeface="Noto Sans SC" charset="0"/>
+                        <a:cs typeface="Noto Sans SC" charset="0"/>
+                      </a:endParaRPr>
+                    </a:p>
+                  </a:txBody>
+                  <a:tcPr marL="91440" marR="91440" marT="45720" marB="45720">
+                    <a:lnL w="0" cap="flat" cmpd="sng" algn="ctr">
+                      <a:noFill/>
+                    </a:lnL>
+                    <a:lnR w="0" cap="flat" cmpd="sng" algn="ctr">
+                      <a:noFill/>
+                    </a:lnR>
+                    <a:lnT w="0" cap="flat" cmpd="sng" algn="ctr">
+                      <a:noFill/>
+                    </a:lnT>
+                    <a:lnB w="0" cap="flat" cmpd="sng" algn="ctr">
+                      <a:noFill/>
+                    </a:lnB>
+                  </a:tcPr>
+                </a:tc>
+                <a:tc>
+                  <a:txBody>
+                    <a:bodyPr/>
+                    <a:lstStyle/>
+                    <a:p>
+                      <a:pPr indent="0" marL="0">
+                        <a:buNone/>
+                      </a:pPr>
+                      <a:r>
+                        <a:rPr lang="en-US" sz="900" dirty="0">
+                          <a:solidFill>
+                            <a:srgbClr val="000000"/>
+                          </a:solidFill>
+                          <a:latin typeface="Noto Sans SC" pitchFamily="34" charset="0"/>
+                          <a:ea typeface="Noto Sans SC" pitchFamily="34" charset="-122"/>
+                          <a:cs typeface="Noto Sans SC" pitchFamily="34" charset="-120"/>
+                        </a:rPr>
+                        <a:t>4,500.50</a:t>
+                      </a:r>
+                      <a:endParaRPr lang="en-US" sz="900" dirty="0">
+                        <a:latin typeface="Noto Sans SC" charset="0"/>
+                        <a:ea typeface="Noto Sans SC" charset="0"/>
+                        <a:cs typeface="Noto Sans SC" charset="0"/>
+                      </a:endParaRPr>
+                    </a:p>
+                  </a:txBody>
+                  <a:tcPr marL="91440" marR="91440" marT="45720" marB="45720">
+                    <a:lnL w="0" cap="flat" cmpd="sng" algn="ctr">
+                      <a:noFill/>
+                    </a:lnL>
+                    <a:lnR w="0" cap="flat" cmpd="sng" algn="ctr">
+                      <a:noFill/>
+                    </a:lnR>
+                    <a:lnT w="0" cap="flat" cmpd="sng" algn="ctr">
+                      <a:noFill/>
+                    </a:lnT>
+                    <a:lnB w="0" cap="flat" cmpd="sng" algn="ctr">
+                      <a:noFill/>
+                    </a:lnB>
+                  </a:tcPr>
+                </a:tc>
+              </a:tr>
+              <a:tr h="1257300">
+                <a:tc>
+                  <a:txBody>
+                    <a:bodyPr/>
+                    <a:lstStyle/>
+                    <a:p>
+                      <a:pPr indent="0" marL="0">
+                        <a:buNone/>
+                      </a:pPr>
+                      <a:r>
+                        <a:rPr lang="en-US" sz="900" dirty="0">
+                          <a:solidFill>
+                            <a:srgbClr val="000000"/>
+                          </a:solidFill>
+                          <a:latin typeface="Noto Sans SC" pitchFamily="34" charset="0"/>
+                          <a:ea typeface="Noto Sans SC" pitchFamily="34" charset="-122"/>
+                          <a:cs typeface="Noto Sans SC" pitchFamily="34" charset="-120"/>
+                        </a:rPr>
+                        <a:t>营口港</a:t>
+                      </a:r>
+                      <a:endParaRPr lang="en-US" sz="900" dirty="0">
+                        <a:latin typeface="Noto Sans SC" charset="0"/>
+                        <a:ea typeface="Noto Sans SC" charset="0"/>
+                        <a:cs typeface="Noto Sans SC" charset="0"/>
+                      </a:endParaRPr>
+                    </a:p>
+                  </a:txBody>
+                  <a:tcPr marL="91440" marR="91440" marT="45720" marB="45720">
+                    <a:lnL w="0" cap="flat" cmpd="sng" algn="ctr">
+                      <a:noFill/>
+                    </a:lnL>
+                    <a:lnR w="0" cap="flat" cmpd="sng" algn="ctr">
+                      <a:noFill/>
+                    </a:lnR>
+                    <a:lnT w="0" cap="flat" cmpd="sng" algn="ctr">
+                      <a:noFill/>
+                    </a:lnT>
+                    <a:lnB w="0" cap="flat" cmpd="sng" algn="ctr">
+                      <a:noFill/>
+                    </a:lnB>
+                  </a:tcPr>
+                </a:tc>
+                <a:tc>
+                  <a:txBody>
+                    <a:bodyPr/>
+                    <a:lstStyle/>
+                    <a:p>
+                      <a:pPr indent="0" marL="0">
+                        <a:buNone/>
+                      </a:pPr>
+                      <a:r>
+                        <a:rPr lang="en-US" sz="900" dirty="0">
+                          <a:solidFill>
+                            <a:srgbClr val="000000"/>
+                          </a:solidFill>
+                          <a:latin typeface="Noto Sans SC" pitchFamily="34" charset="0"/>
+                          <a:ea typeface="Noto Sans SC" pitchFamily="34" charset="-122"/>
+                          <a:cs typeface="Noto Sans SC" pitchFamily="34" charset="-120"/>
+                        </a:rPr>
+                        <a:t>3,200.10</a:t>
+                      </a:r>
+                      <a:endParaRPr lang="en-US" sz="900" dirty="0">
+                        <a:latin typeface="Noto Sans SC" charset="0"/>
+                        <a:ea typeface="Noto Sans SC" charset="0"/>
+                        <a:cs typeface="Noto Sans SC" charset="0"/>
+                      </a:endParaRPr>
+                    </a:p>
+                  </a:txBody>
+                  <a:tcPr marL="91440" marR="91440" marT="45720" marB="45720">
+                    <a:lnL w="0" cap="flat" cmpd="sng" algn="ctr">
+                      <a:noFill/>
+                    </a:lnL>
+                    <a:lnR w="0" cap="flat" cmpd="sng" algn="ctr">
+                      <a:noFill/>
+                    </a:lnR>
+                    <a:lnT w="0" cap="flat" cmpd="sng" algn="ctr">
+                      <a:noFill/>
+                    </a:lnT>
+                    <a:lnB w="0" cap="flat" cmpd="sng" algn="ctr">
+                      <a:noFill/>
+                    </a:lnB>
+                  </a:tcPr>
+                </a:tc>
+              </a:tr>
+              <a:tr h="1257300">
+                <a:tc>
+                  <a:txBody>
+                    <a:bodyPr/>
+                    <a:lstStyle/>
+                    <a:p>
+                      <a:pPr indent="0" marL="0">
+                        <a:buNone/>
+                      </a:pPr>
+                      <a:r>
+                        <a:rPr lang="en-US" sz="900" dirty="0">
+                          <a:solidFill>
+                            <a:srgbClr val="000000"/>
+                          </a:solidFill>
+                          <a:latin typeface="Noto Sans SC" pitchFamily="34" charset="0"/>
+                          <a:ea typeface="Noto Sans SC" pitchFamily="34" charset="-122"/>
+                          <a:cs typeface="Noto Sans SC" pitchFamily="34" charset="-120"/>
+                        </a:rPr>
+                        <a:t>锦州港</a:t>
+                      </a:r>
+                      <a:endParaRPr lang="en-US" sz="900" dirty="0">
+                        <a:latin typeface="Noto Sans SC" charset="0"/>
+                        <a:ea typeface="Noto Sans SC" charset="0"/>
+                        <a:cs typeface="Noto Sans SC" charset="0"/>
+                      </a:endParaRPr>
+                    </a:p>
+                  </a:txBody>
+                  <a:tcPr marL="91440" marR="91440" marT="45720" marB="45720">
+                    <a:lnL w="0" cap="flat" cmpd="sng" algn="ctr">
+                      <a:noFill/>
+                    </a:lnL>
+                    <a:lnR w="0" cap="flat" cmpd="sng" algn="ctr">
+                      <a:noFill/>
+                    </a:lnR>
+                    <a:lnT w="0" cap="flat" cmpd="sng" algn="ctr">
+                      <a:noFill/>
+                    </a:lnT>
+                    <a:lnB w="0" cap="flat" cmpd="sng" algn="ctr">
+                      <a:noFill/>
+                    </a:lnB>
+                  </a:tcPr>
+                </a:tc>
+                <a:tc>
+                  <a:txBody>
+                    <a:bodyPr/>
+                    <a:lstStyle/>
+                    <a:p>
+                      <a:pPr indent="0" marL="0">
+                        <a:buNone/>
+                      </a:pPr>
+                      <a:r>
+                        <a:rPr lang="en-US" sz="900" dirty="0">
+                          <a:solidFill>
+                            <a:srgbClr val="000000"/>
+                          </a:solidFill>
+                          <a:latin typeface="Noto Sans SC" pitchFamily="34" charset="0"/>
+                          <a:ea typeface="Noto Sans SC" pitchFamily="34" charset="-122"/>
+                          <a:cs typeface="Noto Sans SC" pitchFamily="34" charset="-120"/>
+                        </a:rPr>
+                        <a:t>1,800.00</a:t>
+                      </a:r>
+                      <a:endParaRPr lang="en-US" sz="900" dirty="0">
+                        <a:latin typeface="Noto Sans SC" charset="0"/>
+                        <a:ea typeface="Noto Sans SC" charset="0"/>
+                        <a:cs typeface="Noto Sans SC" charset="0"/>
+                      </a:endParaRPr>
+                    </a:p>
+                  </a:txBody>
+                  <a:tcPr marL="91440" marR="91440" marT="45720" marB="45720">
+                    <a:lnL w="0" cap="flat" cmpd="sng" algn="ctr">
+                      <a:noFill/>
+                    </a:lnL>
+                    <a:lnR w="0" cap="flat" cmpd="sng" algn="ctr">
+                      <a:noFill/>
+                    </a:lnR>
+                    <a:lnT w="0" cap="flat" cmpd="sng" algn="ctr">
+                      <a:noFill/>
+                    </a:lnT>
+                    <a:lnB w="0" cap="flat" cmpd="sng" algn="ctr">
+                      <a:noFill/>
+                    </a:lnB>
+                  </a:tcPr>
+                </a:tc>
+              </a:tr>
+            </a:tbl>
+          </a:graphicData>
+        </a:graphic>
+      </p:graphicFrame>
+    </p:spTree>
+  </p:cSld>
+  <p:clrMapOvr>
+    <a:masterClrMapping/>
+  </p:clrMapOvr>
+</p:sld>
+</file>
+
+<file path=ppt/slides/slide17.xml><?xml version="1.0" encoding="utf-8"?>
+<p:sld xmlns:a="http://schemas.openxmlformats.org/drawingml/2006/main" xmlns:r="http://schemas.openxmlformats.org/officeDocument/2006/relationships" xmlns:p="http://schemas.openxmlformats.org/presentationml/2006/main">
+  <p:cSld name="Slide 17">
+    <p:bg>
+      <p:bgPr>
+        <a:solidFill>
+          <a:srgbClr val="FBF6EE"/>
+        </a:solidFill>
+      </p:bgPr>
+    </p:bg>
+    <p:spTree>
+      <p:nvGrpSpPr>
+        <p:cNvPr id="1" name=""/>
+        <p:cNvGrpSpPr/>
+        <p:nvPr/>
+      </p:nvGrpSpPr>
+      <p:grpSpPr>
+        <a:xfrm>
+          <a:off x="0" y="0"/>
+          <a:ext cx="0" cy="0"/>
+          <a:chOff x="0" y="0"/>
+          <a:chExt cx="0" cy="0"/>
+        </a:xfrm>
+      </p:grpSpPr>
+      <p:sp>
+        <p:nvSpPr>
+          <p:cNvPr id="2" name="Text 0"/>
+          <p:cNvSpPr/>
+          <p:nvPr/>
+        </p:nvSpPr>
+        <p:spPr>
+          <a:xfrm>
+            <a:off x="2743200" y="2286000"/>
+            <a:ext cx="6705295" cy="1371600"/>
+          </a:xfrm>
+          <a:prstGeom prst="rect">
+            <a:avLst/>
+          </a:prstGeom>
+          <a:noFill/>
+          <a:ln/>
+        </p:spPr>
+        <p:txBody>
+          <a:bodyPr wrap="square" rtlCol="0" anchor="t"/>
+          <a:lstStyle/>
+          <a:p>
+            <a:pPr algn="ctr" indent="0" marL="0">
+              <a:buNone/>
+            </a:pPr>
+            <a:r>
+              <a:rPr lang="en-US" sz="3200" b="1" dirty="0">
+                <a:solidFill>
+                  <a:srgbClr val="004889"/>
+                </a:solidFill>
+                <a:latin typeface="Noto Serif SC" pitchFamily="34" charset="0"/>
+                <a:ea typeface="Noto Serif SC" pitchFamily="34" charset="-122"/>
+                <a:cs typeface="Noto Serif SC" pitchFamily="34" charset="-120"/>
+              </a:rPr>
+              <a:t>结语</a:t>
+            </a:r>
+            <a:endParaRPr lang="en-US" sz="3200" dirty="0"/>
+          </a:p>
+        </p:txBody>
+      </p:sp>
+      <p:sp>
+        <p:nvSpPr>
+          <p:cNvPr id="3" name="Shape 1"/>
+          <p:cNvSpPr/>
+          <p:nvPr/>
+        </p:nvSpPr>
+        <p:spPr>
+          <a:xfrm>
+            <a:off x="5943600" y="4114800"/>
+            <a:ext cx="304495" cy="304495"/>
+          </a:xfrm>
+          <a:prstGeom prst="rect">
+            <a:avLst/>
+          </a:prstGeom>
+          <a:solidFill>
+            <a:srgbClr val="AC916B"/>
+          </a:solidFill>
+          <a:ln/>
+        </p:spPr>
+      </p:sp>
+    </p:spTree>
+  </p:cSld>
+  <p:clrMapOvr>
+    <a:masterClrMapping/>
+  </p:clrMapOvr>
+</p:sld>
+</file>
+
+<file path=ppt/slides/slide2.xml><?xml version="1.0" encoding="utf-8"?>
+<p:sld xmlns:a="http://schemas.openxmlformats.org/drawingml/2006/main" xmlns:r="http://schemas.openxmlformats.org/officeDocument/2006/relationships" xmlns:p="http://schemas.openxmlformats.org/presentationml/2006/main">
+  <p:cSld name="Slide 2">
+    <p:bg>
+      <p:bgPr>
+        <a:solidFill>
+          <a:srgbClr val="FBF6EE"/>
+        </a:solidFill>
+      </p:bgPr>
+    </p:bg>
+    <p:spTree>
+      <p:nvGrpSpPr>
+        <p:cNvPr id="1" name=""/>
+        <p:cNvGrpSpPr/>
+        <p:nvPr/>
+      </p:nvGrpSpPr>
+      <p:grpSpPr>
+        <a:xfrm>
+          <a:off x="0" y="0"/>
+          <a:ext cx="0" cy="0"/>
+          <a:chOff x="0" y="0"/>
+          <a:chExt cx="0" cy="0"/>
+        </a:xfrm>
+      </p:grpSpPr>
+      <p:sp>
+        <p:nvSpPr>
+          <p:cNvPr id="2" name="Text 0"/>
+          <p:cNvSpPr/>
+          <p:nvPr/>
+        </p:nvSpPr>
+        <p:spPr>
+          <a:xfrm>
+            <a:off x="548640" y="457200"/>
+            <a:ext cx="11094415" cy="731520"/>
+          </a:xfrm>
+          <a:prstGeom prst="rect">
+            <a:avLst/>
+          </a:prstGeom>
+          <a:noFill/>
+          <a:ln/>
+        </p:spPr>
+        <p:txBody>
+          <a:bodyPr wrap="square" rtlCol="0" anchor="t"/>
+          <a:lstStyle/>
+          <a:p>
+            <a:pPr algn="l" indent="0" marL="0">
+              <a:buNone/>
+            </a:pPr>
+            <a:r>
+              <a:rPr lang="en-US" sz="2400" b="1" dirty="0">
+                <a:solidFill>
+                  <a:srgbClr val="004889"/>
+                </a:solidFill>
+                <a:latin typeface="Noto Serif SC" pitchFamily="34" charset="0"/>
+                <a:ea typeface="Noto Serif SC" pitchFamily="34" charset="-122"/>
+                <a:cs typeface="Noto Serif SC" pitchFamily="34" charset="-120"/>
+              </a:rPr>
+              <a:t>目  录</a:t>
+            </a:r>
+            <a:endParaRPr lang="en-US" sz="2400" dirty="0"/>
+          </a:p>
+        </p:txBody>
+      </p:sp>
+      <p:sp>
+        <p:nvSpPr>
+          <p:cNvPr id="3" name="Text 1"/>
+          <p:cNvSpPr/>
+          <p:nvPr/>
+        </p:nvSpPr>
+        <p:spPr>
+          <a:xfrm>
+            <a:off x="1371600" y="1371600"/>
+            <a:ext cx="9722815" cy="411480"/>
+          </a:xfrm>
+          <a:prstGeom prst="rect">
+            <a:avLst/>
+          </a:prstGeom>
+          <a:noFill/>
+          <a:ln/>
+        </p:spPr>
+        <p:txBody>
+          <a:bodyPr wrap="square" rtlCol="0" anchor="t"/>
+          <a:lstStyle/>
+          <a:p>
+            <a:pPr algn="l" indent="0" marL="0">
+              <a:buNone/>
+            </a:pPr>
+            <a:r>
+              <a:rPr lang="en-US" sz="1400" dirty="0">
+                <a:solidFill>
+                  <a:srgbClr val="004889"/>
+                </a:solidFill>
+                <a:latin typeface="Noto Serif SC" pitchFamily="34" charset="0"/>
+                <a:ea typeface="Noto Serif SC" pitchFamily="34" charset="-122"/>
+                <a:cs typeface="Noto Serif SC" pitchFamily="34" charset="-120"/>
+              </a:rPr>
+              <a:t>Ⅰ.  一、港区吞吐量现状</a:t>
+            </a:r>
+            <a:endParaRPr lang="en-US" sz="1400" dirty="0"/>
+          </a:p>
+        </p:txBody>
+      </p:sp>
+      <p:sp>
+        <p:nvSpPr>
+          <p:cNvPr id="4" name="Text 2"/>
+          <p:cNvSpPr/>
+          <p:nvPr/>
+        </p:nvSpPr>
+        <p:spPr>
+          <a:xfrm>
+            <a:off x="1371600" y="1828800"/>
+            <a:ext cx="9722815" cy="411480"/>
+          </a:xfrm>
+          <a:prstGeom prst="rect">
+            <a:avLst/>
+          </a:prstGeom>
+          <a:noFill/>
+          <a:ln/>
+        </p:spPr>
+        <p:txBody>
+          <a:bodyPr wrap="square" rtlCol="0" anchor="t"/>
+          <a:lstStyle/>
+          <a:p>
+            <a:pPr algn="l" indent="0" marL="0">
+              <a:buNone/>
+            </a:pPr>
+            <a:r>
+              <a:rPr lang="en-US" sz="1400" dirty="0">
+                <a:solidFill>
+                  <a:srgbClr val="004889"/>
+                </a:solidFill>
+                <a:latin typeface="Noto Serif SC" pitchFamily="34" charset="0"/>
+                <a:ea typeface="Noto Serif SC" pitchFamily="34" charset="-122"/>
+                <a:cs typeface="Noto Serif SC" pitchFamily="34" charset="-120"/>
+              </a:rPr>
+              <a:t>Ⅱ.  二、关键指标分析</a:t>
+            </a:r>
+            <a:endParaRPr lang="en-US" sz="1400" dirty="0"/>
+          </a:p>
+        </p:txBody>
+      </p:sp>
+      <p:sp>
+        <p:nvSpPr>
+          <p:cNvPr id="5" name="Text 3"/>
+          <p:cNvSpPr/>
+          <p:nvPr/>
+        </p:nvSpPr>
+        <p:spPr>
+          <a:xfrm>
+            <a:off x="1371600" y="2286000"/>
+            <a:ext cx="9722815" cy="411480"/>
+          </a:xfrm>
+          <a:prstGeom prst="rect">
+            <a:avLst/>
+          </a:prstGeom>
+          <a:noFill/>
+          <a:ln/>
+        </p:spPr>
+        <p:txBody>
+          <a:bodyPr wrap="square" rtlCol="0" anchor="t"/>
+          <a:lstStyle/>
+          <a:p>
+            <a:pPr algn="l" indent="0" marL="0">
+              <a:buNone/>
+            </a:pPr>
+            <a:r>
+              <a:rPr lang="en-US" sz="1400" dirty="0">
+                <a:solidFill>
+                  <a:srgbClr val="004889"/>
+                </a:solidFill>
+                <a:latin typeface="Noto Serif SC" pitchFamily="34" charset="0"/>
+                <a:ea typeface="Noto Serif SC" pitchFamily="34" charset="-122"/>
+                <a:cs typeface="Noto Serif SC" pitchFamily="34" charset="-120"/>
+              </a:rPr>
+              <a:t>Ⅲ.  三、综合结论</a:t>
+            </a:r>
+            <a:endParaRPr lang="en-US" sz="1400" dirty="0"/>
+          </a:p>
+        </p:txBody>
+      </p:sp>
+    </p:spTree>
+  </p:cSld>
+  <p:clrMapOvr>
+    <a:masterClrMapping/>
+  </p:clrMapOvr>
+</p:sld>
+</file>
+
+<file path=ppt/slides/slide3.xml><?xml version="1.0" encoding="utf-8"?>
+<p:sld xmlns:a="http://schemas.openxmlformats.org/drawingml/2006/main" xmlns:r="http://schemas.openxmlformats.org/officeDocument/2006/relationships" xmlns:p="http://schemas.openxmlformats.org/presentationml/2006/main">
+  <p:cSld name="Slide 3">
+    <p:bg>
+      <p:bgPr>
+        <a:solidFill>
+          <a:srgbClr val="FBF6EE"/>
+        </a:solidFill>
+      </p:bgPr>
+    </p:bg>
+    <p:spTree>
+      <p:nvGrpSpPr>
+        <p:cNvPr id="1" name=""/>
+        <p:cNvGrpSpPr/>
+        <p:nvPr/>
+      </p:nvGrpSpPr>
+      <p:grpSpPr>
+        <a:xfrm>
+          <a:off x="0" y="0"/>
+          <a:ext cx="0" cy="0"/>
+          <a:chOff x="0" y="0"/>
+          <a:chExt cx="0" cy="0"/>
+        </a:xfrm>
+      </p:grpSpPr>
+      <p:sp>
+        <p:nvSpPr>
+          <p:cNvPr id="2" name="Text 0"/>
+          <p:cNvSpPr/>
+          <p:nvPr/>
+        </p:nvSpPr>
+        <p:spPr>
+          <a:xfrm>
+            <a:off x="548640" y="274320"/>
+            <a:ext cx="11094415" cy="640080"/>
+          </a:xfrm>
+          <a:prstGeom prst="rect">
+            <a:avLst/>
+          </a:prstGeom>
+          <a:noFill/>
+          <a:ln/>
+        </p:spPr>
+        <p:txBody>
+          <a:bodyPr wrap="square" rtlCol="0" anchor="t"/>
+          <a:lstStyle/>
+          <a:p>
+            <a:pPr algn="l" indent="0" marL="0">
+              <a:buNone/>
+            </a:pPr>
+            <a:r>
+              <a:rPr lang="en-US" sz="2200" b="1" dirty="0">
+                <a:solidFill>
+                  <a:srgbClr val="004889"/>
+                </a:solidFill>
+                <a:latin typeface="Noto Serif SC" pitchFamily="34" charset="0"/>
+                <a:ea typeface="Noto Serif SC" pitchFamily="34" charset="-122"/>
+                <a:cs typeface="Noto Serif SC" pitchFamily="34" charset="-120"/>
+              </a:rPr>
+              <a:t>核心经营指标</a:t>
+            </a:r>
+            <a:endParaRPr lang="en-US" sz="2200" dirty="0"/>
+          </a:p>
+        </p:txBody>
+      </p:sp>
+      <p:sp>
+        <p:nvSpPr>
+          <p:cNvPr id="3" name="Shape 1"/>
+          <p:cNvSpPr/>
+          <p:nvPr/>
+        </p:nvSpPr>
+        <p:spPr>
+          <a:xfrm>
+            <a:off x="548640" y="1188720"/>
+            <a:ext cx="3393338" cy="4114800"/>
+          </a:xfrm>
+          <a:prstGeom prst="roundRect">
+            <a:avLst>
+              <a:gd name="adj" fmla="val 1617"/>
+            </a:avLst>
+          </a:prstGeom>
+          <a:solidFill>
+            <a:srgbClr val="FFFEFB"/>
+          </a:solidFill>
+          <a:ln/>
+          <a:effectLst>
+            <a:outerShdw sx="100000" sy="100000" kx="0" ky="0" algn="bl" rotWithShape="0" blurRad="101600" dist="38100" dir="5400000">
+              <a:srgbClr val="999999">
+                <a:alpha val="40000"/>
+              </a:srgbClr>
+            </a:outerShdw>
+          </a:effectLst>
+        </p:spPr>
+      </p:sp>
+      <p:sp>
+        <p:nvSpPr>
+          <p:cNvPr id="4" name="Shape 2"/>
+          <p:cNvSpPr/>
+          <p:nvPr/>
+        </p:nvSpPr>
+        <p:spPr>
+          <a:xfrm>
+            <a:off x="548640" y="5193792"/>
+            <a:ext cx="3393338" cy="109728"/>
+          </a:xfrm>
+          <a:prstGeom prst="rect">
+            <a:avLst/>
+          </a:prstGeom>
+          <a:solidFill>
+            <a:srgbClr val="004889"/>
+          </a:solidFill>
+          <a:ln/>
+        </p:spPr>
+      </p:sp>
+      <p:sp>
+        <p:nvSpPr>
+          <p:cNvPr id="5" name="Text 3"/>
+          <p:cNvSpPr/>
+          <p:nvPr/>
+        </p:nvSpPr>
+        <p:spPr>
+          <a:xfrm>
+            <a:off x="640080" y="1371600"/>
+            <a:ext cx="3210458" cy="365760"/>
+          </a:xfrm>
+          <a:prstGeom prst="rect">
+            <a:avLst/>
+          </a:prstGeom>
+          <a:noFill/>
+          <a:ln/>
+        </p:spPr>
+        <p:txBody>
+          <a:bodyPr wrap="square" rtlCol="0" anchor="t"/>
+          <a:lstStyle/>
+          <a:p>
+            <a:pPr algn="ctr" indent="0" marL="0">
+              <a:buNone/>
+            </a:pPr>
+            <a:r>
+              <a:rPr lang="en-US" sz="1100" b="1" dirty="0">
+                <a:solidFill>
+                  <a:srgbClr val="9A8E78"/>
+                </a:solidFill>
+                <a:latin typeface="Noto Serif SC" pitchFamily="34" charset="0"/>
+                <a:ea typeface="Noto Serif SC" pitchFamily="34" charset="-122"/>
+                <a:cs typeface="Noto Serif SC" pitchFamily="34" charset="-120"/>
+              </a:rPr>
+              <a:t>总吞吐量</a:t>
+            </a:r>
+            <a:endParaRPr lang="en-US" sz="1100" dirty="0"/>
+          </a:p>
+        </p:txBody>
+      </p:sp>
+      <p:sp>
+        <p:nvSpPr>
+          <p:cNvPr id="6" name="Text 4"/>
+          <p:cNvSpPr/>
+          <p:nvPr/>
+        </p:nvSpPr>
+        <p:spPr>
+          <a:xfrm>
+            <a:off x="640080" y="2011680"/>
+            <a:ext cx="3210458" cy="1097280"/>
+          </a:xfrm>
+          <a:prstGeom prst="rect">
+            <a:avLst/>
+          </a:prstGeom>
+          <a:noFill/>
+          <a:ln/>
+        </p:spPr>
+        <p:txBody>
+          <a:bodyPr wrap="square" rtlCol="0" anchor="t"/>
+          <a:lstStyle/>
+          <a:p>
+            <a:pPr algn="ctr" indent="0" marL="0">
+              <a:buNone/>
+            </a:pPr>
+            <a:r>
+              <a:rPr lang="en-US" sz="3600" b="1" dirty="0">
+                <a:solidFill>
+                  <a:srgbClr val="004889"/>
+                </a:solidFill>
+                <a:latin typeface="JetBrains Mono" pitchFamily="34" charset="0"/>
+                <a:ea typeface="JetBrains Mono" pitchFamily="34" charset="-122"/>
+                <a:cs typeface="JetBrains Mono" pitchFamily="34" charset="-120"/>
+              </a:rPr>
+              <a:t>9500.6 万吨</a:t>
+            </a:r>
+            <a:endParaRPr lang="en-US" sz="3600" dirty="0"/>
+          </a:p>
+        </p:txBody>
+      </p:sp>
+      <p:sp>
+        <p:nvSpPr>
+          <p:cNvPr id="7" name="Text 5"/>
+          <p:cNvSpPr/>
+          <p:nvPr/>
+        </p:nvSpPr>
+        <p:spPr>
+          <a:xfrm>
+            <a:off x="640080" y="3291840"/>
+            <a:ext cx="3210458" cy="365760"/>
+          </a:xfrm>
+          <a:prstGeom prst="rect">
+            <a:avLst/>
+          </a:prstGeom>
+          <a:noFill/>
+          <a:ln/>
+        </p:spPr>
+        <p:txBody>
+          <a:bodyPr wrap="square" rtlCol="0" anchor="t"/>
+          <a:lstStyle/>
+          <a:p>
+            <a:pPr algn="ctr" indent="0" marL="0">
+              <a:buNone/>
+            </a:pPr>
+            <a:r>
+              <a:rPr lang="en-US" sz="900" dirty="0">
+                <a:solidFill>
+                  <a:srgbClr val="9A8E78"/>
+                </a:solidFill>
+                <a:latin typeface="Noto Serif SC" pitchFamily="34" charset="0"/>
+                <a:ea typeface="Noto Serif SC" pitchFamily="34" charset="-122"/>
+                <a:cs typeface="Noto Serif SC" pitchFamily="34" charset="-120"/>
+              </a:rPr>
+              <a:t>2026 Q1</a:t>
+            </a:r>
+            <a:endParaRPr lang="en-US" sz="900" dirty="0"/>
+          </a:p>
+        </p:txBody>
+      </p:sp>
+      <p:sp>
+        <p:nvSpPr>
+          <p:cNvPr id="8" name="Shape 6"/>
+          <p:cNvSpPr/>
+          <p:nvPr/>
+        </p:nvSpPr>
+        <p:spPr>
+          <a:xfrm>
+            <a:off x="4307738" y="1188720"/>
+            <a:ext cx="3393338" cy="4114800"/>
+          </a:xfrm>
+          <a:prstGeom prst="roundRect">
+            <a:avLst>
+              <a:gd name="adj" fmla="val 1617"/>
+            </a:avLst>
+          </a:prstGeom>
+          <a:solidFill>
+            <a:srgbClr val="FFFEFB"/>
+          </a:solidFill>
+          <a:ln/>
+          <a:effectLst>
+            <a:outerShdw sx="100000" sy="100000" kx="0" ky="0" algn="bl" rotWithShape="0" blurRad="101600" dist="38100" dir="5400000">
+              <a:srgbClr val="999999">
+                <a:alpha val="40000"/>
+              </a:srgbClr>
+            </a:outerShdw>
+          </a:effectLst>
+        </p:spPr>
+      </p:sp>
+      <p:sp>
+        <p:nvSpPr>
+          <p:cNvPr id="9" name="Shape 7"/>
+          <p:cNvSpPr/>
+          <p:nvPr/>
+        </p:nvSpPr>
+        <p:spPr>
+          <a:xfrm>
+            <a:off x="4307738" y="5193792"/>
+            <a:ext cx="3393338" cy="109728"/>
+          </a:xfrm>
+          <a:prstGeom prst="rect">
+            <a:avLst/>
+          </a:prstGeom>
+          <a:solidFill>
+            <a:srgbClr val="004889"/>
+          </a:solidFill>
+          <a:ln/>
+        </p:spPr>
+      </p:sp>
+      <p:sp>
+        <p:nvSpPr>
+          <p:cNvPr id="10" name="Text 8"/>
+          <p:cNvSpPr/>
+          <p:nvPr/>
+        </p:nvSpPr>
+        <p:spPr>
+          <a:xfrm>
+            <a:off x="4399178" y="1371600"/>
+            <a:ext cx="3210458" cy="365760"/>
+          </a:xfrm>
+          <a:prstGeom prst="rect">
+            <a:avLst/>
+          </a:prstGeom>
+          <a:noFill/>
+          <a:ln/>
+        </p:spPr>
+        <p:txBody>
+          <a:bodyPr wrap="square" rtlCol="0" anchor="t"/>
+          <a:lstStyle/>
+          <a:p>
+            <a:pPr algn="ctr" indent="0" marL="0">
+              <a:buNone/>
+            </a:pPr>
+            <a:r>
+              <a:rPr lang="en-US" sz="1100" b="1" dirty="0">
+                <a:solidFill>
+                  <a:srgbClr val="9A8E78"/>
+                </a:solidFill>
+                <a:latin typeface="Noto Serif SC" pitchFamily="34" charset="0"/>
+                <a:ea typeface="Noto Serif SC" pitchFamily="34" charset="-122"/>
+                <a:cs typeface="Noto Serif SC" pitchFamily="34" charset="-120"/>
+              </a:rPr>
+              <a:t>同比增长</a:t>
+            </a:r>
+            <a:endParaRPr lang="en-US" sz="1100" dirty="0"/>
+          </a:p>
+        </p:txBody>
+      </p:sp>
+      <p:sp>
+        <p:nvSpPr>
+          <p:cNvPr id="11" name="Text 9"/>
+          <p:cNvSpPr/>
+          <p:nvPr/>
+        </p:nvSpPr>
+        <p:spPr>
+          <a:xfrm>
+            <a:off x="4399178" y="2011680"/>
+            <a:ext cx="3210458" cy="1097280"/>
+          </a:xfrm>
+          <a:prstGeom prst="rect">
+            <a:avLst/>
+          </a:prstGeom>
+          <a:noFill/>
+          <a:ln/>
+        </p:spPr>
+        <p:txBody>
+          <a:bodyPr wrap="square" rtlCol="0" anchor="t"/>
+          <a:lstStyle/>
+          <a:p>
+            <a:pPr algn="ctr" indent="0" marL="0">
+              <a:buNone/>
+            </a:pPr>
+            <a:r>
+              <a:rPr lang="en-US" sz="3600" b="1" dirty="0">
+                <a:solidFill>
+                  <a:srgbClr val="004889"/>
+                </a:solidFill>
+                <a:latin typeface="JetBrains Mono" pitchFamily="34" charset="0"/>
+                <a:ea typeface="JetBrains Mono" pitchFamily="34" charset="-122"/>
+                <a:cs typeface="JetBrains Mono" pitchFamily="34" charset="-120"/>
+              </a:rPr>
+              <a:t>12.0%</a:t>
+            </a:r>
+            <a:endParaRPr lang="en-US" sz="3600" dirty="0"/>
+          </a:p>
+        </p:txBody>
+      </p:sp>
+      <p:sp>
+        <p:nvSpPr>
+          <p:cNvPr id="12" name="Text 10"/>
+          <p:cNvSpPr/>
+          <p:nvPr/>
+        </p:nvSpPr>
+        <p:spPr>
+          <a:xfrm>
+            <a:off x="4399178" y="3291840"/>
+            <a:ext cx="3210458" cy="365760"/>
+          </a:xfrm>
+          <a:prstGeom prst="rect">
+            <a:avLst/>
+          </a:prstGeom>
+          <a:noFill/>
+          <a:ln/>
+        </p:spPr>
+        <p:txBody>
+          <a:bodyPr wrap="square" rtlCol="0" anchor="t"/>
+          <a:lstStyle/>
+          <a:p>
+            <a:pPr algn="ctr" indent="0" marL="0">
+              <a:buNone/>
+            </a:pPr>
+            <a:r>
+              <a:rPr lang="en-US" sz="900" dirty="0">
+                <a:solidFill>
+                  <a:srgbClr val="9A8E78"/>
+                </a:solidFill>
+                <a:latin typeface="Noto Serif SC" pitchFamily="34" charset="0"/>
+                <a:ea typeface="Noto Serif SC" pitchFamily="34" charset="-122"/>
+                <a:cs typeface="Noto Serif SC" pitchFamily="34" charset="-120"/>
+              </a:rPr>
+              <a:t>YoY</a:t>
+            </a:r>
+            <a:endParaRPr lang="en-US" sz="900" dirty="0"/>
+          </a:p>
+        </p:txBody>
+      </p:sp>
+      <p:sp>
+        <p:nvSpPr>
+          <p:cNvPr id="13" name="Shape 11"/>
+          <p:cNvSpPr/>
+          <p:nvPr/>
+        </p:nvSpPr>
+        <p:spPr>
+          <a:xfrm>
+            <a:off x="8066837" y="1188720"/>
+            <a:ext cx="3393338" cy="4114800"/>
+          </a:xfrm>
+          <a:prstGeom prst="roundRect">
+            <a:avLst>
+              <a:gd name="adj" fmla="val 1617"/>
+            </a:avLst>
+          </a:prstGeom>
+          <a:solidFill>
+            <a:srgbClr val="FFFEFB"/>
+          </a:solidFill>
+          <a:ln/>
+          <a:effectLst>
+            <a:outerShdw sx="100000" sy="100000" kx="0" ky="0" algn="bl" rotWithShape="0" blurRad="101600" dist="38100" dir="5400000">
+              <a:srgbClr val="999999">
+                <a:alpha val="40000"/>
+              </a:srgbClr>
+            </a:outerShdw>
+          </a:effectLst>
+        </p:spPr>
+      </p:sp>
+      <p:sp>
+        <p:nvSpPr>
+          <p:cNvPr id="14" name="Shape 12"/>
+          <p:cNvSpPr/>
+          <p:nvPr/>
+        </p:nvSpPr>
+        <p:spPr>
+          <a:xfrm>
+            <a:off x="8066837" y="5193792"/>
+            <a:ext cx="3393338" cy="109728"/>
+          </a:xfrm>
+          <a:prstGeom prst="rect">
+            <a:avLst/>
+          </a:prstGeom>
+          <a:solidFill>
+            <a:srgbClr val="AC916B"/>
+          </a:solidFill>
+          <a:ln/>
+        </p:spPr>
+      </p:sp>
+      <p:sp>
+        <p:nvSpPr>
+          <p:cNvPr id="15" name="Text 13"/>
+          <p:cNvSpPr/>
+          <p:nvPr/>
+        </p:nvSpPr>
+        <p:spPr>
+          <a:xfrm>
+            <a:off x="8158277" y="1371600"/>
+            <a:ext cx="3210458" cy="365760"/>
+          </a:xfrm>
+          <a:prstGeom prst="rect">
+            <a:avLst/>
+          </a:prstGeom>
+          <a:noFill/>
+          <a:ln/>
+        </p:spPr>
+        <p:txBody>
+          <a:bodyPr wrap="square" rtlCol="0" anchor="t"/>
+          <a:lstStyle/>
+          <a:p>
+            <a:pPr algn="ctr" indent="0" marL="0">
+              <a:buNone/>
+            </a:pPr>
+            <a:r>
+              <a:rPr lang="en-US" sz="1100" b="1" dirty="0">
+                <a:solidFill>
+                  <a:srgbClr val="9A8E78"/>
+                </a:solidFill>
+                <a:latin typeface="Noto Serif SC" pitchFamily="34" charset="0"/>
+                <a:ea typeface="Noto Serif SC" pitchFamily="34" charset="-122"/>
+                <a:cs typeface="Noto Serif SC" pitchFamily="34" charset="-120"/>
+              </a:rPr>
+              <a:t>最高港区</a:t>
+            </a:r>
+            <a:endParaRPr lang="en-US" sz="1100" dirty="0"/>
+          </a:p>
+        </p:txBody>
+      </p:sp>
+      <p:sp>
+        <p:nvSpPr>
+          <p:cNvPr id="16" name="Text 14"/>
+          <p:cNvSpPr/>
+          <p:nvPr/>
+        </p:nvSpPr>
+        <p:spPr>
+          <a:xfrm>
+            <a:off x="8158277" y="2011680"/>
+            <a:ext cx="3210458" cy="1097280"/>
+          </a:xfrm>
+          <a:prstGeom prst="rect">
+            <a:avLst/>
+          </a:prstGeom>
+          <a:noFill/>
+          <a:ln/>
+        </p:spPr>
+        <p:txBody>
+          <a:bodyPr wrap="square" rtlCol="0" anchor="t"/>
+          <a:lstStyle/>
+          <a:p>
+            <a:pPr algn="ctr" indent="0" marL="0">
+              <a:buNone/>
+            </a:pPr>
+            <a:r>
+              <a:rPr lang="en-US" sz="3600" b="1" dirty="0">
+                <a:solidFill>
+                  <a:srgbClr val="AC916B"/>
+                </a:solidFill>
+                <a:latin typeface="JetBrains Mono" pitchFamily="34" charset="0"/>
+                <a:ea typeface="JetBrains Mono" pitchFamily="34" charset="-122"/>
+                <a:cs typeface="JetBrains Mono" pitchFamily="34" charset="-120"/>
+              </a:rPr>
+              <a:t>大连港</a:t>
+            </a:r>
+            <a:endParaRPr lang="en-US" sz="3600" dirty="0"/>
+          </a:p>
+        </p:txBody>
+      </p:sp>
+      <p:sp>
+        <p:nvSpPr>
+          <p:cNvPr id="17" name="Text 15"/>
+          <p:cNvSpPr/>
+          <p:nvPr/>
+        </p:nvSpPr>
+        <p:spPr>
+          <a:xfrm>
+            <a:off x="8158277" y="3291840"/>
+            <a:ext cx="3210458" cy="365760"/>
+          </a:xfrm>
+          <a:prstGeom prst="rect">
+            <a:avLst/>
+          </a:prstGeom>
+          <a:noFill/>
+          <a:ln/>
+        </p:spPr>
+        <p:txBody>
+          <a:bodyPr wrap="square" rtlCol="0" anchor="t"/>
+          <a:lstStyle/>
+          <a:p>
+            <a:pPr algn="ctr" indent="0" marL="0">
+              <a:buNone/>
+            </a:pPr>
+            <a:r>
+              <a:rPr lang="en-US" sz="900" dirty="0">
+                <a:solidFill>
+                  <a:srgbClr val="9A8E78"/>
+                </a:solidFill>
+                <a:latin typeface="Noto Serif SC" pitchFamily="34" charset="0"/>
+                <a:ea typeface="Noto Serif SC" pitchFamily="34" charset="-122"/>
+                <a:cs typeface="Noto Serif SC" pitchFamily="34" charset="-120"/>
+              </a:rPr>
+              <a:t>4500.5 万吨</a:t>
+            </a:r>
+            <a:endParaRPr lang="en-US" sz="900" dirty="0"/>
+          </a:p>
+        </p:txBody>
+      </p:sp>
+    </p:spTree>
+  </p:cSld>
+  <p:clrMapOvr>
+    <a:masterClrMapping/>
+  </p:clrMapOvr>
+</p:sld>
+</file>
+
+<file path=ppt/slides/slide4.xml><?xml version="1.0" encoding="utf-8"?>
+<p:sld xmlns:a="http://schemas.openxmlformats.org/drawingml/2006/main" xmlns:r="http://schemas.openxmlformats.org/officeDocument/2006/relationships" xmlns:p="http://schemas.openxmlformats.org/presentationml/2006/main">
+  <p:cSld name="Slide 4">
+    <p:bg>
+      <p:bgPr>
+        <a:solidFill>
+          <a:srgbClr val="FBF6EE"/>
+        </a:solidFill>
+      </p:bgPr>
+    </p:bg>
+    <p:spTree>
+      <p:nvGrpSpPr>
+        <p:cNvPr id="1" name=""/>
+        <p:cNvGrpSpPr/>
+        <p:nvPr/>
+      </p:nvGrpSpPr>
+      <p:grpSpPr>
+        <a:xfrm>
+          <a:off x="0" y="0"/>
+          <a:ext cx="0" cy="0"/>
+          <a:chOff x="0" y="0"/>
+          <a:chExt cx="0" cy="0"/>
+        </a:xfrm>
+      </p:grpSpPr>
+      <p:sp>
+        <p:nvSpPr>
+          <p:cNvPr id="2" name="Shape 0"/>
+          <p:cNvSpPr/>
+          <p:nvPr/>
+        </p:nvSpPr>
+        <p:spPr>
+          <a:xfrm>
+            <a:off x="548640" y="548640"/>
+            <a:ext cx="11094415" cy="10973"/>
+          </a:xfrm>
+          <a:prstGeom prst="rect">
+            <a:avLst/>
+          </a:prstGeom>
+          <a:solidFill>
+            <a:srgbClr val="004889"/>
+          </a:solidFill>
+          <a:ln/>
+        </p:spPr>
+      </p:sp>
+      <p:sp>
+        <p:nvSpPr>
+          <p:cNvPr id="3" name="Text 1"/>
+          <p:cNvSpPr/>
+          <p:nvPr/>
+        </p:nvSpPr>
+        <p:spPr>
+          <a:xfrm>
+            <a:off x="548640" y="1828800"/>
+            <a:ext cx="3657600" cy="3200400"/>
+          </a:xfrm>
+          <a:prstGeom prst="rect">
+            <a:avLst/>
+          </a:prstGeom>
+          <a:noFill/>
+          <a:ln/>
+        </p:spPr>
+        <p:txBody>
+          <a:bodyPr wrap="square" rtlCol="0" anchor="t"/>
+          <a:lstStyle/>
+          <a:p>
+            <a:pPr algn="l" indent="0" marL="0">
+              <a:buNone/>
+            </a:pPr>
+            <a:r>
+              <a:rPr lang="en-US" sz="12000" dirty="0">
+                <a:solidFill>
+                  <a:srgbClr val="AC916B"/>
+                </a:solidFill>
+                <a:latin typeface="Noto Serif SC" pitchFamily="34" charset="0"/>
+                <a:ea typeface="Noto Serif SC" pitchFamily="34" charset="-122"/>
+                <a:cs typeface="Noto Serif SC" pitchFamily="34" charset="-120"/>
+              </a:rPr>
+              <a:t>Ⅰ</a:t>
+            </a:r>
+            <a:endParaRPr lang="en-US" sz="12000" dirty="0"/>
+          </a:p>
+        </p:txBody>
+      </p:sp>
+      <p:sp>
+        <p:nvSpPr>
+          <p:cNvPr id="4" name="Text 2"/>
+          <p:cNvSpPr/>
+          <p:nvPr/>
+        </p:nvSpPr>
+        <p:spPr>
+          <a:xfrm>
+            <a:off x="5029200" y="2743200"/>
+            <a:ext cx="6400800" cy="1828800"/>
+          </a:xfrm>
+          <a:prstGeom prst="rect">
+            <a:avLst/>
+          </a:prstGeom>
+          <a:noFill/>
+          <a:ln/>
+        </p:spPr>
+        <p:txBody>
+          <a:bodyPr wrap="square" rtlCol="0" anchor="t"/>
+          <a:lstStyle/>
+          <a:p>
+            <a:pPr algn="l" indent="0" marL="0">
+              <a:buNone/>
+            </a:pPr>
+            <a:r>
+              <a:rPr lang="en-US" sz="2200" b="1" dirty="0">
+                <a:solidFill>
+                  <a:srgbClr val="004889"/>
+                </a:solidFill>
+                <a:latin typeface="Noto Serif SC" pitchFamily="34" charset="0"/>
+                <a:ea typeface="Noto Serif SC" pitchFamily="34" charset="-122"/>
+                <a:cs typeface="Noto Serif SC" pitchFamily="34" charset="-120"/>
+              </a:rPr>
+              <a:t>一、港区吞吐量现状</a:t>
+            </a:r>
+            <a:endParaRPr lang="en-US" sz="2200" dirty="0"/>
+          </a:p>
+        </p:txBody>
+      </p:sp>
+      <p:sp>
+        <p:nvSpPr>
+          <p:cNvPr id="5" name="Shape 3"/>
+          <p:cNvSpPr/>
+          <p:nvPr/>
+        </p:nvSpPr>
+        <p:spPr>
+          <a:xfrm>
+            <a:off x="11612880" y="6400800"/>
+            <a:ext cx="118872" cy="118872"/>
+          </a:xfrm>
+          <a:prstGeom prst="rect">
+            <a:avLst/>
+          </a:prstGeom>
+          <a:solidFill>
+            <a:srgbClr val="AC916B"/>
+          </a:solidFill>
+          <a:ln/>
+        </p:spPr>
+      </p:sp>
+    </p:spTree>
+  </p:cSld>
+  <p:clrMapOvr>
+    <a:masterClrMapping/>
+  </p:clrMapOvr>
+</p:sld>
+</file>
+
+<file path=ppt/slides/slide5.xml><?xml version="1.0" encoding="utf-8"?>
+<p:sld xmlns:a="http://schemas.openxmlformats.org/drawingml/2006/main" xmlns:r="http://schemas.openxmlformats.org/officeDocument/2006/relationships" xmlns:p="http://schemas.openxmlformats.org/presentationml/2006/main">
+  <p:cSld name="Slide 5">
+    <p:bg>
+      <p:bgPr>
+        <a:solidFill>
+          <a:srgbClr val="FBF6EE"/>
+        </a:solidFill>
+      </p:bgPr>
+    </p:bg>
+    <p:spTree>
+      <p:nvGrpSpPr>
+        <p:cNvPr id="1" name=""/>
+        <p:cNvGrpSpPr/>
+        <p:nvPr/>
+      </p:nvGrpSpPr>
+      <p:grpSpPr>
+        <a:xfrm>
+          <a:off x="0" y="0"/>
+          <a:ext cx="0" cy="0"/>
+          <a:chOff x="0" y="0"/>
+          <a:chExt cx="0" cy="0"/>
+        </a:xfrm>
+      </p:grpSpPr>
+      <p:sp>
+        <p:nvSpPr>
+          <p:cNvPr id="2" name="Text 0"/>
+          <p:cNvSpPr/>
+          <p:nvPr/>
+        </p:nvSpPr>
+        <p:spPr>
+          <a:xfrm>
+            <a:off x="548640" y="457200"/>
+            <a:ext cx="11094415" cy="365760"/>
+          </a:xfrm>
+          <a:prstGeom prst="rect">
+            <a:avLst/>
+          </a:prstGeom>
+          <a:noFill/>
+          <a:ln/>
+        </p:spPr>
+        <p:txBody>
+          <a:bodyPr wrap="square" rtlCol="0" anchor="t"/>
+          <a:lstStyle/>
+          <a:p>
+            <a:pPr algn="l" indent="0" marL="0">
+              <a:buNone/>
+            </a:pPr>
+            <a:r>
+              <a:rPr lang="en-US" sz="1400" b="1" dirty="0">
+                <a:solidFill>
+                  <a:srgbClr val="004889"/>
+                </a:solidFill>
+                <a:latin typeface="Noto Serif SC" pitchFamily="34" charset="0"/>
+                <a:ea typeface="Noto Serif SC" pitchFamily="34" charset="-122"/>
+                <a:cs typeface="Noto Serif SC" pitchFamily="34" charset="-120"/>
+              </a:rPr>
+              <a:t>港区吞吐量</a:t>
+            </a:r>
+            <a:endParaRPr lang="en-US" sz="1400" dirty="0"/>
+          </a:p>
+        </p:txBody>
+      </p:sp>
+      <p:graphicFrame>
+        <p:nvGraphicFramePr>
+          <p:cNvPr id="3" name="Chart 0" descr=""/>
+          <p:cNvGraphicFramePr/>
+          <p:nvPr/>
+        </p:nvGraphicFramePr>
+        <p:xfrm>
+          <a:off x="548640" y="914400"/>
+          <a:ext cx="11094415" cy="3566160"/>
+        </p:xfrm>
+        <a:graphic xmlns:a="http://schemas.openxmlformats.org/drawingml/2006/main">
+          <a:graphicData uri="http://schemas.openxmlformats.org/drawingml/2006/chart">
+            <c:chart xmlns:c="http://schemas.openxmlformats.org/drawingml/2006/chart" r:id="rId1"/>
+          </a:graphicData>
+        </a:graphic>
+      </p:graphicFrame>
+      <p:sp>
+        <p:nvSpPr>
+          <p:cNvPr id="4" name="Shape 1"/>
+          <p:cNvSpPr/>
+          <p:nvPr/>
+        </p:nvSpPr>
+        <p:spPr>
+          <a:xfrm>
+            <a:off x="11612880" y="6400800"/>
+            <a:ext cx="118872" cy="118872"/>
+          </a:xfrm>
+          <a:prstGeom prst="rect">
+            <a:avLst/>
+          </a:prstGeom>
+          <a:solidFill>
+            <a:srgbClr val="AC916B"/>
+          </a:solidFill>
+          <a:ln/>
+        </p:spPr>
+      </p:sp>
+    </p:spTree>
+  </p:cSld>
+  <p:clrMapOvr>
+    <a:masterClrMapping/>
+  </p:clrMapOvr>
+</p:sld>
+</file>
+
+<file path=ppt/slides/slide6.xml><?xml version="1.0" encoding="utf-8"?>
+<p:sld xmlns:a="http://schemas.openxmlformats.org/drawingml/2006/main" xmlns:r="http://schemas.openxmlformats.org/officeDocument/2006/relationships" xmlns:p="http://schemas.openxmlformats.org/presentationml/2006/main">
+  <p:cSld name="Slide 6">
+    <p:bg>
+      <p:bgPr>
+        <a:solidFill>
+          <a:srgbClr val="FBF6EE"/>
+        </a:solidFill>
+      </p:bgPr>
+    </p:bg>
+    <p:spTree>
+      <p:nvGrpSpPr>
+        <p:cNvPr id="1" name=""/>
+        <p:cNvGrpSpPr/>
+        <p:nvPr/>
+      </p:nvGrpSpPr>
+      <p:grpSpPr>
+        <a:xfrm>
+          <a:off x="0" y="0"/>
+          <a:ext cx="0" cy="0"/>
+          <a:chOff x="0" y="0"/>
+          <a:chExt cx="0" cy="0"/>
+        </a:xfrm>
+      </p:grpSpPr>
+      <p:sp>
+        <p:nvSpPr>
+          <p:cNvPr id="2" name="Text 0"/>
+          <p:cNvSpPr/>
+          <p:nvPr/>
+        </p:nvSpPr>
+        <p:spPr>
+          <a:xfrm>
+            <a:off x="548640" y="457200"/>
+            <a:ext cx="11094415" cy="274320"/>
+          </a:xfrm>
+          <a:prstGeom prst="rect">
+            <a:avLst/>
+          </a:prstGeom>
+          <a:noFill/>
+          <a:ln/>
+        </p:spPr>
+        <p:txBody>
+          <a:bodyPr wrap="square" rtlCol="0" anchor="t"/>
+          <a:lstStyle/>
+          <a:p>
+            <a:pPr algn="l" indent="0" marL="0">
+              <a:buNone/>
+            </a:pPr>
+            <a:r>
+              <a:rPr lang="en-US" sz="800" dirty="0">
+                <a:solidFill>
+                  <a:srgbClr val="AC916B"/>
+                </a:solidFill>
+                <a:latin typeface="Noto Sans SC" pitchFamily="34" charset="0"/>
+                <a:ea typeface="Noto Sans SC" pitchFamily="34" charset="-122"/>
+                <a:cs typeface="Noto Sans SC" pitchFamily="34" charset="-120"/>
+              </a:rPr>
+              <a:t>一、港区吞吐量现状</a:t>
+            </a:r>
+            <a:endParaRPr lang="en-US" sz="800" dirty="0"/>
+          </a:p>
+        </p:txBody>
+      </p:sp>
+      <p:sp>
+        <p:nvSpPr>
+          <p:cNvPr id="3" name="Shape 1"/>
+          <p:cNvSpPr/>
+          <p:nvPr/>
+        </p:nvSpPr>
+        <p:spPr>
+          <a:xfrm>
+            <a:off x="548640" y="914400"/>
+            <a:ext cx="50292" cy="1014984"/>
+          </a:xfrm>
+          <a:prstGeom prst="rect">
+            <a:avLst/>
+          </a:prstGeom>
+          <a:solidFill>
+            <a:srgbClr val="AC916B"/>
+          </a:solidFill>
+          <a:ln/>
+        </p:spPr>
+      </p:sp>
+      <p:sp>
+        <p:nvSpPr>
+          <p:cNvPr id="4" name="Text 2"/>
+          <p:cNvSpPr/>
+          <p:nvPr/>
+        </p:nvSpPr>
+        <p:spPr>
+          <a:xfrm>
+            <a:off x="822960" y="914400"/>
+            <a:ext cx="10424160" cy="731520"/>
+          </a:xfrm>
+          <a:prstGeom prst="rect">
+            <a:avLst/>
+          </a:prstGeom>
+          <a:noFill/>
+          <a:ln/>
+        </p:spPr>
+        <p:txBody>
+          <a:bodyPr wrap="square" rtlCol="0" anchor="t"/>
+          <a:lstStyle/>
+          <a:p>
+            <a:pPr algn="l" indent="0" marL="0">
+              <a:buNone/>
+            </a:pPr>
+            <a:r>
+              <a:rPr lang="en-US" sz="1800" dirty="0">
+                <a:solidFill>
+                  <a:srgbClr val="9A8E78"/>
+                </a:solidFill>
+                <a:latin typeface="Noto Serif SC" pitchFamily="34" charset="0"/>
+                <a:ea typeface="Noto Serif SC" pitchFamily="34" charset="-122"/>
+                <a:cs typeface="Noto Serif SC" pitchFamily="34" charset="-120"/>
+              </a:rPr>
+              <a:t>2026 Q1 大连港吞吐量达 4500.5 万吨，同比增长 12%，居三港之首；营口港 3200.1 万吨，锦州港 1800.0 万吨。</a:t>
+            </a:r>
+            <a:endParaRPr lang="en-US" sz="1800" dirty="0"/>
+          </a:p>
+        </p:txBody>
+      </p:sp>
+    </p:spTree>
+  </p:cSld>
+  <p:clrMapOvr>
+    <a:masterClrMapping/>
+  </p:clrMapOvr>
+</p:sld>
+</file>
+
+<file path=ppt/slides/slide7.xml><?xml version="1.0" encoding="utf-8"?>
+<p:sld xmlns:a="http://schemas.openxmlformats.org/drawingml/2006/main" xmlns:r="http://schemas.openxmlformats.org/officeDocument/2006/relationships" xmlns:p="http://schemas.openxmlformats.org/presentationml/2006/main">
+  <p:cSld name="Slide 7">
+    <p:bg>
+      <p:bgPr>
+        <a:solidFill>
+          <a:srgbClr val="FBF6EE"/>
+        </a:solidFill>
+      </p:bgPr>
+    </p:bg>
+    <p:spTree>
+      <p:nvGrpSpPr>
+        <p:cNvPr id="1" name=""/>
+        <p:cNvGrpSpPr/>
+        <p:nvPr/>
+      </p:nvGrpSpPr>
+      <p:grpSpPr>
+        <a:xfrm>
+          <a:off x="0" y="0"/>
+          <a:ext cx="0" cy="0"/>
+          <a:chOff x="0" y="0"/>
+          <a:chExt cx="0" cy="0"/>
+        </a:xfrm>
+      </p:grpSpPr>
+      <p:sp>
+        <p:nvSpPr>
+          <p:cNvPr id="2" name="Shape 0"/>
+          <p:cNvSpPr/>
+          <p:nvPr/>
+        </p:nvSpPr>
+        <p:spPr>
+          <a:xfrm>
+            <a:off x="548640" y="548640"/>
+            <a:ext cx="11094415" cy="10973"/>
+          </a:xfrm>
+          <a:prstGeom prst="rect">
+            <a:avLst/>
+          </a:prstGeom>
+          <a:solidFill>
+            <a:srgbClr val="004889"/>
+          </a:solidFill>
+          <a:ln/>
+        </p:spPr>
+      </p:sp>
+      <p:sp>
+        <p:nvSpPr>
+          <p:cNvPr id="3" name="Text 1"/>
+          <p:cNvSpPr/>
+          <p:nvPr/>
+        </p:nvSpPr>
+        <p:spPr>
+          <a:xfrm>
+            <a:off x="548640" y="1828800"/>
+            <a:ext cx="3657600" cy="3200400"/>
+          </a:xfrm>
+          <a:prstGeom prst="rect">
+            <a:avLst/>
+          </a:prstGeom>
+          <a:noFill/>
+          <a:ln/>
+        </p:spPr>
+        <p:txBody>
+          <a:bodyPr wrap="square" rtlCol="0" anchor="t"/>
+          <a:lstStyle/>
+          <a:p>
+            <a:pPr algn="l" indent="0" marL="0">
+              <a:buNone/>
+            </a:pPr>
+            <a:r>
+              <a:rPr lang="en-US" sz="12000" dirty="0">
+                <a:solidFill>
+                  <a:srgbClr val="AC916B"/>
+                </a:solidFill>
+                <a:latin typeface="Noto Serif SC" pitchFamily="34" charset="0"/>
+                <a:ea typeface="Noto Serif SC" pitchFamily="34" charset="-122"/>
+                <a:cs typeface="Noto Serif SC" pitchFamily="34" charset="-120"/>
+              </a:rPr>
+              <a:t>Ⅱ</a:t>
+            </a:r>
+            <a:endParaRPr lang="en-US" sz="12000" dirty="0"/>
+          </a:p>
+        </p:txBody>
+      </p:sp>
+      <p:sp>
+        <p:nvSpPr>
+          <p:cNvPr id="4" name="Text 2"/>
+          <p:cNvSpPr/>
+          <p:nvPr/>
+        </p:nvSpPr>
+        <p:spPr>
+          <a:xfrm>
+            <a:off x="5029200" y="2743200"/>
+            <a:ext cx="6400800" cy="1828800"/>
+          </a:xfrm>
+          <a:prstGeom prst="rect">
+            <a:avLst/>
+          </a:prstGeom>
+          <a:noFill/>
+          <a:ln/>
+        </p:spPr>
+        <p:txBody>
+          <a:bodyPr wrap="square" rtlCol="0" anchor="t"/>
+          <a:lstStyle/>
+          <a:p>
+            <a:pPr algn="l" indent="0" marL="0">
+              <a:buNone/>
+            </a:pPr>
+            <a:r>
+              <a:rPr lang="en-US" sz="2200" b="1" dirty="0">
+                <a:solidFill>
+                  <a:srgbClr val="004889"/>
+                </a:solidFill>
+                <a:latin typeface="Noto Serif SC" pitchFamily="34" charset="0"/>
+                <a:ea typeface="Noto Serif SC" pitchFamily="34" charset="-122"/>
+                <a:cs typeface="Noto Serif SC" pitchFamily="34" charset="-120"/>
+              </a:rPr>
+              <a:t>二、关键指标分析</a:t>
+            </a:r>
+            <a:endParaRPr lang="en-US" sz="2200" dirty="0"/>
+          </a:p>
+        </p:txBody>
+      </p:sp>
+      <p:sp>
+        <p:nvSpPr>
+          <p:cNvPr id="5" name="Shape 3"/>
+          <p:cNvSpPr/>
+          <p:nvPr/>
+        </p:nvSpPr>
+        <p:spPr>
+          <a:xfrm>
+            <a:off x="11612880" y="6400800"/>
+            <a:ext cx="118872" cy="118872"/>
+          </a:xfrm>
+          <a:prstGeom prst="rect">
+            <a:avLst/>
+          </a:prstGeom>
+          <a:solidFill>
+            <a:srgbClr val="AC916B"/>
+          </a:solidFill>
+          <a:ln/>
+        </p:spPr>
+      </p:sp>
+    </p:spTree>
+  </p:cSld>
+  <p:clrMapOvr>
+    <a:masterClrMapping/>
+  </p:clrMapOvr>
+</p:sld>
+</file>
+
+<file path=ppt/slides/slide8.xml><?xml version="1.0" encoding="utf-8"?>
+<p:sld xmlns:a="http://schemas.openxmlformats.org/drawingml/2006/main" xmlns:r="http://schemas.openxmlformats.org/officeDocument/2006/relationships" xmlns:p="http://schemas.openxmlformats.org/presentationml/2006/main">
+  <p:cSld name="Slide 8">
+    <p:bg>
+      <p:bgPr>
+        <a:solidFill>
+          <a:srgbClr val="FBF6EE"/>
+        </a:solidFill>
+      </p:bgPr>
+    </p:bg>
+    <p:spTree>
+      <p:nvGrpSpPr>
+        <p:cNvPr id="1" name=""/>
+        <p:cNvGrpSpPr/>
+        <p:nvPr/>
+      </p:nvGrpSpPr>
+      <p:grpSpPr>
+        <a:xfrm>
+          <a:off x="0" y="0"/>
+          <a:ext cx="0" cy="0"/>
+          <a:chOff x="0" y="0"/>
+          <a:chExt cx="0" cy="0"/>
+        </a:xfrm>
+      </p:grpSpPr>
+      <p:sp>
+        <p:nvSpPr>
+          <p:cNvPr id="2" name="Text 0"/>
+          <p:cNvSpPr/>
+          <p:nvPr/>
+        </p:nvSpPr>
+        <p:spPr>
+          <a:xfrm>
+            <a:off x="548640" y="274320"/>
+            <a:ext cx="11094415" cy="731520"/>
+          </a:xfrm>
+          <a:prstGeom prst="rect">
+            <a:avLst/>
+          </a:prstGeom>
+          <a:noFill/>
+          <a:ln/>
+        </p:spPr>
+        <p:txBody>
+          <a:bodyPr wrap="square" rtlCol="0" anchor="t"/>
+          <a:lstStyle/>
+          <a:p>
+            <a:pPr algn="ctr" indent="0" marL="0">
+              <a:buNone/>
+            </a:pPr>
+            <a:r>
+              <a:rPr lang="en-US" sz="1600" b="1" dirty="0">
+                <a:solidFill>
+                  <a:srgbClr val="004889"/>
+                </a:solidFill>
+                <a:latin typeface="Noto Serif SC" pitchFamily="34" charset="0"/>
+                <a:ea typeface="Noto Serif SC" pitchFamily="34" charset="-122"/>
+                <a:cs typeface="Noto Serif SC" pitchFamily="34" charset="-120"/>
+              </a:rPr>
+              <a:t>二、关键指标分析</a:t>
+            </a:r>
+            <a:endParaRPr lang="en-US" sz="1600" dirty="0"/>
+          </a:p>
+        </p:txBody>
+      </p:sp>
+      <p:sp>
+        <p:nvSpPr>
+          <p:cNvPr id="3" name="Shape 1"/>
+          <p:cNvSpPr/>
+          <p:nvPr/>
+        </p:nvSpPr>
+        <p:spPr>
+          <a:xfrm>
+            <a:off x="685800" y="1463040"/>
+            <a:ext cx="10820095" cy="4114800"/>
+          </a:xfrm>
+          <a:prstGeom prst="rect">
+            <a:avLst/>
+          </a:prstGeom>
+          <a:solidFill>
+            <a:srgbClr val="FBF6EE"/>
+          </a:solidFill>
+          <a:ln/>
+        </p:spPr>
+      </p:sp>
+      <p:sp>
+        <p:nvSpPr>
+          <p:cNvPr id="4" name="Text 2"/>
+          <p:cNvSpPr/>
+          <p:nvPr/>
+        </p:nvSpPr>
+        <p:spPr>
+          <a:xfrm>
+            <a:off x="822960" y="1645920"/>
+            <a:ext cx="10545775" cy="548640"/>
+          </a:xfrm>
+          <a:prstGeom prst="rect">
+            <a:avLst/>
+          </a:prstGeom>
+          <a:noFill/>
+          <a:ln/>
+        </p:spPr>
+        <p:txBody>
+          <a:bodyPr wrap="square" rtlCol="0" anchor="t"/>
+          <a:lstStyle/>
+          <a:p>
+            <a:pPr algn="ctr" indent="0" marL="0">
+              <a:buNone/>
+            </a:pPr>
+            <a:r>
+              <a:rPr lang="en-US" sz="800" b="1" dirty="0">
+                <a:solidFill>
+                  <a:srgbClr val="9A8E78"/>
+                </a:solidFill>
+                <a:latin typeface="Noto Serif SC" pitchFamily="34" charset="0"/>
+                <a:ea typeface="Noto Serif SC" pitchFamily="34" charset="-122"/>
+                <a:cs typeface="Noto Serif SC" pitchFamily="34" charset="-120"/>
+              </a:rPr>
+              <a:t>throughput</a:t>
+            </a:r>
+            <a:endParaRPr lang="en-US" sz="800" dirty="0"/>
+          </a:p>
+        </p:txBody>
+      </p:sp>
+      <p:sp>
+        <p:nvSpPr>
+          <p:cNvPr id="5" name="Text 3"/>
+          <p:cNvSpPr/>
+          <p:nvPr/>
+        </p:nvSpPr>
+        <p:spPr>
+          <a:xfrm>
+            <a:off x="822960" y="2377440"/>
+            <a:ext cx="10545775" cy="1097280"/>
+          </a:xfrm>
+          <a:prstGeom prst="rect">
+            <a:avLst/>
+          </a:prstGeom>
+          <a:noFill/>
+          <a:ln/>
+        </p:spPr>
+        <p:txBody>
+          <a:bodyPr wrap="square" rtlCol="0" anchor="t"/>
+          <a:lstStyle/>
+          <a:p>
+            <a:pPr algn="ctr" indent="0" marL="0">
+              <a:buNone/>
+            </a:pPr>
+            <a:r>
+              <a:rPr lang="en-US" sz="2800" b="1" dirty="0">
+                <a:solidFill>
+                  <a:srgbClr val="004889"/>
+                </a:solidFill>
+                <a:latin typeface="JetBrains Mono" pitchFamily="34" charset="0"/>
+                <a:ea typeface="JetBrains Mono" pitchFamily="34" charset="-122"/>
+                <a:cs typeface="JetBrains Mono" pitchFamily="34" charset="-120"/>
+              </a:rPr>
+              <a:t>↑12.0%</a:t>
+            </a:r>
+            <a:endParaRPr lang="en-US" sz="2800" dirty="0"/>
+          </a:p>
+        </p:txBody>
+      </p:sp>
+      <p:sp>
+        <p:nvSpPr>
+          <p:cNvPr id="6" name="Text 4"/>
+          <p:cNvSpPr/>
+          <p:nvPr/>
+        </p:nvSpPr>
+        <p:spPr>
+          <a:xfrm>
+            <a:off x="822960" y="3474720"/>
+            <a:ext cx="10545775" cy="457200"/>
+          </a:xfrm>
+          <a:prstGeom prst="rect">
+            <a:avLst/>
+          </a:prstGeom>
+          <a:noFill/>
+          <a:ln/>
+        </p:spPr>
+        <p:txBody>
+          <a:bodyPr wrap="square" rtlCol="0" anchor="t"/>
+          <a:lstStyle/>
+          <a:p>
+            <a:pPr algn="ctr" indent="0" marL="0">
+              <a:buNone/>
+            </a:pPr>
+            <a:r>
+              <a:rPr lang="en-US" sz="800" dirty="0">
+                <a:solidFill>
+                  <a:srgbClr val="9A8E78"/>
+                </a:solidFill>
+                <a:latin typeface="Noto Serif SC" pitchFamily="34" charset="0"/>
+                <a:ea typeface="Noto Serif SC" pitchFamily="34" charset="-122"/>
+                <a:cs typeface="Noto Serif SC" pitchFamily="34" charset="-120"/>
+              </a:rPr>
+              <a:t>同比</a:t>
+            </a:r>
+            <a:endParaRPr lang="en-US" sz="800" dirty="0"/>
+          </a:p>
+        </p:txBody>
+      </p:sp>
+      <p:sp>
+        <p:nvSpPr>
+          <p:cNvPr id="7" name="Text 5"/>
+          <p:cNvSpPr/>
+          <p:nvPr/>
+        </p:nvSpPr>
+        <p:spPr>
+          <a:xfrm>
+            <a:off x="822960" y="4023360"/>
+            <a:ext cx="10545775" cy="914400"/>
+          </a:xfrm>
+          <a:prstGeom prst="rect">
+            <a:avLst/>
+          </a:prstGeom>
+          <a:noFill/>
+          <a:ln/>
+        </p:spPr>
+        <p:txBody>
+          <a:bodyPr wrap="square" rtlCol="0" anchor="t"/>
+          <a:lstStyle/>
+          <a:p>
+            <a:pPr algn="ctr" indent="0" marL="0">
+              <a:buNone/>
+            </a:pPr>
+            <a:r>
+              <a:rPr lang="en-US" sz="2400" b="1" dirty="0">
+                <a:solidFill>
+                  <a:srgbClr val="004889"/>
+                </a:solidFill>
+                <a:latin typeface="JetBrains Mono" pitchFamily="34" charset="0"/>
+                <a:ea typeface="JetBrains Mono" pitchFamily="34" charset="-122"/>
+                <a:cs typeface="JetBrains Mono" pitchFamily="34" charset="-120"/>
+              </a:rPr>
+              <a:t>↑3.0%</a:t>
+            </a:r>
+            <a:endParaRPr lang="en-US" sz="2400" dirty="0"/>
+          </a:p>
+        </p:txBody>
+      </p:sp>
+      <p:sp>
+        <p:nvSpPr>
+          <p:cNvPr id="8" name="Text 6"/>
+          <p:cNvSpPr/>
+          <p:nvPr/>
+        </p:nvSpPr>
+        <p:spPr>
+          <a:xfrm>
+            <a:off x="822960" y="4937760"/>
+            <a:ext cx="10545775" cy="457200"/>
+          </a:xfrm>
+          <a:prstGeom prst="rect">
+            <a:avLst/>
+          </a:prstGeom>
+          <a:noFill/>
+          <a:ln/>
+        </p:spPr>
+        <p:txBody>
+          <a:bodyPr wrap="square" rtlCol="0" anchor="t"/>
+          <a:lstStyle/>
+          <a:p>
+            <a:pPr algn="ctr" indent="0" marL="0">
+              <a:buNone/>
+            </a:pPr>
+            <a:r>
+              <a:rPr lang="en-US" sz="800" dirty="0">
+                <a:solidFill>
+                  <a:srgbClr val="9A8E78"/>
+                </a:solidFill>
+                <a:latin typeface="Noto Serif SC" pitchFamily="34" charset="0"/>
+                <a:ea typeface="Noto Serif SC" pitchFamily="34" charset="-122"/>
+                <a:cs typeface="Noto Serif SC" pitchFamily="34" charset="-120"/>
+              </a:rPr>
+              <a:t>环比</a:t>
+            </a:r>
+            <a:endParaRPr lang="en-US" sz="800" dirty="0"/>
+          </a:p>
+        </p:txBody>
+      </p:sp>
+    </p:spTree>
+  </p:cSld>
+  <p:clrMapOvr>
+    <a:masterClrMapping/>
+  </p:clrMapOvr>
+</p:sld>
+</file>
+
+<file path=ppt/slides/slide9.xml><?xml version="1.0" encoding="utf-8"?>
+<p:sld xmlns:a="http://schemas.openxmlformats.org/drawingml/2006/main" xmlns:r="http://schemas.openxmlformats.org/officeDocument/2006/relationships" xmlns:p="http://schemas.openxmlformats.org/presentationml/2006/main">
+  <p:cSld name="Slide 9">
+    <p:bg>
+      <p:bgPr>
+        <a:solidFill>
+          <a:srgbClr val="FBF6EE"/>
+        </a:solidFill>
+      </p:bgPr>
+    </p:bg>
+    <p:spTree>
+      <p:nvGrpSpPr>
+        <p:cNvPr id="1" name=""/>
+        <p:cNvGrpSpPr/>
+        <p:nvPr/>
+      </p:nvGrpSpPr>
+      <p:grpSpPr>
+        <a:xfrm>
+          <a:off x="0" y="0"/>
+          <a:ext cx="0" cy="0"/>
+          <a:chOff x="0" y="0"/>
+          <a:chExt cx="0" cy="0"/>
+        </a:xfrm>
+      </p:grpSpPr>
+      <p:sp>
+        <p:nvSpPr>
+          <p:cNvPr id="2" name="Text 0"/>
+          <p:cNvSpPr/>
+          <p:nvPr/>
+        </p:nvSpPr>
+        <p:spPr>
+          <a:xfrm>
+            <a:off x="548640" y="274320"/>
+            <a:ext cx="11094415" cy="731520"/>
+          </a:xfrm>
+          <a:prstGeom prst="rect">
+            <a:avLst/>
+          </a:prstGeom>
+          <a:noFill/>
+          <a:ln/>
+        </p:spPr>
+        <p:txBody>
+          <a:bodyPr wrap="square" rtlCol="0" anchor="t"/>
+          <a:lstStyle/>
+          <a:p>
+            <a:pPr algn="l" indent="0" marL="0">
+              <a:buNone/>
+            </a:pPr>
+            <a:r>
+              <a:rPr lang="en-US" sz="1600" b="1" dirty="0">
+                <a:solidFill>
+                  <a:srgbClr val="004889"/>
+                </a:solidFill>
+                <a:latin typeface="Noto Serif SC" pitchFamily="34" charset="0"/>
+                <a:ea typeface="Noto Serif SC" pitchFamily="34" charset="-122"/>
+                <a:cs typeface="Noto Serif SC" pitchFamily="34" charset="-120"/>
               </a:rPr>
               <a:t>二、关键指标分析 - 统计数据</a:t>
             </a:r>
-            <a:endParaRPr lang="en-US" sz="1800" dirty="0"/>
+            <a:endParaRPr lang="en-US" sz="1600" dirty="0"/>
           </a:p>
         </p:txBody>
       </p:sp>
@@ -3968,20 +5910,20 @@
           </p:nvPr>
         </p:nvGraphicFramePr>
         <p:xfrm>
-          <a:off x="457200" y="1280160"/>
-          <a:ext cx="8229600" cy="5029200"/>
+          <a:off x="548640" y="1280160"/>
+          <a:ext cx="11094415" cy="5029200"/>
         </p:xfrm>
         <a:graphic>
           <a:graphicData uri="http://schemas.openxmlformats.org/drawingml/2006/table">
             <a:tbl>
               <a:tblPr/>
               <a:tblGrid>
-                <a:gridCol w="1371600"/>
-                <a:gridCol w="1371600"/>
-                <a:gridCol w="1371600"/>
-                <a:gridCol w="1371600"/>
-                <a:gridCol w="1371600"/>
-                <a:gridCol w="1371600"/>
+                <a:gridCol w="1849069"/>
+                <a:gridCol w="1849069"/>
+                <a:gridCol w="1849069"/>
+                <a:gridCol w="1849069"/>
+                <a:gridCol w="1849069"/>
+                <a:gridCol w="1849069"/>
               </a:tblGrid>
               <a:tr h="2514600">
                 <a:tc>
@@ -3995,18 +5937,18 @@
                       <a:r>
                         <a:rPr lang="en-US" sz="1100" b="1" dirty="0">
                           <a:solidFill>
-                            <a:srgbClr val="FFFFFF"/>
+                            <a:srgbClr val="FFFEFB"/>
                           </a:solidFill>
-                          <a:latin typeface="Calibri" pitchFamily="34" charset="0"/>
-                          <a:ea typeface="Calibri" pitchFamily="34" charset="-122"/>
-                          <a:cs typeface="Calibri" pitchFamily="34" charset="-120"/>
+                          <a:latin typeface="JetBrains Mono" pitchFamily="34" charset="0"/>
+                          <a:ea typeface="JetBrains Mono" pitchFamily="34" charset="-122"/>
+                          <a:cs typeface="JetBrains Mono" pitchFamily="34" charset="-120"/>
                         </a:rPr>
                         <a:t>指标</a:t>
                       </a:r>
                       <a:endParaRPr lang="en-US" sz="1100" dirty="0">
-                        <a:latin typeface="Calibri" charset="0"/>
-                        <a:ea typeface="Calibri" charset="0"/>
-                        <a:cs typeface="Calibri" charset="0"/>
+                        <a:latin typeface="JetBrains Mono" charset="0"/>
+                        <a:ea typeface="JetBrains Mono" charset="0"/>
+                        <a:cs typeface="JetBrains Mono" charset="0"/>
                       </a:endParaRPr>
                     </a:p>
                   </a:txBody>
@@ -4024,7 +5966,7 @@
                       <a:noFill/>
                     </a:lnB>
                     <a:solidFill>
-                      <a:srgbClr val="1E3A5F"/>
+                      <a:srgbClr val="004889"/>
                     </a:solidFill>
                   </a:tcPr>
                 </a:tc>
@@ -4039,18 +5981,18 @@
                       <a:r>
                         <a:rPr lang="en-US" sz="1100" b="1" dirty="0">
                           <a:solidFill>
-                            <a:srgbClr val="FFFFFF"/>
+                            <a:srgbClr val="FFFEFB"/>
                           </a:solidFill>
-                          <a:latin typeface="Calibri" pitchFamily="34" charset="0"/>
-                          <a:ea typeface="Calibri" pitchFamily="34" charset="-122"/>
-                          <a:cs typeface="Calibri" pitchFamily="34" charset="-120"/>
+                          <a:latin typeface="JetBrains Mono" pitchFamily="34" charset="0"/>
+                          <a:ea typeface="JetBrains Mono" pitchFamily="34" charset="-122"/>
+                          <a:cs typeface="JetBrains Mono" pitchFamily="34" charset="-120"/>
                         </a:rPr>
                         <a:t>均值</a:t>
                       </a:r>
                       <a:endParaRPr lang="en-US" sz="1100" dirty="0">
-                        <a:latin typeface="Calibri" charset="0"/>
-                        <a:ea typeface="Calibri" charset="0"/>
-                        <a:cs typeface="Calibri" charset="0"/>
+                        <a:latin typeface="JetBrains Mono" charset="0"/>
+                        <a:ea typeface="JetBrains Mono" charset="0"/>
+                        <a:cs typeface="JetBrains Mono" charset="0"/>
                       </a:endParaRPr>
                     </a:p>
                   </a:txBody>
@@ -4068,7 +6010,7 @@
                       <a:noFill/>
                     </a:lnB>
                     <a:solidFill>
-                      <a:srgbClr val="1E3A5F"/>
+                      <a:srgbClr val="004889"/>
                     </a:solidFill>
                   </a:tcPr>
                 </a:tc>
@@ -4083,18 +6025,18 @@
                       <a:r>
                         <a:rPr lang="en-US" sz="1100" b="1" dirty="0">
                           <a:solidFill>
-                            <a:srgbClr val="FFFFFF"/>
+                            <a:srgbClr val="FFFEFB"/>
                           </a:solidFill>
-                          <a:latin typeface="Calibri" pitchFamily="34" charset="0"/>
-                          <a:ea typeface="Calibri" pitchFamily="34" charset="-122"/>
-                          <a:cs typeface="Calibri" pitchFamily="34" charset="-120"/>
+                          <a:latin typeface="JetBrains Mono" pitchFamily="34" charset="0"/>
+                          <a:ea typeface="JetBrains Mono" pitchFamily="34" charset="-122"/>
+                          <a:cs typeface="JetBrains Mono" pitchFamily="34" charset="-120"/>
                         </a:rPr>
                         <a:t>中位数</a:t>
                       </a:r>
                       <a:endParaRPr lang="en-US" sz="1100" dirty="0">
-                        <a:latin typeface="Calibri" charset="0"/>
-                        <a:ea typeface="Calibri" charset="0"/>
-                        <a:cs typeface="Calibri" charset="0"/>
+                        <a:latin typeface="JetBrains Mono" charset="0"/>
+                        <a:ea typeface="JetBrains Mono" charset="0"/>
+                        <a:cs typeface="JetBrains Mono" charset="0"/>
                       </a:endParaRPr>
                     </a:p>
                   </a:txBody>
@@ -4112,7 +6054,7 @@
                       <a:noFill/>
                     </a:lnB>
                     <a:solidFill>
-                      <a:srgbClr val="1E3A5F"/>
+                      <a:srgbClr val="004889"/>
                     </a:solidFill>
                   </a:tcPr>
                 </a:tc>
@@ -4127,18 +6069,18 @@
                       <a:r>
                         <a:rPr lang="en-US" sz="1100" b="1" dirty="0">
                           <a:solidFill>
-                            <a:srgbClr val="FFFFFF"/>
+                            <a:srgbClr val="FFFEFB"/>
                           </a:solidFill>
-                          <a:latin typeface="Calibri" pitchFamily="34" charset="0"/>
-                          <a:ea typeface="Calibri" pitchFamily="34" charset="-122"/>
-                          <a:cs typeface="Calibri" pitchFamily="34" charset="-120"/>
+                          <a:latin typeface="JetBrains Mono" pitchFamily="34" charset="0"/>
+                          <a:ea typeface="JetBrains Mono" pitchFamily="34" charset="-122"/>
+                          <a:cs typeface="JetBrains Mono" pitchFamily="34" charset="-120"/>
                         </a:rPr>
                         <a:t>标准差</a:t>
                       </a:r>
                       <a:endParaRPr lang="en-US" sz="1100" dirty="0">
-                        <a:latin typeface="Calibri" charset="0"/>
-                        <a:ea typeface="Calibri" charset="0"/>
-                        <a:cs typeface="Calibri" charset="0"/>
+                        <a:latin typeface="JetBrains Mono" charset="0"/>
+                        <a:ea typeface="JetBrains Mono" charset="0"/>
+                        <a:cs typeface="JetBrains Mono" charset="0"/>
                       </a:endParaRPr>
                     </a:p>
                   </a:txBody>
@@ -4156,7 +6098,7 @@
                       <a:noFill/>
                     </a:lnB>
                     <a:solidFill>
-                      <a:srgbClr val="1E3A5F"/>
+                      <a:srgbClr val="004889"/>
                     </a:solidFill>
                   </a:tcPr>
                 </a:tc>
@@ -4171,18 +6113,18 @@
                       <a:r>
                         <a:rPr lang="en-US" sz="1100" b="1" dirty="0">
                           <a:solidFill>
-                            <a:srgbClr val="FFFFFF"/>
+                            <a:srgbClr val="FFFEFB"/>
                           </a:solidFill>
-                          <a:latin typeface="Calibri" pitchFamily="34" charset="0"/>
-                          <a:ea typeface="Calibri" pitchFamily="34" charset="-122"/>
-                          <a:cs typeface="Calibri" pitchFamily="34" charset="-120"/>
+                          <a:latin typeface="JetBrains Mono" pitchFamily="34" charset="0"/>
+                          <a:ea typeface="JetBrains Mono" pitchFamily="34" charset="-122"/>
+                          <a:cs typeface="JetBrains Mono" pitchFamily="34" charset="-120"/>
                         </a:rPr>
                         <a:t>最小值</a:t>
                       </a:r>
                       <a:endParaRPr lang="en-US" sz="1100" dirty="0">
-                        <a:latin typeface="Calibri" charset="0"/>
-                        <a:ea typeface="Calibri" charset="0"/>
-                        <a:cs typeface="Calibri" charset="0"/>
+                        <a:latin typeface="JetBrains Mono" charset="0"/>
+                        <a:ea typeface="JetBrains Mono" charset="0"/>
+                        <a:cs typeface="JetBrains Mono" charset="0"/>
                       </a:endParaRPr>
                     </a:p>
                   </a:txBody>
@@ -4200,7 +6142,7 @@
                       <a:noFill/>
                     </a:lnB>
                     <a:solidFill>
-                      <a:srgbClr val="1E3A5F"/>
+                      <a:srgbClr val="004889"/>
                     </a:solidFill>
                   </a:tcPr>
                 </a:tc>
@@ -4215,18 +6157,18 @@
                       <a:r>
                         <a:rPr lang="en-US" sz="1100" b="1" dirty="0">
                           <a:solidFill>
-                            <a:srgbClr val="FFFFFF"/>
+                            <a:srgbClr val="FFFEFB"/>
                           </a:solidFill>
-                          <a:latin typeface="Calibri" pitchFamily="34" charset="0"/>
-                          <a:ea typeface="Calibri" pitchFamily="34" charset="-122"/>
-                          <a:cs typeface="Calibri" pitchFamily="34" charset="-120"/>
+                          <a:latin typeface="JetBrains Mono" pitchFamily="34" charset="0"/>
+                          <a:ea typeface="JetBrains Mono" pitchFamily="34" charset="-122"/>
+                          <a:cs typeface="JetBrains Mono" pitchFamily="34" charset="-120"/>
                         </a:rPr>
                         <a:t>最大值</a:t>
                       </a:r>
                       <a:endParaRPr lang="en-US" sz="1100" dirty="0">
-                        <a:latin typeface="Calibri" charset="0"/>
-                        <a:ea typeface="Calibri" charset="0"/>
-                        <a:cs typeface="Calibri" charset="0"/>
+                        <a:latin typeface="JetBrains Mono" charset="0"/>
+                        <a:ea typeface="JetBrains Mono" charset="0"/>
+                        <a:cs typeface="JetBrains Mono" charset="0"/>
                       </a:endParaRPr>
                     </a:p>
                   </a:txBody>
@@ -4244,7 +6186,7 @@
                       <a:noFill/>
                     </a:lnB>
                     <a:solidFill>
-                      <a:srgbClr val="1E3A5F"/>
+                      <a:srgbClr val="004889"/>
                     </a:solidFill>
                   </a:tcPr>
                 </a:tc>
@@ -4263,16 +6205,16 @@
                           <a:solidFill>
                             <a:srgbClr val="000000"/>
                           </a:solidFill>
-                          <a:latin typeface="Calibri" pitchFamily="34" charset="0"/>
-                          <a:ea typeface="Calibri" pitchFamily="34" charset="-122"/>
-                          <a:cs typeface="Calibri" pitchFamily="34" charset="-120"/>
+                          <a:latin typeface="JetBrains Mono" pitchFamily="34" charset="0"/>
+                          <a:ea typeface="JetBrains Mono" pitchFamily="34" charset="-122"/>
+                          <a:cs typeface="JetBrains Mono" pitchFamily="34" charset="-120"/>
                         </a:rPr>
                         <a:t>throughput</a:t>
                       </a:r>
                       <a:endParaRPr lang="en-US" sz="1100" dirty="0">
-                        <a:latin typeface="Calibri" charset="0"/>
-                        <a:ea typeface="Calibri" charset="0"/>
-                        <a:cs typeface="Calibri" charset="0"/>
+                        <a:latin typeface="JetBrains Mono" charset="0"/>
+                        <a:ea typeface="JetBrains Mono" charset="0"/>
+                        <a:cs typeface="JetBrains Mono" charset="0"/>
                       </a:endParaRPr>
                     </a:p>
                   </a:txBody>
@@ -4304,16 +6246,16 @@
                           <a:solidFill>
                             <a:srgbClr val="000000"/>
                           </a:solidFill>
-                          <a:latin typeface="Calibri" pitchFamily="34" charset="0"/>
-                          <a:ea typeface="Calibri" pitchFamily="34" charset="-122"/>
-                          <a:cs typeface="Calibri" pitchFamily="34" charset="-120"/>
+                          <a:latin typeface="JetBrains Mono" pitchFamily="34" charset="0"/>
+                          <a:ea typeface="JetBrains Mono" pitchFamily="34" charset="-122"/>
+                          <a:cs typeface="JetBrains Mono" pitchFamily="34" charset="-120"/>
                         </a:rPr>
                         <a:t>3,166.87</a:t>
                       </a:r>
                       <a:endParaRPr lang="en-US" sz="1100" dirty="0">
-                        <a:latin typeface="Calibri" charset="0"/>
-                        <a:ea typeface="Calibri" charset="0"/>
-                        <a:cs typeface="Calibri" charset="0"/>
+                        <a:latin typeface="JetBrains Mono" charset="0"/>
+                        <a:ea typeface="JetBrains Mono" charset="0"/>
+                        <a:cs typeface="JetBrains Mono" charset="0"/>
                       </a:endParaRPr>
                     </a:p>
                   </a:txBody>
@@ -4345,16 +6287,16 @@
                           <a:solidFill>
                             <a:srgbClr val="000000"/>
                           </a:solidFill>
-                          <a:latin typeface="Calibri" pitchFamily="34" charset="0"/>
-                          <a:ea typeface="Calibri" pitchFamily="34" charset="-122"/>
-                          <a:cs typeface="Calibri" pitchFamily="34" charset="-120"/>
+                          <a:latin typeface="JetBrains Mono" pitchFamily="34" charset="0"/>
+                          <a:ea typeface="JetBrains Mono" pitchFamily="34" charset="-122"/>
+                          <a:cs typeface="JetBrains Mono" pitchFamily="34" charset="-120"/>
                         </a:rPr>
                         <a:t>-</a:t>
                       </a:r>
                       <a:endParaRPr lang="en-US" sz="1100" dirty="0">
-                        <a:latin typeface="Calibri" charset="0"/>
-                        <a:ea typeface="Calibri" charset="0"/>
-                        <a:cs typeface="Calibri" charset="0"/>
+                        <a:latin typeface="JetBrains Mono" charset="0"/>
+                        <a:ea typeface="JetBrains Mono" charset="0"/>
+                        <a:cs typeface="JetBrains Mono" charset="0"/>
                       </a:endParaRPr>
                     </a:p>
                   </a:txBody>
@@ -4386,16 +6328,16 @@
                           <a:solidFill>
                             <a:srgbClr val="000000"/>
                           </a:solidFill>
-                          <a:latin typeface="Calibri" pitchFamily="34" charset="0"/>
-                          <a:ea typeface="Calibri" pitchFamily="34" charset="-122"/>
-                          <a:cs typeface="Calibri" pitchFamily="34" charset="-120"/>
+                          <a:latin typeface="JetBrains Mono" pitchFamily="34" charset="0"/>
+                          <a:ea typeface="JetBrains Mono" pitchFamily="34" charset="-122"/>
+                          <a:cs typeface="JetBrains Mono" pitchFamily="34" charset="-120"/>
                         </a:rPr>
                         <a:t>-</a:t>
                       </a:r>
                       <a:endParaRPr lang="en-US" sz="1100" dirty="0">
-                        <a:latin typeface="Calibri" charset="0"/>
-                        <a:ea typeface="Calibri" charset="0"/>
-                        <a:cs typeface="Calibri" charset="0"/>
+                        <a:latin typeface="JetBrains Mono" charset="0"/>
+                        <a:ea typeface="JetBrains Mono" charset="0"/>
+                        <a:cs typeface="JetBrains Mono" charset="0"/>
                       </a:endParaRPr>
                     </a:p>
                   </a:txBody>
@@ -4427,16 +6369,16 @@
                           <a:solidFill>
                             <a:srgbClr val="000000"/>
                           </a:solidFill>
-                          <a:latin typeface="Calibri" pitchFamily="34" charset="0"/>
-                          <a:ea typeface="Calibri" pitchFamily="34" charset="-122"/>
-                          <a:cs typeface="Calibri" pitchFamily="34" charset="-120"/>
+                          <a:latin typeface="JetBrains Mono" pitchFamily="34" charset="0"/>
+                          <a:ea typeface="JetBrains Mono" pitchFamily="34" charset="-122"/>
+                          <a:cs typeface="JetBrains Mono" pitchFamily="34" charset="-120"/>
                         </a:rPr>
                         <a:t>1,800.00</a:t>
                       </a:r>
                       <a:endParaRPr lang="en-US" sz="1100" dirty="0">
-                        <a:latin typeface="Calibri" charset="0"/>
-                        <a:ea typeface="Calibri" charset="0"/>
-                        <a:cs typeface="Calibri" charset="0"/>
+                        <a:latin typeface="JetBrains Mono" charset="0"/>
+                        <a:ea typeface="JetBrains Mono" charset="0"/>
+                        <a:cs typeface="JetBrains Mono" charset="0"/>
                       </a:endParaRPr>
                     </a:p>
                   </a:txBody>
@@ -4468,16 +6410,16 @@
                           <a:solidFill>
                             <a:srgbClr val="000000"/>
                           </a:solidFill>
-                          <a:latin typeface="Calibri" pitchFamily="34" charset="0"/>
-                          <a:ea typeface="Calibri" pitchFamily="34" charset="-122"/>
-                          <a:cs typeface="Calibri" pitchFamily="34" charset="-120"/>
+                          <a:latin typeface="JetBrains Mono" pitchFamily="34" charset="0"/>
+                          <a:ea typeface="JetBrains Mono" pitchFamily="34" charset="-122"/>
+                          <a:cs typeface="JetBrains Mono" pitchFamily="34" charset="-120"/>
                         </a:rPr>
                         <a:t>4,500.50</a:t>
                       </a:r>
                       <a:endParaRPr lang="en-US" sz="1100" dirty="0">
-                        <a:latin typeface="Calibri" charset="0"/>
-                        <a:ea typeface="Calibri" charset="0"/>
-                        <a:cs typeface="Calibri" charset="0"/>
+                        <a:latin typeface="JetBrains Mono" charset="0"/>
+                        <a:ea typeface="JetBrains Mono" charset="0"/>
+                        <a:cs typeface="JetBrains Mono" charset="0"/>
                       </a:endParaRPr>
                     </a:p>
                   </a:txBody>
